--- a/docs/test/golden-outputs/p3-seocho-r3/seocho_owner_r3_basic.pptx
+++ b/docs/test/golden-outputs/p3-seocho-r3/seocho_owner_r3_basic.pptx
@@ -2021,7 +2021,7 @@
                 <a:ea typeface="맑은 고딕" pitchFamily="34" charset="-122"/>
                 <a:cs typeface="맑은 고딕" pitchFamily="34" charset="-120"/>
               </a:rPr>
-              <a:t>2026.09.21  |  수석 자문역  |  CREDEAL 투자자문</a:t>
+              <a:t>2026.09.22  |  수석 자문역  |  CREDEAL 투자자문</a:t>
             </a:r>
             <a:endParaRPr lang="en-US" sz="900" dirty="0"/>
           </a:p>

--- a/docs/test/golden-outputs/p3-seocho-r3/seocho_owner_r3_basic.pptx
+++ b/docs/test/golden-outputs/p3-seocho-r3/seocho_owner_r3_basic.pptx
@@ -1758,7 +1758,7 @@
               <a:buNone/>
             </a:pPr>
             <a:r>
-              <a:rPr lang="en-US" sz="4000" b="1" dirty="0">
+              <a:rPr lang="en-US" sz="3000" b="1" dirty="0">
                 <a:solidFill>
                   <a:srgbClr val="FFFFFF"/>
                 </a:solidFill>
@@ -1766,9 +1766,9 @@
                 <a:ea typeface="맑은 고딕" pitchFamily="34" charset="-122"/>
                 <a:cs typeface="맑은 고딕" pitchFamily="34" charset="-120"/>
               </a:rPr>
-              <a:t>서초동 FM빌딩 사옥용 매각안내서</a:t>
-            </a:r>
-            <a:endParaRPr lang="en-US" sz="4000" dirty="0"/>
+              <a:t>서울특별시 서초구 서초동 1364-28 투자설명서</a:t>
+            </a:r>
+            <a:endParaRPr lang="en-US" sz="3000" dirty="0"/>
           </a:p>
         </p:txBody>
       </p:sp>
@@ -2071,7 +2071,7 @@
                 <a:ea typeface="맑은 고딕" pitchFamily="34" charset="-122"/>
                 <a:cs typeface="맑은 고딕" pitchFamily="34" charset="-120"/>
               </a:rPr>
-              <a:t>CREDEAL 투자자문</a:t>
+              <a:t>CREDEAL</a:t>
             </a:r>
             <a:endParaRPr lang="en-US" sz="1100" dirty="0"/>
           </a:p>
@@ -2110,7 +2110,7 @@
                 <a:ea typeface="맑은 고딕" pitchFamily="34" charset="-122"/>
                 <a:cs typeface="맑은 고딕" pitchFamily="34" charset="-120"/>
               </a:rPr>
-              <a:t>2026.09.22  |  수석 자문역  |  CREDEAL 투자자문</a:t>
+              <a:t>2026.09.22  |  담당자  |  CREDEAL</a:t>
             </a:r>
             <a:endParaRPr lang="en-US" sz="900" dirty="0"/>
           </a:p>
@@ -2149,7 +2149,7 @@
                 <a:ea typeface="맑은 고딕" pitchFamily="34" charset="-122"/>
                 <a:cs typeface="맑은 고딕" pitchFamily="34" charset="-120"/>
               </a:rPr>
-              <a:t>CRE DEAL   |   IM-SEOCHO-FM-R3</a:t>
+              <a:t>CRE DEAL</a:t>
             </a:r>
             <a:endParaRPr lang="en-US" sz="800" dirty="0"/>
           </a:p>
@@ -2396,7 +2396,7 @@
                 <a:ea typeface="맑은 고딕" pitchFamily="34" charset="-122"/>
                 <a:cs typeface="맑은 고딕" pitchFamily="34" charset="-120"/>
               </a:rPr>
-              <a:t>양재역 초역세권 신분당선 호재 프리미엄 사옥</a:t>
+              <a:t>사옥 즉시 입주 가능, 임대료 절감</a:t>
             </a:r>
             <a:endParaRPr lang="en-US" sz="1500" dirty="0"/>
           </a:p>
@@ -2749,7 +2749,7 @@
                 <a:ea typeface="맑은 고딕" pitchFamily="34" charset="-122"/>
                 <a:cs typeface="맑은 고딕" pitchFamily="34" charset="-120"/>
               </a:rPr>
-              <a:t>596.0㎡ (180.3평)</a:t>
+              <a:t>596㎡ (180.3평)</a:t>
             </a:r>
             <a:endParaRPr lang="en-US" sz="1400" dirty="0"/>
           </a:p>
@@ -2859,7 +2859,7 @@
                 <a:ea typeface="맑은 고딕" pitchFamily="34" charset="-122"/>
                 <a:cs typeface="맑은 고딕" pitchFamily="34" charset="-120"/>
               </a:rPr>
-              <a:t>2,104.88㎡ (636.7평)</a:t>
+              <a:t>2104.88㎡ (636.7평)</a:t>
             </a:r>
             <a:endParaRPr lang="en-US" sz="1200" dirty="0"/>
           </a:p>
@@ -3035,7 +3035,7 @@
                 <a:ea typeface="맑은 고딕" pitchFamily="34" charset="-122"/>
                 <a:cs typeface="맑은 고딕" pitchFamily="34" charset="-120"/>
               </a:rPr>
-              <a:t>규모</a:t>
+              <a:t>준공연도</a:t>
             </a:r>
             <a:endParaRPr lang="en-US" sz="950" dirty="0"/>
           </a:p>
@@ -3050,6 +3050,116 @@
         <p:spPr>
           <a:xfrm>
             <a:off x="3473120" y="3438144"/>
+            <a:ext cx="2311832" cy="274320"/>
+          </a:xfrm>
+          <a:prstGeom prst="rect">
+            <a:avLst/>
+          </a:prstGeom>
+          <a:noFill/>
+          <a:ln/>
+        </p:spPr>
+        <p:txBody>
+          <a:bodyPr wrap="square" lIns="0" tIns="0" rIns="0" bIns="0" rtlCol="0" anchor="ctr">
+            <a:normAutofit/>
+          </a:bodyPr>
+          <a:lstStyle/>
+          <a:p>
+            <a:pPr indent="0" marL="0">
+              <a:lnSpc>
+                <a:spcPct val="100000"/>
+              </a:lnSpc>
+              <a:buNone/>
+            </a:pPr>
+            <a:r>
+              <a:rPr lang="en-US" sz="2200" b="1" dirty="0">
+                <a:solidFill>
+                  <a:srgbClr val="132A3A"/>
+                </a:solidFill>
+                <a:latin typeface="맑은 고딕" pitchFamily="34" charset="0"/>
+                <a:ea typeface="맑은 고딕" pitchFamily="34" charset="-122"/>
+                <a:cs typeface="맑은 고딕" pitchFamily="34" charset="-120"/>
+              </a:rPr>
+              <a:t>2005년</a:t>
+            </a:r>
+            <a:endParaRPr lang="en-US" sz="2200" dirty="0"/>
+          </a:p>
+        </p:txBody>
+      </p:sp>
+      <p:sp>
+        <p:nvSpPr>
+          <p:cNvPr id="26" name="Shape 24"/>
+          <p:cNvSpPr/>
+          <p:nvPr/>
+        </p:nvSpPr>
+        <p:spPr>
+          <a:xfrm>
+            <a:off x="6114136" y="3090672"/>
+            <a:ext cx="2641016" cy="960120"/>
+          </a:xfrm>
+          <a:prstGeom prst="roundRect">
+            <a:avLst>
+              <a:gd name="adj" fmla="val 5714"/>
+            </a:avLst>
+          </a:prstGeom>
+          <a:solidFill>
+            <a:srgbClr val="F3F6F7"/>
+          </a:solidFill>
+          <a:ln w="6350">
+            <a:solidFill>
+              <a:srgbClr val="CBD5E0"/>
+            </a:solidFill>
+            <a:prstDash val="solid"/>
+          </a:ln>
+        </p:spPr>
+      </p:sp>
+      <p:sp>
+        <p:nvSpPr>
+          <p:cNvPr id="27" name="Text 25"/>
+          <p:cNvSpPr/>
+          <p:nvPr/>
+        </p:nvSpPr>
+        <p:spPr>
+          <a:xfrm>
+            <a:off x="6278728" y="3218688"/>
+            <a:ext cx="2311832" cy="201168"/>
+          </a:xfrm>
+          <a:prstGeom prst="rect">
+            <a:avLst/>
+          </a:prstGeom>
+          <a:noFill/>
+          <a:ln/>
+        </p:spPr>
+        <p:txBody>
+          <a:bodyPr wrap="square" lIns="0" tIns="0" rIns="0" bIns="0" rtlCol="0" anchor="ctr"/>
+          <a:lstStyle/>
+          <a:p>
+            <a:pPr indent="0" marL="0">
+              <a:buNone/>
+            </a:pPr>
+            <a:r>
+              <a:rPr lang="en-US" sz="950" dirty="0">
+                <a:solidFill>
+                  <a:srgbClr val="5B6B73"/>
+                </a:solidFill>
+                <a:latin typeface="맑은 고딕" pitchFamily="34" charset="0"/>
+                <a:ea typeface="맑은 고딕" pitchFamily="34" charset="-122"/>
+                <a:cs typeface="맑은 고딕" pitchFamily="34" charset="-120"/>
+              </a:rPr>
+              <a:t>층수</a:t>
+            </a:r>
+            <a:endParaRPr lang="en-US" sz="950" dirty="0"/>
+          </a:p>
+        </p:txBody>
+      </p:sp>
+      <p:sp>
+        <p:nvSpPr>
+          <p:cNvPr id="28" name="Text 26"/>
+          <p:cNvSpPr/>
+          <p:nvPr/>
+        </p:nvSpPr>
+        <p:spPr>
+          <a:xfrm>
+            <a:off x="6278728" y="3438144"/>
             <a:ext cx="2311832" cy="274320"/>
           </a:xfrm>
           <a:prstGeom prst="rect">
@@ -3087,13 +3197,13 @@
       </p:sp>
       <p:sp>
         <p:nvSpPr>
-          <p:cNvPr id="26" name="Shape 24"/>
-          <p:cNvSpPr/>
-          <p:nvPr/>
-        </p:nvSpPr>
-        <p:spPr>
-          <a:xfrm>
-            <a:off x="6114136" y="3090672"/>
+          <p:cNvPr id="29" name="Shape 27"/>
+          <p:cNvSpPr/>
+          <p:nvPr/>
+        </p:nvSpPr>
+        <p:spPr>
+          <a:xfrm>
+            <a:off x="8919743" y="3090672"/>
             <a:ext cx="2641016" cy="960120"/>
           </a:xfrm>
           <a:prstGeom prst="roundRect">
@@ -3114,13 +3224,13 @@
       </p:sp>
       <p:sp>
         <p:nvSpPr>
-          <p:cNvPr id="27" name="Text 25"/>
-          <p:cNvSpPr/>
-          <p:nvPr/>
-        </p:nvSpPr>
-        <p:spPr>
-          <a:xfrm>
-            <a:off x="6278728" y="3218688"/>
+          <p:cNvPr id="30" name="Text 28"/>
+          <p:cNvSpPr/>
+          <p:nvPr/>
+        </p:nvSpPr>
+        <p:spPr>
+          <a:xfrm>
+            <a:off x="9084335" y="3218688"/>
             <a:ext cx="2311832" cy="201168"/>
           </a:xfrm>
           <a:prstGeom prst="rect">
@@ -3145,7 +3255,7 @@
                 <a:ea typeface="맑은 고딕" pitchFamily="34" charset="-122"/>
                 <a:cs typeface="맑은 고딕" pitchFamily="34" charset="-120"/>
               </a:rPr>
-              <a:t>준공연도</a:t>
+              <a:t>주차</a:t>
             </a:r>
             <a:endParaRPr lang="en-US" sz="950" dirty="0"/>
           </a:p>
@@ -3153,13 +3263,13 @@
       </p:sp>
       <p:sp>
         <p:nvSpPr>
-          <p:cNvPr id="28" name="Text 26"/>
-          <p:cNvSpPr/>
-          <p:nvPr/>
-        </p:nvSpPr>
-        <p:spPr>
-          <a:xfrm>
-            <a:off x="6278728" y="3438144"/>
+          <p:cNvPr id="31" name="Text 29"/>
+          <p:cNvSpPr/>
+          <p:nvPr/>
+        </p:nvSpPr>
+        <p:spPr>
+          <a:xfrm>
+            <a:off x="9084335" y="3438144"/>
             <a:ext cx="2311832" cy="274320"/>
           </a:xfrm>
           <a:prstGeom prst="rect">
@@ -3181,7 +3291,7 @@
               <a:buNone/>
             </a:pPr>
             <a:r>
-              <a:rPr lang="en-US" sz="2200" b="1" dirty="0">
+              <a:rPr lang="en-US" sz="1800" b="1" dirty="0">
                 <a:solidFill>
                   <a:srgbClr val="132A3A"/>
                 </a:solidFill>
@@ -3189,119 +3299,9 @@
                 <a:ea typeface="맑은 고딕" pitchFamily="34" charset="-122"/>
                 <a:cs typeface="맑은 고딕" pitchFamily="34" charset="-120"/>
               </a:rPr>
-              <a:t>2005년</a:t>
-            </a:r>
-            <a:endParaRPr lang="en-US" sz="2200" dirty="0"/>
-          </a:p>
-        </p:txBody>
-      </p:sp>
-      <p:sp>
-        <p:nvSpPr>
-          <p:cNvPr id="29" name="Shape 27"/>
-          <p:cNvSpPr/>
-          <p:nvPr/>
-        </p:nvSpPr>
-        <p:spPr>
-          <a:xfrm>
-            <a:off x="8919743" y="3090672"/>
-            <a:ext cx="2641016" cy="960120"/>
-          </a:xfrm>
-          <a:prstGeom prst="roundRect">
-            <a:avLst>
-              <a:gd name="adj" fmla="val 5714"/>
-            </a:avLst>
-          </a:prstGeom>
-          <a:solidFill>
-            <a:srgbClr val="F3F6F7"/>
-          </a:solidFill>
-          <a:ln w="6350">
-            <a:solidFill>
-              <a:srgbClr val="CBD5E0"/>
-            </a:solidFill>
-            <a:prstDash val="solid"/>
-          </a:ln>
-        </p:spPr>
-      </p:sp>
-      <p:sp>
-        <p:nvSpPr>
-          <p:cNvPr id="30" name="Text 28"/>
-          <p:cNvSpPr/>
-          <p:nvPr/>
-        </p:nvSpPr>
-        <p:spPr>
-          <a:xfrm>
-            <a:off x="9084335" y="3218688"/>
-            <a:ext cx="2311832" cy="201168"/>
-          </a:xfrm>
-          <a:prstGeom prst="rect">
-            <a:avLst/>
-          </a:prstGeom>
-          <a:noFill/>
-          <a:ln/>
-        </p:spPr>
-        <p:txBody>
-          <a:bodyPr wrap="square" lIns="0" tIns="0" rIns="0" bIns="0" rtlCol="0" anchor="ctr"/>
-          <a:lstStyle/>
-          <a:p>
-            <a:pPr indent="0" marL="0">
-              <a:buNone/>
-            </a:pPr>
-            <a:r>
-              <a:rPr lang="en-US" sz="950" dirty="0">
-                <a:solidFill>
-                  <a:srgbClr val="5B6B73"/>
-                </a:solidFill>
-                <a:latin typeface="맑은 고딕" pitchFamily="34" charset="0"/>
-                <a:ea typeface="맑은 고딕" pitchFamily="34" charset="-122"/>
-                <a:cs typeface="맑은 고딕" pitchFamily="34" charset="-120"/>
-              </a:rPr>
-              <a:t>주차대수</a:t>
-            </a:r>
-            <a:endParaRPr lang="en-US" sz="950" dirty="0"/>
-          </a:p>
-        </p:txBody>
-      </p:sp>
-      <p:sp>
-        <p:nvSpPr>
-          <p:cNvPr id="31" name="Text 29"/>
-          <p:cNvSpPr/>
-          <p:nvPr/>
-        </p:nvSpPr>
-        <p:spPr>
-          <a:xfrm>
-            <a:off x="9084335" y="3438144"/>
-            <a:ext cx="2311832" cy="274320"/>
-          </a:xfrm>
-          <a:prstGeom prst="rect">
-            <a:avLst/>
-          </a:prstGeom>
-          <a:noFill/>
-          <a:ln/>
-        </p:spPr>
-        <p:txBody>
-          <a:bodyPr wrap="square" lIns="0" tIns="0" rIns="0" bIns="0" rtlCol="0" anchor="ctr">
-            <a:normAutofit/>
-          </a:bodyPr>
-          <a:lstStyle/>
-          <a:p>
-            <a:pPr indent="0" marL="0">
-              <a:lnSpc>
-                <a:spcPct val="100000"/>
-              </a:lnSpc>
-              <a:buNone/>
-            </a:pPr>
-            <a:r>
-              <a:rPr lang="en-US" sz="1200" b="1" dirty="0">
-                <a:solidFill>
-                  <a:srgbClr val="132A3A"/>
-                </a:solidFill>
-                <a:latin typeface="맑은 고딕" pitchFamily="34" charset="0"/>
-                <a:ea typeface="맑은 고딕" pitchFamily="34" charset="-122"/>
-                <a:cs typeface="맑은 고딕" pitchFamily="34" charset="-120"/>
-              </a:rPr>
-              <a:t>자주식 5대 / 기계식 15대 (총 20대)</a:t>
-            </a:r>
-            <a:endParaRPr lang="en-US" sz="1200" dirty="0"/>
+              <a:t>자주식 20대</a:t>
+            </a:r>
+            <a:endParaRPr lang="en-US" sz="1800" dirty="0"/>
           </a:p>
         </p:txBody>
       </p:sp>
@@ -3470,7 +3470,7 @@
                 <a:ea typeface="맑은 고딕" pitchFamily="34" charset="-122"/>
                 <a:cs typeface="맑은 고딕" pitchFamily="34" charset="-120"/>
               </a:rPr>
-              <a:t>입지 가치: 양재역 도보 7분 역세권 및 서초대로 이면 (북측 8m, 동측 6m) 접면, GBD 업무·상업 중심지 배후 수요 확보</a:t>
+              <a:t>입지 가치: 양재역 도보 7분 역세권, 해당 권역 업무·상업 중심지 배후 수요 확보</a:t>
             </a:r>
             <a:endParaRPr lang="en-US" sz="1000" dirty="0"/>
           </a:p>
@@ -3773,7 +3773,7 @@
                 <a:ea typeface="맑은 고딕" pitchFamily="34" charset="-122"/>
                 <a:cs typeface="맑은 고딕" pitchFamily="34" charset="-120"/>
               </a:rPr>
-              <a:t>CRE DEAL   |   IM-SEOCHO-FM-R3</a:t>
+              <a:t>CRE DEAL</a:t>
             </a:r>
             <a:endParaRPr lang="en-US" sz="800" dirty="0"/>
           </a:p>
@@ -4020,7 +4020,7 @@
                 <a:ea typeface="맑은 고딕" pitchFamily="34" charset="-122"/>
                 <a:cs typeface="맑은 고딕" pitchFamily="34" charset="-120"/>
               </a:rPr>
-              <a:t>서초동 1364-28 FM빌딩 제원</a:t>
+              <a:t>건물 기본 정보</a:t>
             </a:r>
             <a:endParaRPr lang="en-US" sz="1100" dirty="0"/>
           </a:p>
@@ -4035,7 +4035,7 @@
         <p:spPr>
           <a:xfrm>
             <a:off x="502920" y="1645920"/>
-            <a:ext cx="1920240" cy="274320"/>
+            <a:ext cx="1920240" cy="329184"/>
           </a:xfrm>
           <a:prstGeom prst="rect">
             <a:avLst/>
@@ -4054,7 +4054,7 @@
               <a:buNone/>
             </a:pPr>
             <a:r>
-              <a:rPr lang="en-US" sz="1100" dirty="0">
+              <a:rPr lang="en-US" sz="1200" dirty="0">
                 <a:solidFill>
                   <a:srgbClr val="5B6B73"/>
                 </a:solidFill>
@@ -4064,7 +4064,7 @@
               </a:rPr>
               <a:t>소재지</a:t>
             </a:r>
-            <a:endParaRPr lang="en-US" sz="1100" dirty="0"/>
+            <a:endParaRPr lang="en-US" sz="1200" dirty="0"/>
           </a:p>
         </p:txBody>
       </p:sp>
@@ -4077,7 +4077,7 @@
         <p:spPr>
           <a:xfrm>
             <a:off x="2423160" y="1645920"/>
-            <a:ext cx="4937760" cy="274320"/>
+            <a:ext cx="4937760" cy="329184"/>
           </a:xfrm>
           <a:prstGeom prst="rect">
             <a:avLst/>
@@ -4096,7 +4096,7 @@
               <a:buNone/>
             </a:pPr>
             <a:r>
-              <a:rPr lang="en-US" sz="1100" b="1" dirty="0">
+              <a:rPr lang="en-US" sz="1200" b="1" dirty="0">
                 <a:solidFill>
                   <a:srgbClr val="132A3A"/>
                 </a:solidFill>
@@ -4106,7 +4106,7 @@
               </a:rPr>
               <a:t>서울특별시 서초구 서초동 1364-28</a:t>
             </a:r>
-            <a:endParaRPr lang="en-US" sz="1100" dirty="0"/>
+            <a:endParaRPr lang="en-US" sz="1200" dirty="0"/>
           </a:p>
         </p:txBody>
       </p:sp>
@@ -4118,7 +4118,7 @@
         </p:nvSpPr>
         <p:spPr>
           <a:xfrm>
-            <a:off x="502920" y="1920240"/>
+            <a:off x="502920" y="1975104"/>
             <a:ext cx="6858000" cy="0"/>
           </a:xfrm>
           <a:prstGeom prst="line">
@@ -4141,8 +4141,8 @@
         </p:nvSpPr>
         <p:spPr>
           <a:xfrm>
-            <a:off x="502920" y="1920240"/>
-            <a:ext cx="1920240" cy="274320"/>
+            <a:off x="502920" y="1975104"/>
+            <a:ext cx="1920240" cy="329184"/>
           </a:xfrm>
           <a:prstGeom prst="rect">
             <a:avLst/>
@@ -4161,7 +4161,7 @@
               <a:buNone/>
             </a:pPr>
             <a:r>
-              <a:rPr lang="en-US" sz="1100" dirty="0">
+              <a:rPr lang="en-US" sz="1200" dirty="0">
                 <a:solidFill>
                   <a:srgbClr val="5B6B73"/>
                 </a:solidFill>
@@ -4171,7 +4171,7 @@
               </a:rPr>
               <a:t>대지면적</a:t>
             </a:r>
-            <a:endParaRPr lang="en-US" sz="1100" dirty="0"/>
+            <a:endParaRPr lang="en-US" sz="1200" dirty="0"/>
           </a:p>
         </p:txBody>
       </p:sp>
@@ -4183,8 +4183,8 @@
         </p:nvSpPr>
         <p:spPr>
           <a:xfrm>
-            <a:off x="2423160" y="1920240"/>
-            <a:ext cx="4937760" cy="274320"/>
+            <a:off x="2423160" y="1975104"/>
+            <a:ext cx="4937760" cy="329184"/>
           </a:xfrm>
           <a:prstGeom prst="rect">
             <a:avLst/>
@@ -4203,7 +4203,7 @@
               <a:buNone/>
             </a:pPr>
             <a:r>
-              <a:rPr lang="en-US" sz="1100" b="1" dirty="0">
+              <a:rPr lang="en-US" sz="1200" b="1" dirty="0">
                 <a:solidFill>
                   <a:srgbClr val="132A3A"/>
                 </a:solidFill>
@@ -4211,9 +4211,9 @@
                 <a:ea typeface="맑은 고딕" pitchFamily="34" charset="-122"/>
                 <a:cs typeface="맑은 고딕" pitchFamily="34" charset="-120"/>
               </a:rPr>
-              <a:t>596.0㎡ (180.3평)</a:t>
-            </a:r>
-            <a:endParaRPr lang="en-US" sz="1100" dirty="0"/>
+              <a:t>596㎡ (180.3평)</a:t>
+            </a:r>
+            <a:endParaRPr lang="en-US" sz="1200" dirty="0"/>
           </a:p>
         </p:txBody>
       </p:sp>
@@ -4225,7 +4225,7 @@
         </p:nvSpPr>
         <p:spPr>
           <a:xfrm>
-            <a:off x="502920" y="2194560"/>
+            <a:off x="502920" y="2304288"/>
             <a:ext cx="6858000" cy="0"/>
           </a:xfrm>
           <a:prstGeom prst="line">
@@ -4248,8 +4248,8 @@
         </p:nvSpPr>
         <p:spPr>
           <a:xfrm>
-            <a:off x="502920" y="2194560"/>
-            <a:ext cx="1920240" cy="274320"/>
+            <a:off x="502920" y="2304288"/>
+            <a:ext cx="1920240" cy="329184"/>
           </a:xfrm>
           <a:prstGeom prst="rect">
             <a:avLst/>
@@ -4268,7 +4268,7 @@
               <a:buNone/>
             </a:pPr>
             <a:r>
-              <a:rPr lang="en-US" sz="1100" dirty="0">
+              <a:rPr lang="en-US" sz="1200" dirty="0">
                 <a:solidFill>
                   <a:srgbClr val="5B6B73"/>
                 </a:solidFill>
@@ -4278,7 +4278,7 @@
               </a:rPr>
               <a:t>연면적</a:t>
             </a:r>
-            <a:endParaRPr lang="en-US" sz="1100" dirty="0"/>
+            <a:endParaRPr lang="en-US" sz="1200" dirty="0"/>
           </a:p>
         </p:txBody>
       </p:sp>
@@ -4290,8 +4290,8 @@
         </p:nvSpPr>
         <p:spPr>
           <a:xfrm>
-            <a:off x="2423160" y="2194560"/>
-            <a:ext cx="4937760" cy="274320"/>
+            <a:off x="2423160" y="2304288"/>
+            <a:ext cx="4937760" cy="329184"/>
           </a:xfrm>
           <a:prstGeom prst="rect">
             <a:avLst/>
@@ -4310,7 +4310,7 @@
               <a:buNone/>
             </a:pPr>
             <a:r>
-              <a:rPr lang="en-US" sz="1100" b="1" dirty="0">
+              <a:rPr lang="en-US" sz="1200" b="1" dirty="0">
                 <a:solidFill>
                   <a:srgbClr val="132A3A"/>
                 </a:solidFill>
@@ -4318,9 +4318,9 @@
                 <a:ea typeface="맑은 고딕" pitchFamily="34" charset="-122"/>
                 <a:cs typeface="맑은 고딕" pitchFamily="34" charset="-120"/>
               </a:rPr>
-              <a:t>2,104.88㎡ (636.7평)</a:t>
-            </a:r>
-            <a:endParaRPr lang="en-US" sz="1100" dirty="0"/>
+              <a:t>2104.88㎡ (636.7평)</a:t>
+            </a:r>
+            <a:endParaRPr lang="en-US" sz="1200" dirty="0"/>
           </a:p>
         </p:txBody>
       </p:sp>
@@ -4332,7 +4332,7 @@
         </p:nvSpPr>
         <p:spPr>
           <a:xfrm>
-            <a:off x="502920" y="2468880"/>
+            <a:off x="502920" y="2633472"/>
             <a:ext cx="6858000" cy="0"/>
           </a:xfrm>
           <a:prstGeom prst="line">
@@ -4355,8 +4355,8 @@
         </p:nvSpPr>
         <p:spPr>
           <a:xfrm>
-            <a:off x="502920" y="2468880"/>
-            <a:ext cx="1920240" cy="274320"/>
+            <a:off x="502920" y="2633472"/>
+            <a:ext cx="1920240" cy="329184"/>
           </a:xfrm>
           <a:prstGeom prst="rect">
             <a:avLst/>
@@ -4375,7 +4375,7 @@
               <a:buNone/>
             </a:pPr>
             <a:r>
-              <a:rPr lang="en-US" sz="1100" dirty="0">
+              <a:rPr lang="en-US" sz="1200" dirty="0">
                 <a:solidFill>
                   <a:srgbClr val="5B6B73"/>
                 </a:solidFill>
@@ -4385,7 +4385,7 @@
               </a:rPr>
               <a:t>용도지역</a:t>
             </a:r>
-            <a:endParaRPr lang="en-US" sz="1100" dirty="0"/>
+            <a:endParaRPr lang="en-US" sz="1200" dirty="0"/>
           </a:p>
         </p:txBody>
       </p:sp>
@@ -4397,8 +4397,8 @@
         </p:nvSpPr>
         <p:spPr>
           <a:xfrm>
-            <a:off x="2423160" y="2468880"/>
-            <a:ext cx="4937760" cy="274320"/>
+            <a:off x="2423160" y="2633472"/>
+            <a:ext cx="4937760" cy="329184"/>
           </a:xfrm>
           <a:prstGeom prst="rect">
             <a:avLst/>
@@ -4417,7 +4417,7 @@
               <a:buNone/>
             </a:pPr>
             <a:r>
-              <a:rPr lang="en-US" sz="1100" b="1" dirty="0">
+              <a:rPr lang="en-US" sz="1200" b="1" dirty="0">
                 <a:solidFill>
                   <a:srgbClr val="132A3A"/>
                 </a:solidFill>
@@ -4427,7 +4427,7 @@
               </a:rPr>
               <a:t>제3종일반주거지역</a:t>
             </a:r>
-            <a:endParaRPr lang="en-US" sz="1100" dirty="0"/>
+            <a:endParaRPr lang="en-US" sz="1200" dirty="0"/>
           </a:p>
         </p:txBody>
       </p:sp>
@@ -4439,7 +4439,7 @@
         </p:nvSpPr>
         <p:spPr>
           <a:xfrm>
-            <a:off x="502920" y="2743200"/>
+            <a:off x="502920" y="2962656"/>
             <a:ext cx="6858000" cy="0"/>
           </a:xfrm>
           <a:prstGeom prst="line">
@@ -4462,8 +4462,8 @@
         </p:nvSpPr>
         <p:spPr>
           <a:xfrm>
-            <a:off x="502920" y="2743200"/>
-            <a:ext cx="1920240" cy="274320"/>
+            <a:off x="502920" y="2962656"/>
+            <a:ext cx="1920240" cy="329184"/>
           </a:xfrm>
           <a:prstGeom prst="rect">
             <a:avLst/>
@@ -4482,7 +4482,7 @@
               <a:buNone/>
             </a:pPr>
             <a:r>
-              <a:rPr lang="en-US" sz="1100" dirty="0">
+              <a:rPr lang="en-US" sz="1200" dirty="0">
                 <a:solidFill>
                   <a:srgbClr val="5B6B73"/>
                 </a:solidFill>
@@ -4490,9 +4490,9 @@
                 <a:ea typeface="맑은 고딕" pitchFamily="34" charset="-122"/>
                 <a:cs typeface="맑은 고딕" pitchFamily="34" charset="-120"/>
               </a:rPr>
-              <a:t>규모</a:t>
-            </a:r>
-            <a:endParaRPr lang="en-US" sz="1100" dirty="0"/>
+              <a:t>준공연도</a:t>
+            </a:r>
+            <a:endParaRPr lang="en-US" sz="1200" dirty="0"/>
           </a:p>
         </p:txBody>
       </p:sp>
@@ -4504,8 +4504,8 @@
         </p:nvSpPr>
         <p:spPr>
           <a:xfrm>
-            <a:off x="2423160" y="2743200"/>
-            <a:ext cx="4937760" cy="274320"/>
+            <a:off x="2423160" y="2962656"/>
+            <a:ext cx="4937760" cy="329184"/>
           </a:xfrm>
           <a:prstGeom prst="rect">
             <a:avLst/>
@@ -4524,7 +4524,114 @@
               <a:buNone/>
             </a:pPr>
             <a:r>
-              <a:rPr lang="en-US" sz="1100" b="1" dirty="0">
+              <a:rPr lang="en-US" sz="1200" b="1" dirty="0">
+                <a:solidFill>
+                  <a:srgbClr val="132A3A"/>
+                </a:solidFill>
+                <a:latin typeface="맑은 고딕" pitchFamily="34" charset="0"/>
+                <a:ea typeface="맑은 고딕" pitchFamily="34" charset="-122"/>
+                <a:cs typeface="맑은 고딕" pitchFamily="34" charset="-120"/>
+              </a:rPr>
+              <a:t>2005년</a:t>
+            </a:r>
+            <a:endParaRPr lang="en-US" sz="1200" dirty="0"/>
+          </a:p>
+        </p:txBody>
+      </p:sp>
+      <p:sp>
+        <p:nvSpPr>
+          <p:cNvPr id="21" name="Shape 19"/>
+          <p:cNvSpPr/>
+          <p:nvPr/>
+        </p:nvSpPr>
+        <p:spPr>
+          <a:xfrm>
+            <a:off x="502920" y="3291840"/>
+            <a:ext cx="6858000" cy="0"/>
+          </a:xfrm>
+          <a:prstGeom prst="line">
+            <a:avLst/>
+          </a:prstGeom>
+          <a:noFill/>
+          <a:ln w="3810">
+            <a:solidFill>
+              <a:srgbClr val="CBD5E0"/>
+            </a:solidFill>
+            <a:prstDash val="solid"/>
+          </a:ln>
+        </p:spPr>
+      </p:sp>
+      <p:sp>
+        <p:nvSpPr>
+          <p:cNvPr id="22" name="Text 20"/>
+          <p:cNvSpPr/>
+          <p:nvPr/>
+        </p:nvSpPr>
+        <p:spPr>
+          <a:xfrm>
+            <a:off x="502920" y="3291840"/>
+            <a:ext cx="1920240" cy="329184"/>
+          </a:xfrm>
+          <a:prstGeom prst="rect">
+            <a:avLst/>
+          </a:prstGeom>
+          <a:noFill/>
+          <a:ln/>
+        </p:spPr>
+        <p:txBody>
+          <a:bodyPr wrap="square" lIns="0" tIns="0" rIns="0" bIns="0" rtlCol="0" anchor="ctr"/>
+          <a:lstStyle/>
+          <a:p>
+            <a:pPr indent="0" marL="0">
+              <a:lnSpc>
+                <a:spcPct val="115000"/>
+              </a:lnSpc>
+              <a:buNone/>
+            </a:pPr>
+            <a:r>
+              <a:rPr lang="en-US" sz="1200" dirty="0">
+                <a:solidFill>
+                  <a:srgbClr val="5B6B73"/>
+                </a:solidFill>
+                <a:latin typeface="맑은 고딕" pitchFamily="34" charset="0"/>
+                <a:ea typeface="맑은 고딕" pitchFamily="34" charset="-122"/>
+                <a:cs typeface="맑은 고딕" pitchFamily="34" charset="-120"/>
+              </a:rPr>
+              <a:t>층수</a:t>
+            </a:r>
+            <a:endParaRPr lang="en-US" sz="1200" dirty="0"/>
+          </a:p>
+        </p:txBody>
+      </p:sp>
+      <p:sp>
+        <p:nvSpPr>
+          <p:cNvPr id="23" name="Text 21"/>
+          <p:cNvSpPr/>
+          <p:nvPr/>
+        </p:nvSpPr>
+        <p:spPr>
+          <a:xfrm>
+            <a:off x="2423160" y="3291840"/>
+            <a:ext cx="4937760" cy="329184"/>
+          </a:xfrm>
+          <a:prstGeom prst="rect">
+            <a:avLst/>
+          </a:prstGeom>
+          <a:noFill/>
+          <a:ln/>
+        </p:spPr>
+        <p:txBody>
+          <a:bodyPr wrap="square" lIns="0" tIns="0" rIns="0" bIns="0" rtlCol="0" anchor="ctr"/>
+          <a:lstStyle/>
+          <a:p>
+            <a:pPr indent="0" marL="0">
+              <a:lnSpc>
+                <a:spcPct val="115000"/>
+              </a:lnSpc>
+              <a:buNone/>
+            </a:pPr>
+            <a:r>
+              <a:rPr lang="en-US" sz="1200" b="1" dirty="0">
                 <a:solidFill>
                   <a:srgbClr val="132A3A"/>
                 </a:solidFill>
@@ -4534,19 +4641,19 @@
               </a:rPr>
               <a:t>지하 1층 ~ 지상 7층</a:t>
             </a:r>
-            <a:endParaRPr lang="en-US" sz="1100" dirty="0"/>
-          </a:p>
-        </p:txBody>
-      </p:sp>
-      <p:sp>
-        <p:nvSpPr>
-          <p:cNvPr id="21" name="Shape 19"/>
-          <p:cNvSpPr/>
-          <p:nvPr/>
-        </p:nvSpPr>
-        <p:spPr>
-          <a:xfrm>
-            <a:off x="502920" y="3017520"/>
+            <a:endParaRPr lang="en-US" sz="1200" dirty="0"/>
+          </a:p>
+        </p:txBody>
+      </p:sp>
+      <p:sp>
+        <p:nvSpPr>
+          <p:cNvPr id="24" name="Shape 22"/>
+          <p:cNvSpPr/>
+          <p:nvPr/>
+        </p:nvSpPr>
+        <p:spPr>
+          <a:xfrm>
+            <a:off x="502920" y="3621024"/>
             <a:ext cx="6858000" cy="0"/>
           </a:xfrm>
           <a:prstGeom prst="line">
@@ -4563,14 +4670,14 @@
       </p:sp>
       <p:sp>
         <p:nvSpPr>
-          <p:cNvPr id="22" name="Text 20"/>
-          <p:cNvSpPr/>
-          <p:nvPr/>
-        </p:nvSpPr>
-        <p:spPr>
-          <a:xfrm>
-            <a:off x="502920" y="3017520"/>
-            <a:ext cx="1920240" cy="274320"/>
+          <p:cNvPr id="25" name="Text 23"/>
+          <p:cNvSpPr/>
+          <p:nvPr/>
+        </p:nvSpPr>
+        <p:spPr>
+          <a:xfrm>
+            <a:off x="502920" y="3621024"/>
+            <a:ext cx="1920240" cy="329184"/>
           </a:xfrm>
           <a:prstGeom prst="rect">
             <a:avLst/>
@@ -4589,7 +4696,7 @@
               <a:buNone/>
             </a:pPr>
             <a:r>
-              <a:rPr lang="en-US" sz="1100" dirty="0">
+              <a:rPr lang="en-US" sz="1200" dirty="0">
                 <a:solidFill>
                   <a:srgbClr val="5B6B73"/>
                 </a:solidFill>
@@ -4597,22 +4704,22 @@
                 <a:ea typeface="맑은 고딕" pitchFamily="34" charset="-122"/>
                 <a:cs typeface="맑은 고딕" pitchFamily="34" charset="-120"/>
               </a:rPr>
-              <a:t>준공연도</a:t>
-            </a:r>
-            <a:endParaRPr lang="en-US" sz="1100" dirty="0"/>
-          </a:p>
-        </p:txBody>
-      </p:sp>
-      <p:sp>
-        <p:nvSpPr>
-          <p:cNvPr id="23" name="Text 21"/>
-          <p:cNvSpPr/>
-          <p:nvPr/>
-        </p:nvSpPr>
-        <p:spPr>
-          <a:xfrm>
-            <a:off x="2423160" y="3017520"/>
-            <a:ext cx="4937760" cy="274320"/>
+              <a:t>주차</a:t>
+            </a:r>
+            <a:endParaRPr lang="en-US" sz="1200" dirty="0"/>
+          </a:p>
+        </p:txBody>
+      </p:sp>
+      <p:sp>
+        <p:nvSpPr>
+          <p:cNvPr id="26" name="Text 24"/>
+          <p:cNvSpPr/>
+          <p:nvPr/>
+        </p:nvSpPr>
+        <p:spPr>
+          <a:xfrm>
+            <a:off x="2423160" y="3621024"/>
+            <a:ext cx="4937760" cy="329184"/>
           </a:xfrm>
           <a:prstGeom prst="rect">
             <a:avLst/>
@@ -4631,7 +4738,7 @@
               <a:buNone/>
             </a:pPr>
             <a:r>
-              <a:rPr lang="en-US" sz="1100" b="1" dirty="0">
+              <a:rPr lang="en-US" sz="1200" b="1" dirty="0">
                 <a:solidFill>
                   <a:srgbClr val="132A3A"/>
                 </a:solidFill>
@@ -4639,21 +4746,21 @@
                 <a:ea typeface="맑은 고딕" pitchFamily="34" charset="-122"/>
                 <a:cs typeface="맑은 고딕" pitchFamily="34" charset="-120"/>
               </a:rPr>
-              <a:t>2005년</a:t>
-            </a:r>
-            <a:endParaRPr lang="en-US" sz="1100" dirty="0"/>
-          </a:p>
-        </p:txBody>
-      </p:sp>
-      <p:sp>
-        <p:nvSpPr>
-          <p:cNvPr id="24" name="Shape 22"/>
-          <p:cNvSpPr/>
-          <p:nvPr/>
-        </p:nvSpPr>
-        <p:spPr>
-          <a:xfrm>
-            <a:off x="502920" y="3291840"/>
+              <a:t>자주식 20대</a:t>
+            </a:r>
+            <a:endParaRPr lang="en-US" sz="1200" dirty="0"/>
+          </a:p>
+        </p:txBody>
+      </p:sp>
+      <p:sp>
+        <p:nvSpPr>
+          <p:cNvPr id="27" name="Shape 25"/>
+          <p:cNvSpPr/>
+          <p:nvPr/>
+        </p:nvSpPr>
+        <p:spPr>
+          <a:xfrm>
+            <a:off x="502920" y="3950208"/>
             <a:ext cx="6858000" cy="0"/>
           </a:xfrm>
           <a:prstGeom prst="line">
@@ -4670,14 +4777,14 @@
       </p:sp>
       <p:sp>
         <p:nvSpPr>
-          <p:cNvPr id="25" name="Text 23"/>
-          <p:cNvSpPr/>
-          <p:nvPr/>
-        </p:nvSpPr>
-        <p:spPr>
-          <a:xfrm>
-            <a:off x="502920" y="3291840"/>
-            <a:ext cx="1920240" cy="274320"/>
+          <p:cNvPr id="28" name="Text 26"/>
+          <p:cNvSpPr/>
+          <p:nvPr/>
+        </p:nvSpPr>
+        <p:spPr>
+          <a:xfrm>
+            <a:off x="502920" y="3950208"/>
+            <a:ext cx="1920240" cy="329184"/>
           </a:xfrm>
           <a:prstGeom prst="rect">
             <a:avLst/>
@@ -4696,7 +4803,7 @@
               <a:buNone/>
             </a:pPr>
             <a:r>
-              <a:rPr lang="en-US" sz="1100" dirty="0">
+              <a:rPr lang="en-US" sz="1200" dirty="0">
                 <a:solidFill>
                   <a:srgbClr val="5B6B73"/>
                 </a:solidFill>
@@ -4704,22 +4811,22 @@
                 <a:ea typeface="맑은 고딕" pitchFamily="34" charset="-122"/>
                 <a:cs typeface="맑은 고딕" pitchFamily="34" charset="-120"/>
               </a:rPr>
-              <a:t>주차대수</a:t>
-            </a:r>
-            <a:endParaRPr lang="en-US" sz="1100" dirty="0"/>
-          </a:p>
-        </p:txBody>
-      </p:sp>
-      <p:sp>
-        <p:nvSpPr>
-          <p:cNvPr id="26" name="Text 24"/>
-          <p:cNvSpPr/>
-          <p:nvPr/>
-        </p:nvSpPr>
-        <p:spPr>
-          <a:xfrm>
-            <a:off x="2423160" y="3291840"/>
-            <a:ext cx="4937760" cy="274320"/>
+              <a:t>엘리베이터</a:t>
+            </a:r>
+            <a:endParaRPr lang="en-US" sz="1200" dirty="0"/>
+          </a:p>
+        </p:txBody>
+      </p:sp>
+      <p:sp>
+        <p:nvSpPr>
+          <p:cNvPr id="29" name="Text 27"/>
+          <p:cNvSpPr/>
+          <p:nvPr/>
+        </p:nvSpPr>
+        <p:spPr>
+          <a:xfrm>
+            <a:off x="2423160" y="3950208"/>
+            <a:ext cx="4937760" cy="329184"/>
           </a:xfrm>
           <a:prstGeom prst="rect">
             <a:avLst/>
@@ -4738,114 +4845,7 @@
               <a:buNone/>
             </a:pPr>
             <a:r>
-              <a:rPr lang="en-US" sz="1100" b="1" dirty="0">
-                <a:solidFill>
-                  <a:srgbClr val="132A3A"/>
-                </a:solidFill>
-                <a:latin typeface="맑은 고딕" pitchFamily="34" charset="0"/>
-                <a:ea typeface="맑은 고딕" pitchFamily="34" charset="-122"/>
-                <a:cs typeface="맑은 고딕" pitchFamily="34" charset="-120"/>
-              </a:rPr>
-              <a:t>자주식 5대 / 기계식 15대 (총 20대)</a:t>
-            </a:r>
-            <a:endParaRPr lang="en-US" sz="1100" dirty="0"/>
-          </a:p>
-        </p:txBody>
-      </p:sp>
-      <p:sp>
-        <p:nvSpPr>
-          <p:cNvPr id="27" name="Shape 25"/>
-          <p:cNvSpPr/>
-          <p:nvPr/>
-        </p:nvSpPr>
-        <p:spPr>
-          <a:xfrm>
-            <a:off x="502920" y="3566160"/>
-            <a:ext cx="6858000" cy="0"/>
-          </a:xfrm>
-          <a:prstGeom prst="line">
-            <a:avLst/>
-          </a:prstGeom>
-          <a:noFill/>
-          <a:ln w="3810">
-            <a:solidFill>
-              <a:srgbClr val="CBD5E0"/>
-            </a:solidFill>
-            <a:prstDash val="solid"/>
-          </a:ln>
-        </p:spPr>
-      </p:sp>
-      <p:sp>
-        <p:nvSpPr>
-          <p:cNvPr id="28" name="Text 26"/>
-          <p:cNvSpPr/>
-          <p:nvPr/>
-        </p:nvSpPr>
-        <p:spPr>
-          <a:xfrm>
-            <a:off x="502920" y="3566160"/>
-            <a:ext cx="1920240" cy="274320"/>
-          </a:xfrm>
-          <a:prstGeom prst="rect">
-            <a:avLst/>
-          </a:prstGeom>
-          <a:noFill/>
-          <a:ln/>
-        </p:spPr>
-        <p:txBody>
-          <a:bodyPr wrap="square" lIns="0" tIns="0" rIns="0" bIns="0" rtlCol="0" anchor="ctr"/>
-          <a:lstStyle/>
-          <a:p>
-            <a:pPr indent="0" marL="0">
-              <a:lnSpc>
-                <a:spcPct val="115000"/>
-              </a:lnSpc>
-              <a:buNone/>
-            </a:pPr>
-            <a:r>
-              <a:rPr lang="en-US" sz="1100" dirty="0">
-                <a:solidFill>
-                  <a:srgbClr val="5B6B73"/>
-                </a:solidFill>
-                <a:latin typeface="맑은 고딕" pitchFamily="34" charset="0"/>
-                <a:ea typeface="맑은 고딕" pitchFamily="34" charset="-122"/>
-                <a:cs typeface="맑은 고딕" pitchFamily="34" charset="-120"/>
-              </a:rPr>
-              <a:t>승강기</a:t>
-            </a:r>
-            <a:endParaRPr lang="en-US" sz="1100" dirty="0"/>
-          </a:p>
-        </p:txBody>
-      </p:sp>
-      <p:sp>
-        <p:nvSpPr>
-          <p:cNvPr id="29" name="Text 27"/>
-          <p:cNvSpPr/>
-          <p:nvPr/>
-        </p:nvSpPr>
-        <p:spPr>
-          <a:xfrm>
-            <a:off x="2423160" y="3566160"/>
-            <a:ext cx="4937760" cy="274320"/>
-          </a:xfrm>
-          <a:prstGeom prst="rect">
-            <a:avLst/>
-          </a:prstGeom>
-          <a:noFill/>
-          <a:ln/>
-        </p:spPr>
-        <p:txBody>
-          <a:bodyPr wrap="square" lIns="0" tIns="0" rIns="0" bIns="0" rtlCol="0" anchor="ctr"/>
-          <a:lstStyle/>
-          <a:p>
-            <a:pPr indent="0" marL="0">
-              <a:lnSpc>
-                <a:spcPct val="115000"/>
-              </a:lnSpc>
-              <a:buNone/>
-            </a:pPr>
-            <a:r>
-              <a:rPr lang="en-US" sz="1100" b="1" dirty="0">
+              <a:rPr lang="en-US" sz="1200" b="1" dirty="0">
                 <a:solidFill>
                   <a:srgbClr val="132A3A"/>
                 </a:solidFill>
@@ -4855,7 +4855,7 @@
               </a:rPr>
               <a:t>1대</a:t>
             </a:r>
-            <a:endParaRPr lang="en-US" sz="1100" dirty="0"/>
+            <a:endParaRPr lang="en-US" sz="1200" dirty="0"/>
           </a:p>
         </p:txBody>
       </p:sp>
@@ -4867,7 +4867,7 @@
         </p:nvSpPr>
         <p:spPr>
           <a:xfrm>
-            <a:off x="502920" y="4023360"/>
+            <a:off x="502920" y="4389120"/>
             <a:ext cx="6858000" cy="1005840"/>
           </a:xfrm>
           <a:prstGeom prst="rect">
@@ -4892,7 +4892,7 @@
         </p:nvSpPr>
         <p:spPr>
           <a:xfrm>
-            <a:off x="685800" y="4023360"/>
+            <a:off x="685800" y="4389120"/>
             <a:ext cx="2726741" cy="502920"/>
           </a:xfrm>
           <a:prstGeom prst="rect">
@@ -4931,7 +4931,7 @@
         </p:nvSpPr>
         <p:spPr>
           <a:xfrm>
-            <a:off x="3412541" y="4023360"/>
+            <a:off x="3412541" y="4389120"/>
             <a:ext cx="3765499" cy="502920"/>
           </a:xfrm>
           <a:prstGeom prst="rect">
@@ -4970,7 +4970,7 @@
         </p:nvSpPr>
         <p:spPr>
           <a:xfrm>
-            <a:off x="640080" y="4526280"/>
+            <a:off x="640080" y="4892040"/>
             <a:ext cx="6583680" cy="0"/>
           </a:xfrm>
           <a:prstGeom prst="line">
@@ -4993,7 +4993,7 @@
         </p:nvSpPr>
         <p:spPr>
           <a:xfrm>
-            <a:off x="685800" y="4526280"/>
+            <a:off x="685800" y="4892040"/>
             <a:ext cx="2726741" cy="457200"/>
           </a:xfrm>
           <a:prstGeom prst="rect">
@@ -5032,7 +5032,7 @@
         </p:nvSpPr>
         <p:spPr>
           <a:xfrm>
-            <a:off x="3412541" y="4526280"/>
+            <a:off x="3412541" y="4892040"/>
             <a:ext cx="3765499" cy="457200"/>
           </a:xfrm>
           <a:prstGeom prst="rect">
@@ -5314,7 +5314,7 @@
                 <a:ea typeface="맑은 고딕" pitchFamily="34" charset="-122"/>
                 <a:cs typeface="맑은 고딕" pitchFamily="34" charset="-120"/>
               </a:rPr>
-              <a:t>CRE DEAL   |   IM-SEOCHO-FM-R3</a:t>
+              <a:t>CRE DEAL</a:t>
             </a:r>
             <a:endParaRPr lang="en-US" sz="800" dirty="0"/>
           </a:p>
@@ -5585,7 +5585,7 @@
                 <a:ea typeface="맑은 고딕" pitchFamily="34" charset="-122"/>
                 <a:cs typeface="맑은 고딕" pitchFamily="34" charset="-120"/>
               </a:rPr>
-              <a:t>입지 및 접근성</a:t>
+              <a:t>입지 정보</a:t>
             </a:r>
             <a:endParaRPr lang="en-US" sz="1100" dirty="0"/>
           </a:p>
@@ -5841,7 +5841,7 @@
                 <a:ea typeface="맑은 고딕" pitchFamily="34" charset="-122"/>
                 <a:cs typeface="맑은 고딕" pitchFamily="34" charset="-120"/>
               </a:rPr>
-              <a:t>도로접면</a:t>
+              <a:t>상권권역</a:t>
             </a:r>
             <a:endParaRPr lang="en-US" sz="1150" dirty="0"/>
           </a:p>
@@ -5856,113 +5856,6 @@
         <p:spPr>
           <a:xfrm>
             <a:off x="7549323" y="2496312"/>
-            <a:ext cx="4011436" cy="347472"/>
-          </a:xfrm>
-          <a:prstGeom prst="rect">
-            <a:avLst/>
-          </a:prstGeom>
-          <a:noFill/>
-          <a:ln/>
-        </p:spPr>
-        <p:txBody>
-          <a:bodyPr wrap="square" lIns="0" tIns="0" rIns="0" bIns="0" rtlCol="0" anchor="ctr"/>
-          <a:lstStyle/>
-          <a:p>
-            <a:pPr indent="0" marL="0">
-              <a:lnSpc>
-                <a:spcPct val="115000"/>
-              </a:lnSpc>
-              <a:buNone/>
-            </a:pPr>
-            <a:r>
-              <a:rPr lang="en-US" sz="1150" b="1" dirty="0">
-                <a:solidFill>
-                  <a:srgbClr val="132A3A"/>
-                </a:solidFill>
-                <a:latin typeface="맑은 고딕" pitchFamily="34" charset="0"/>
-                <a:ea typeface="맑은 고딕" pitchFamily="34" charset="-122"/>
-                <a:cs typeface="맑은 고딕" pitchFamily="34" charset="-120"/>
-              </a:rPr>
-              <a:t>서초대로 이면 (북측 8m, 동측 6m)</a:t>
-            </a:r>
-            <a:endParaRPr lang="en-US" sz="1150" dirty="0"/>
-          </a:p>
-        </p:txBody>
-      </p:sp>
-      <p:sp>
-        <p:nvSpPr>
-          <p:cNvPr id="16" name="Shape 13"/>
-          <p:cNvSpPr/>
-          <p:nvPr/>
-        </p:nvSpPr>
-        <p:spPr>
-          <a:xfrm>
-            <a:off x="5989320" y="2843784"/>
-            <a:ext cx="5571439" cy="0"/>
-          </a:xfrm>
-          <a:prstGeom prst="line">
-            <a:avLst/>
-          </a:prstGeom>
-          <a:noFill/>
-          <a:ln w="3810">
-            <a:solidFill>
-              <a:srgbClr val="CBD5E0"/>
-            </a:solidFill>
-            <a:prstDash val="solid"/>
-          </a:ln>
-        </p:spPr>
-      </p:sp>
-      <p:sp>
-        <p:nvSpPr>
-          <p:cNvPr id="17" name="Text 14"/>
-          <p:cNvSpPr/>
-          <p:nvPr/>
-        </p:nvSpPr>
-        <p:spPr>
-          <a:xfrm>
-            <a:off x="5989320" y="2843784"/>
-            <a:ext cx="1560003" cy="347472"/>
-          </a:xfrm>
-          <a:prstGeom prst="rect">
-            <a:avLst/>
-          </a:prstGeom>
-          <a:noFill/>
-          <a:ln/>
-        </p:spPr>
-        <p:txBody>
-          <a:bodyPr wrap="square" lIns="0" tIns="0" rIns="0" bIns="0" rtlCol="0" anchor="ctr"/>
-          <a:lstStyle/>
-          <a:p>
-            <a:pPr indent="0" marL="0">
-              <a:lnSpc>
-                <a:spcPct val="115000"/>
-              </a:lnSpc>
-              <a:buNone/>
-            </a:pPr>
-            <a:r>
-              <a:rPr lang="en-US" sz="1150" dirty="0">
-                <a:solidFill>
-                  <a:srgbClr val="5B6B73"/>
-                </a:solidFill>
-                <a:latin typeface="맑은 고딕" pitchFamily="34" charset="0"/>
-                <a:ea typeface="맑은 고딕" pitchFamily="34" charset="-122"/>
-                <a:cs typeface="맑은 고딕" pitchFamily="34" charset="-120"/>
-              </a:rPr>
-              <a:t>상권권역</a:t>
-            </a:r>
-            <a:endParaRPr lang="en-US" sz="1150" dirty="0"/>
-          </a:p>
-        </p:txBody>
-      </p:sp>
-      <p:sp>
-        <p:nvSpPr>
-          <p:cNvPr id="18" name="Text 15"/>
-          <p:cNvSpPr/>
-          <p:nvPr/>
-        </p:nvSpPr>
-        <p:spPr>
-          <a:xfrm>
-            <a:off x="7549323" y="2843784"/>
             <a:ext cx="4011436" cy="347472"/>
           </a:xfrm>
           <a:prstGeom prst="rect">
@@ -5998,13 +5891,13 @@
       </p:sp>
       <p:sp>
         <p:nvSpPr>
-          <p:cNvPr id="19" name="Shape 16"/>
-          <p:cNvSpPr/>
-          <p:nvPr/>
-        </p:nvSpPr>
-        <p:spPr>
-          <a:xfrm>
-            <a:off x="5989320" y="3191256"/>
+          <p:cNvPr id="16" name="Shape 13"/>
+          <p:cNvSpPr/>
+          <p:nvPr/>
+        </p:nvSpPr>
+        <p:spPr>
+          <a:xfrm>
+            <a:off x="5989320" y="2843784"/>
             <a:ext cx="5571439" cy="0"/>
           </a:xfrm>
           <a:prstGeom prst="line">
@@ -6021,13 +5914,13 @@
       </p:sp>
       <p:sp>
         <p:nvSpPr>
-          <p:cNvPr id="20" name="Text 17"/>
-          <p:cNvSpPr/>
-          <p:nvPr/>
-        </p:nvSpPr>
-        <p:spPr>
-          <a:xfrm>
-            <a:off x="5989320" y="3191256"/>
+          <p:cNvPr id="17" name="Text 14"/>
+          <p:cNvSpPr/>
+          <p:nvPr/>
+        </p:nvSpPr>
+        <p:spPr>
+          <a:xfrm>
+            <a:off x="5989320" y="2843784"/>
             <a:ext cx="1560003" cy="347472"/>
           </a:xfrm>
           <a:prstGeom prst="rect">
@@ -6063,13 +5956,13 @@
       </p:sp>
       <p:sp>
         <p:nvSpPr>
-          <p:cNvPr id="21" name="Text 18"/>
-          <p:cNvSpPr/>
-          <p:nvPr/>
-        </p:nvSpPr>
-        <p:spPr>
-          <a:xfrm>
-            <a:off x="7549323" y="3191256"/>
+          <p:cNvPr id="18" name="Text 15"/>
+          <p:cNvSpPr/>
+          <p:nvPr/>
+        </p:nvSpPr>
+        <p:spPr>
+          <a:xfrm>
+            <a:off x="7549323" y="2843784"/>
             <a:ext cx="4011436" cy="347472"/>
           </a:xfrm>
           <a:prstGeom prst="rect">
@@ -6105,13 +5998,13 @@
       </p:sp>
       <p:sp>
         <p:nvSpPr>
-          <p:cNvPr id="22" name="Shape 19"/>
-          <p:cNvSpPr/>
-          <p:nvPr/>
-        </p:nvSpPr>
-        <p:spPr>
-          <a:xfrm>
-            <a:off x="5989320" y="3538728"/>
+          <p:cNvPr id="19" name="Shape 16"/>
+          <p:cNvSpPr/>
+          <p:nvPr/>
+        </p:nvSpPr>
+        <p:spPr>
+          <a:xfrm>
+            <a:off x="5989320" y="3191256"/>
             <a:ext cx="5571439" cy="0"/>
           </a:xfrm>
           <a:prstGeom prst="line">
@@ -6128,13 +6021,13 @@
       </p:sp>
       <p:sp>
         <p:nvSpPr>
-          <p:cNvPr id="23" name="Text 20"/>
-          <p:cNvSpPr/>
-          <p:nvPr/>
-        </p:nvSpPr>
-        <p:spPr>
-          <a:xfrm>
-            <a:off x="5989320" y="3538728"/>
+          <p:cNvPr id="20" name="Text 17"/>
+          <p:cNvSpPr/>
+          <p:nvPr/>
+        </p:nvSpPr>
+        <p:spPr>
+          <a:xfrm>
+            <a:off x="5989320" y="3191256"/>
             <a:ext cx="1560003" cy="347472"/>
           </a:xfrm>
           <a:prstGeom prst="rect">
@@ -6170,13 +6063,13 @@
       </p:sp>
       <p:sp>
         <p:nvSpPr>
-          <p:cNvPr id="24" name="Text 21"/>
-          <p:cNvSpPr/>
-          <p:nvPr/>
-        </p:nvSpPr>
-        <p:spPr>
-          <a:xfrm>
-            <a:off x="7549323" y="3538728"/>
+          <p:cNvPr id="21" name="Text 18"/>
+          <p:cNvSpPr/>
+          <p:nvPr/>
+        </p:nvSpPr>
+        <p:spPr>
+          <a:xfrm>
+            <a:off x="7549323" y="3191256"/>
             <a:ext cx="4011436" cy="347472"/>
           </a:xfrm>
           <a:prstGeom prst="rect">
@@ -6212,18 +6105,18 @@
       </p:sp>
       <p:sp>
         <p:nvSpPr>
-          <p:cNvPr id="25" name="Shape 22"/>
-          <p:cNvSpPr/>
-          <p:nvPr/>
-        </p:nvSpPr>
-        <p:spPr>
-          <a:xfrm>
-            <a:off x="5989320" y="3995928"/>
-            <a:ext cx="5571439" cy="1316736"/>
+          <p:cNvPr id="22" name="Shape 19"/>
+          <p:cNvSpPr/>
+          <p:nvPr/>
+        </p:nvSpPr>
+        <p:spPr>
+          <a:xfrm>
+            <a:off x="5989320" y="3648456"/>
+            <a:ext cx="5571439" cy="877824"/>
           </a:xfrm>
           <a:prstGeom prst="roundRect">
             <a:avLst>
-              <a:gd name="adj" fmla="val 4167"/>
+              <a:gd name="adj" fmla="val 6250"/>
             </a:avLst>
           </a:prstGeom>
           <a:solidFill>
@@ -6234,14 +6127,14 @@
       </p:sp>
       <p:sp>
         <p:nvSpPr>
-          <p:cNvPr id="26" name="Shape 23"/>
-          <p:cNvSpPr/>
-          <p:nvPr/>
-        </p:nvSpPr>
-        <p:spPr>
-          <a:xfrm>
-            <a:off x="5989320" y="4050792"/>
-            <a:ext cx="36576" cy="1207008"/>
+          <p:cNvPr id="23" name="Shape 20"/>
+          <p:cNvSpPr/>
+          <p:nvPr/>
+        </p:nvSpPr>
+        <p:spPr>
+          <a:xfrm>
+            <a:off x="5989320" y="3703320"/>
+            <a:ext cx="36576" cy="768096"/>
           </a:xfrm>
           <a:prstGeom prst="rect">
             <a:avLst/>
@@ -6254,13 +6147,13 @@
       </p:sp>
       <p:sp>
         <p:nvSpPr>
-          <p:cNvPr id="27" name="Text 24"/>
-          <p:cNvSpPr/>
-          <p:nvPr/>
-        </p:nvSpPr>
-        <p:spPr>
-          <a:xfrm>
-            <a:off x="6135624" y="4087368"/>
+          <p:cNvPr id="24" name="Text 21"/>
+          <p:cNvSpPr/>
+          <p:nvPr/>
+        </p:nvSpPr>
+        <p:spPr>
+          <a:xfrm>
+            <a:off x="6135624" y="3739896"/>
             <a:ext cx="5315407" cy="201168"/>
           </a:xfrm>
           <a:prstGeom prst="rect">
@@ -6293,14 +6186,14 @@
       </p:sp>
       <p:sp>
         <p:nvSpPr>
-          <p:cNvPr id="28" name="Text 25"/>
-          <p:cNvSpPr/>
-          <p:nvPr/>
-        </p:nvSpPr>
-        <p:spPr>
-          <a:xfrm>
-            <a:off x="6135624" y="4288536"/>
-            <a:ext cx="5315407" cy="987552"/>
+          <p:cNvPr id="25" name="Text 22"/>
+          <p:cNvSpPr/>
+          <p:nvPr/>
+        </p:nvSpPr>
+        <p:spPr>
+          <a:xfrm>
+            <a:off x="6135624" y="3941064"/>
+            <a:ext cx="5315407" cy="548640"/>
           </a:xfrm>
           <a:prstGeom prst="rect">
             <a:avLst/>
@@ -6352,39 +6245,15 @@
                 <a:ea typeface="맑은 고딕" pitchFamily="34" charset="-122"/>
                 <a:cs typeface="맑은 고딕" pitchFamily="34" charset="-120"/>
               </a:rPr>
-              <a:t>서초대로 이면 (북측 8m, 동측 6m) 접면 차량 진출입 양호</a:t>
+              <a:t>GBD 배후 상권 기반 안정적 임대 수요</a:t>
             </a:r>
             <a:endParaRPr lang="en-US" sz="980" dirty="0"/>
           </a:p>
-          <a:p>
-            <a:pPr marL="342900" indent="-342900">
-              <a:lnSpc>
-                <a:spcPct val="108000"/>
-              </a:lnSpc>
-              <a:spcBef>
-                <a:spcPts val="300"/>
-              </a:spcBef>
-              <a:buSzPct val="100000"/>
-              <a:buChar char="•"/>
-            </a:pPr>
-            <a:r>
-              <a:rPr lang="en-US" sz="980" dirty="0">
-                <a:solidFill>
-                  <a:srgbClr val="2B2B2B"/>
-                </a:solidFill>
-                <a:latin typeface="맑은 고딕" pitchFamily="34" charset="0"/>
-                <a:ea typeface="맑은 고딕" pitchFamily="34" charset="-122"/>
-                <a:cs typeface="맑은 고딕" pitchFamily="34" charset="-120"/>
-              </a:rPr>
-              <a:t>GBD 배후 상권 기반 안정적 임대 수요</a:t>
-            </a:r>
-            <a:endParaRPr lang="en-US" sz="980" dirty="0"/>
-          </a:p>
-        </p:txBody>
-      </p:sp>
-      <p:sp>
-        <p:nvSpPr>
-          <p:cNvPr id="29" name="Text 26"/>
+        </p:txBody>
+      </p:sp>
+      <p:sp>
+        <p:nvSpPr>
+          <p:cNvPr id="26" name="Text 23"/>
           <p:cNvSpPr/>
           <p:nvPr/>
         </p:nvSpPr>
@@ -6415,7 +6284,7 @@
                 <a:ea typeface="맑은 고딕" pitchFamily="34" charset="-122"/>
                 <a:cs typeface="맑은 고딕" pitchFamily="34" charset="-120"/>
               </a:rPr>
-              <a:t>CRE DEAL   |   IM-SEOCHO-FM-R3</a:t>
+              <a:t>CRE DEAL</a:t>
             </a:r>
             <a:endParaRPr lang="en-US" sz="800" dirty="0"/>
           </a:p>
@@ -6423,7 +6292,7 @@
       </p:sp>
       <p:sp>
         <p:nvSpPr>
-          <p:cNvPr id="30" name="Text 27"/>
+          <p:cNvPr id="27" name="Text 24"/>
           <p:cNvSpPr/>
           <p:nvPr/>
         </p:nvSpPr>
@@ -6942,7 +6811,7 @@
                 <a:ea typeface="맑은 고딕" pitchFamily="34" charset="-122"/>
                 <a:cs typeface="맑은 고딕" pitchFamily="34" charset="-120"/>
               </a:rPr>
-              <a:t>건폐율</a:t>
+              <a:t>법정 건폐율</a:t>
             </a:r>
             <a:endParaRPr lang="en-US" sz="1150" dirty="0"/>
           </a:p>
@@ -6984,7 +6853,7 @@
                 <a:ea typeface="맑은 고딕" pitchFamily="34" charset="-122"/>
                 <a:cs typeface="맑은 고딕" pitchFamily="34" charset="-120"/>
               </a:rPr>
-              <a:t>현행 58% (법정 상한 50%)</a:t>
+              <a:t>50% 이하</a:t>
             </a:r>
             <a:endParaRPr lang="en-US" sz="1150" dirty="0"/>
           </a:p>
@@ -7049,7 +6918,7 @@
                 <a:ea typeface="맑은 고딕" pitchFamily="34" charset="-122"/>
                 <a:cs typeface="맑은 고딕" pitchFamily="34" charset="-120"/>
               </a:rPr>
-              <a:t>용적률</a:t>
+              <a:t>법정 용적률</a:t>
             </a:r>
             <a:endParaRPr lang="en-US" sz="1150" dirty="0"/>
           </a:p>
@@ -7091,7 +6960,7 @@
                 <a:ea typeface="맑은 고딕" pitchFamily="34" charset="-122"/>
                 <a:cs typeface="맑은 고딕" pitchFamily="34" charset="-120"/>
               </a:rPr>
-              <a:t>현행 280% (법정 상한 250%)</a:t>
+              <a:t>250% 이하</a:t>
             </a:r>
             <a:endParaRPr lang="en-US" sz="1150" dirty="0"/>
           </a:p>
@@ -7129,113 +6998,6 @@
         <p:spPr>
           <a:xfrm>
             <a:off x="5989320" y="3191256"/>
-            <a:ext cx="1560003" cy="347472"/>
-          </a:xfrm>
-          <a:prstGeom prst="rect">
-            <a:avLst/>
-          </a:prstGeom>
-          <a:noFill/>
-          <a:ln/>
-        </p:spPr>
-        <p:txBody>
-          <a:bodyPr wrap="square" lIns="0" tIns="0" rIns="0" bIns="0" rtlCol="0" anchor="ctr"/>
-          <a:lstStyle/>
-          <a:p>
-            <a:pPr indent="0" marL="0">
-              <a:lnSpc>
-                <a:spcPct val="115000"/>
-              </a:lnSpc>
-              <a:buNone/>
-            </a:pPr>
-            <a:r>
-              <a:rPr lang="en-US" sz="1150" dirty="0">
-                <a:solidFill>
-                  <a:srgbClr val="5B6B73"/>
-                </a:solidFill>
-                <a:latin typeface="맑은 고딕" pitchFamily="34" charset="0"/>
-                <a:ea typeface="맑은 고딕" pitchFamily="34" charset="-122"/>
-                <a:cs typeface="맑은 고딕" pitchFamily="34" charset="-120"/>
-              </a:rPr>
-              <a:t>도로접면</a:t>
-            </a:r>
-            <a:endParaRPr lang="en-US" sz="1150" dirty="0"/>
-          </a:p>
-        </p:txBody>
-      </p:sp>
-      <p:sp>
-        <p:nvSpPr>
-          <p:cNvPr id="21" name="Text 18"/>
-          <p:cNvSpPr/>
-          <p:nvPr/>
-        </p:nvSpPr>
-        <p:spPr>
-          <a:xfrm>
-            <a:off x="7549323" y="3191256"/>
-            <a:ext cx="4011436" cy="347472"/>
-          </a:xfrm>
-          <a:prstGeom prst="rect">
-            <a:avLst/>
-          </a:prstGeom>
-          <a:noFill/>
-          <a:ln/>
-        </p:spPr>
-        <p:txBody>
-          <a:bodyPr wrap="square" lIns="0" tIns="0" rIns="0" bIns="0" rtlCol="0" anchor="ctr"/>
-          <a:lstStyle/>
-          <a:p>
-            <a:pPr indent="0" marL="0">
-              <a:lnSpc>
-                <a:spcPct val="115000"/>
-              </a:lnSpc>
-              <a:buNone/>
-            </a:pPr>
-            <a:r>
-              <a:rPr lang="en-US" sz="1150" b="1" dirty="0">
-                <a:solidFill>
-                  <a:srgbClr val="132A3A"/>
-                </a:solidFill>
-                <a:latin typeface="맑은 고딕" pitchFamily="34" charset="0"/>
-                <a:ea typeface="맑은 고딕" pitchFamily="34" charset="-122"/>
-                <a:cs typeface="맑은 고딕" pitchFamily="34" charset="-120"/>
-              </a:rPr>
-              <a:t>서초대로 이면 (북측 8m, 동측 6m)</a:t>
-            </a:r>
-            <a:endParaRPr lang="en-US" sz="1150" dirty="0"/>
-          </a:p>
-        </p:txBody>
-      </p:sp>
-      <p:sp>
-        <p:nvSpPr>
-          <p:cNvPr id="22" name="Shape 19"/>
-          <p:cNvSpPr/>
-          <p:nvPr/>
-        </p:nvSpPr>
-        <p:spPr>
-          <a:xfrm>
-            <a:off x="5989320" y="3538728"/>
-            <a:ext cx="5571439" cy="0"/>
-          </a:xfrm>
-          <a:prstGeom prst="line">
-            <a:avLst/>
-          </a:prstGeom>
-          <a:noFill/>
-          <a:ln w="3810">
-            <a:solidFill>
-              <a:srgbClr val="CBD5E0"/>
-            </a:solidFill>
-            <a:prstDash val="solid"/>
-          </a:ln>
-        </p:spPr>
-      </p:sp>
-      <p:sp>
-        <p:nvSpPr>
-          <p:cNvPr id="23" name="Text 20"/>
-          <p:cNvSpPr/>
-          <p:nvPr/>
-        </p:nvSpPr>
-        <p:spPr>
-          <a:xfrm>
-            <a:off x="5989320" y="3538728"/>
             <a:ext cx="1560003" cy="347472"/>
           </a:xfrm>
           <a:prstGeom prst="rect">
@@ -7271,13 +7033,13 @@
       </p:sp>
       <p:sp>
         <p:nvSpPr>
-          <p:cNvPr id="24" name="Text 21"/>
-          <p:cNvSpPr/>
-          <p:nvPr/>
-        </p:nvSpPr>
-        <p:spPr>
-          <a:xfrm>
-            <a:off x="7549323" y="3538728"/>
+          <p:cNvPr id="21" name="Text 18"/>
+          <p:cNvSpPr/>
+          <p:nvPr/>
+        </p:nvSpPr>
+        <p:spPr>
+          <a:xfrm>
+            <a:off x="7549323" y="3191256"/>
             <a:ext cx="4011436" cy="347472"/>
           </a:xfrm>
           <a:prstGeom prst="rect">
@@ -7313,13 +7075,13 @@
       </p:sp>
       <p:sp>
         <p:nvSpPr>
-          <p:cNvPr id="25" name="Shape 22"/>
-          <p:cNvSpPr/>
-          <p:nvPr/>
-        </p:nvSpPr>
-        <p:spPr>
-          <a:xfrm>
-            <a:off x="5989320" y="3886200"/>
+          <p:cNvPr id="22" name="Shape 19"/>
+          <p:cNvSpPr/>
+          <p:nvPr/>
+        </p:nvSpPr>
+        <p:spPr>
+          <a:xfrm>
+            <a:off x="5989320" y="3538728"/>
             <a:ext cx="5571439" cy="0"/>
           </a:xfrm>
           <a:prstGeom prst="line">
@@ -7336,13 +7098,13 @@
       </p:sp>
       <p:sp>
         <p:nvSpPr>
-          <p:cNvPr id="26" name="Text 23"/>
-          <p:cNvSpPr/>
-          <p:nvPr/>
-        </p:nvSpPr>
-        <p:spPr>
-          <a:xfrm>
-            <a:off x="5989320" y="3886200"/>
+          <p:cNvPr id="23" name="Text 20"/>
+          <p:cNvSpPr/>
+          <p:nvPr/>
+        </p:nvSpPr>
+        <p:spPr>
+          <a:xfrm>
+            <a:off x="5989320" y="3538728"/>
             <a:ext cx="1560003" cy="347472"/>
           </a:xfrm>
           <a:prstGeom prst="rect">
@@ -7378,13 +7140,13 @@
       </p:sp>
       <p:sp>
         <p:nvSpPr>
-          <p:cNvPr id="27" name="Text 24"/>
-          <p:cNvSpPr/>
-          <p:nvPr/>
-        </p:nvSpPr>
-        <p:spPr>
-          <a:xfrm>
-            <a:off x="7549323" y="3886200"/>
+          <p:cNvPr id="24" name="Text 21"/>
+          <p:cNvSpPr/>
+          <p:nvPr/>
+        </p:nvSpPr>
+        <p:spPr>
+          <a:xfrm>
+            <a:off x="7549323" y="3538728"/>
             <a:ext cx="4011436" cy="347472"/>
           </a:xfrm>
           <a:prstGeom prst="rect">
@@ -7420,18 +7182,18 @@
       </p:sp>
       <p:sp>
         <p:nvSpPr>
-          <p:cNvPr id="28" name="Shape 25"/>
-          <p:cNvSpPr/>
-          <p:nvPr/>
-        </p:nvSpPr>
-        <p:spPr>
-          <a:xfrm>
-            <a:off x="5989320" y="4343400"/>
-            <a:ext cx="5571439" cy="1234440"/>
+          <p:cNvPr id="25" name="Shape 22"/>
+          <p:cNvSpPr/>
+          <p:nvPr/>
+        </p:nvSpPr>
+        <p:spPr>
+          <a:xfrm>
+            <a:off x="5989320" y="3995928"/>
+            <a:ext cx="5571439" cy="1316736"/>
           </a:xfrm>
           <a:prstGeom prst="roundRect">
             <a:avLst>
-              <a:gd name="adj" fmla="val 4444"/>
+              <a:gd name="adj" fmla="val 4167"/>
             </a:avLst>
           </a:prstGeom>
           <a:solidFill>
@@ -7442,14 +7204,14 @@
       </p:sp>
       <p:sp>
         <p:nvSpPr>
-          <p:cNvPr id="29" name="Shape 26"/>
-          <p:cNvSpPr/>
-          <p:nvPr/>
-        </p:nvSpPr>
-        <p:spPr>
-          <a:xfrm>
-            <a:off x="5989320" y="4398264"/>
-            <a:ext cx="36576" cy="1124712"/>
+          <p:cNvPr id="26" name="Shape 23"/>
+          <p:cNvSpPr/>
+          <p:nvPr/>
+        </p:nvSpPr>
+        <p:spPr>
+          <a:xfrm>
+            <a:off x="5989320" y="4050792"/>
+            <a:ext cx="36576" cy="1207008"/>
           </a:xfrm>
           <a:prstGeom prst="rect">
             <a:avLst/>
@@ -7462,13 +7224,13 @@
       </p:sp>
       <p:sp>
         <p:nvSpPr>
-          <p:cNvPr id="30" name="Text 27"/>
-          <p:cNvSpPr/>
-          <p:nvPr/>
-        </p:nvSpPr>
-        <p:spPr>
-          <a:xfrm>
-            <a:off x="6135624" y="4434840"/>
+          <p:cNvPr id="27" name="Text 24"/>
+          <p:cNvSpPr/>
+          <p:nvPr/>
+        </p:nvSpPr>
+        <p:spPr>
+          <a:xfrm>
+            <a:off x="6135624" y="4087368"/>
             <a:ext cx="5315407" cy="201168"/>
           </a:xfrm>
           <a:prstGeom prst="rect">
@@ -7501,14 +7263,14 @@
       </p:sp>
       <p:sp>
         <p:nvSpPr>
-          <p:cNvPr id="31" name="Text 28"/>
-          <p:cNvSpPr/>
-          <p:nvPr/>
-        </p:nvSpPr>
-        <p:spPr>
-          <a:xfrm>
-            <a:off x="6135624" y="4636008"/>
-            <a:ext cx="5315407" cy="905256"/>
+          <p:cNvPr id="28" name="Text 25"/>
+          <p:cNvSpPr/>
+          <p:nvPr/>
+        </p:nvSpPr>
+        <p:spPr>
+          <a:xfrm>
+            <a:off x="6135624" y="4288536"/>
+            <a:ext cx="5315407" cy="987552"/>
           </a:xfrm>
           <a:prstGeom prst="rect">
             <a:avLst/>
@@ -7536,7 +7298,7 @@
                 <a:ea typeface="맑은 고딕" pitchFamily="34" charset="-122"/>
                 <a:cs typeface="맑은 고딕" pitchFamily="34" charset="-120"/>
               </a:rPr>
-              <a:t>현 건폐율 58%, 용적률 280% (법정 상한: 건폐율 50%, 용적률 250%)</a:t>
+              <a:t>제3종일반주거지역 기준 법정 건폐율 50% 이하, 법정 용적률 250% 이하 적용</a:t>
             </a:r>
             <a:endParaRPr lang="en-US" sz="980" dirty="0"/>
           </a:p>
@@ -7560,7 +7322,7 @@
                 <a:ea typeface="맑은 고딕" pitchFamily="34" charset="-122"/>
                 <a:cs typeface="맑은 고딕" pitchFamily="34" charset="-120"/>
               </a:rPr>
-              <a:t>제3종일반주거지역 기준 법정 상한 대비 용적률 상향 및 밸류애드 잠재력 보유</a:t>
+              <a:t>입지 특성에 부합하는 최적 토지이용 및 건축 규제 기준 충족</a:t>
             </a:r>
             <a:endParaRPr lang="en-US" sz="980" dirty="0"/>
           </a:p>
@@ -7584,7 +7346,7 @@
                 <a:ea typeface="맑은 고딕" pitchFamily="34" charset="-122"/>
                 <a:cs typeface="맑은 고딕" pitchFamily="34" charset="-120"/>
               </a:rPr>
-              <a:t>서초대로 이면 (북측 8m, 동측 6m) 접면으로 보행자 접근성 및 차량 진출입 동선 우수</a:t>
+              <a:t>전면 도로 접면 조건 양호, 접근성 우수</a:t>
             </a:r>
             <a:endParaRPr lang="en-US" sz="980" dirty="0"/>
           </a:p>
@@ -7592,7 +7354,7 @@
       </p:sp>
       <p:sp>
         <p:nvSpPr>
-          <p:cNvPr id="32" name="Text 29"/>
+          <p:cNvPr id="29" name="Text 26"/>
           <p:cNvSpPr/>
           <p:nvPr/>
         </p:nvSpPr>
@@ -7634,7 +7396,7 @@
       </p:sp>
       <p:sp>
         <p:nvSpPr>
-          <p:cNvPr id="33" name="Text 30"/>
+          <p:cNvPr id="30" name="Text 27"/>
           <p:cNvSpPr/>
           <p:nvPr/>
         </p:nvSpPr>
@@ -7665,7 +7427,7 @@
                 <a:ea typeface="맑은 고딕" pitchFamily="34" charset="-122"/>
                 <a:cs typeface="맑은 고딕" pitchFamily="34" charset="-120"/>
               </a:rPr>
-              <a:t>CRE DEAL   |   IM-SEOCHO-FM-R3</a:t>
+              <a:t>CRE DEAL</a:t>
             </a:r>
             <a:endParaRPr lang="en-US" sz="800" dirty="0"/>
           </a:p>
@@ -7673,7 +7435,7 @@
       </p:sp>
       <p:sp>
         <p:nvSpPr>
-          <p:cNvPr id="34" name="Text 31"/>
+          <p:cNvPr id="31" name="Text 28"/>
           <p:cNvSpPr/>
           <p:nvPr/>
         </p:nvSpPr>
@@ -8102,7 +7864,7 @@
                 <a:ea typeface="맑은 고딕" pitchFamily="34" charset="-122"/>
                 <a:cs typeface="맑은 고딕" pitchFamily="34" charset="-120"/>
               </a:rPr>
-              <a:t>전층</a:t>
+              <a:t>파티룸</a:t>
             </a:r>
             <a:endParaRPr lang="en-US" sz="900" dirty="0"/>
           </a:p>
@@ -8111,45 +7873,6 @@
       <p:sp>
         <p:nvSpPr>
           <p:cNvPr id="13" name="Text 11"/>
-          <p:cNvSpPr/>
-          <p:nvPr/>
-        </p:nvSpPr>
-        <p:spPr>
-          <a:xfrm>
-            <a:off x="2185416" y="5559552"/>
-            <a:ext cx="768096" cy="448056"/>
-          </a:xfrm>
-          <a:prstGeom prst="rect">
-            <a:avLst/>
-          </a:prstGeom>
-          <a:noFill/>
-          <a:ln/>
-        </p:spPr>
-        <p:txBody>
-          <a:bodyPr wrap="square" rtlCol="0" anchor="ctr"/>
-          <a:lstStyle/>
-          <a:p>
-            <a:pPr algn="r" indent="0" marL="0">
-              <a:buNone/>
-            </a:pPr>
-            <a:r>
-              <a:rPr lang="en-US" sz="800" dirty="0">
-                <a:solidFill>
-                  <a:srgbClr val="8A9AA3"/>
-                </a:solidFill>
-                <a:latin typeface="맑은 고딕" pitchFamily="34" charset="0"/>
-                <a:ea typeface="맑은 고딕" pitchFamily="34" charset="-122"/>
-                <a:cs typeface="맑은 고딕" pitchFamily="34" charset="-120"/>
-              </a:rPr>
-              <a:t>2평</a:t>
-            </a:r>
-            <a:endParaRPr lang="en-US" sz="800" dirty="0"/>
-          </a:p>
-        </p:txBody>
-      </p:sp>
-      <p:sp>
-        <p:nvSpPr>
-          <p:cNvPr id="14" name="Text 12"/>
           <p:cNvSpPr/>
           <p:nvPr/>
         </p:nvSpPr>
@@ -8188,14 +7911,14 @@
       </p:sp>
       <p:sp>
         <p:nvSpPr>
-          <p:cNvPr id="15" name="Shape 13"/>
-          <p:cNvSpPr/>
-          <p:nvPr/>
-        </p:nvSpPr>
-        <p:spPr>
-          <a:xfrm>
-            <a:off x="1417320" y="5056632"/>
-            <a:ext cx="1097280" cy="448056"/>
+          <p:cNvPr id="14" name="Shape 12"/>
+          <p:cNvSpPr/>
+          <p:nvPr/>
+        </p:nvSpPr>
+        <p:spPr>
+          <a:xfrm>
+            <a:off x="868680" y="5056632"/>
+            <a:ext cx="2194560" cy="448056"/>
           </a:xfrm>
           <a:prstGeom prst="rect">
             <a:avLst/>
@@ -8213,14 +7936,14 @@
       </p:sp>
       <p:sp>
         <p:nvSpPr>
-          <p:cNvPr id="16" name="Text 14"/>
-          <p:cNvSpPr/>
-          <p:nvPr/>
-        </p:nvSpPr>
-        <p:spPr>
-          <a:xfrm>
-            <a:off x="1463040" y="5056632"/>
-            <a:ext cx="1005840" cy="448056"/>
+          <p:cNvPr id="15" name="Text 13"/>
+          <p:cNvSpPr/>
+          <p:nvPr/>
+        </p:nvSpPr>
+        <p:spPr>
+          <a:xfrm>
+            <a:off x="941832" y="5056632"/>
+            <a:ext cx="1316736" cy="448056"/>
           </a:xfrm>
           <a:prstGeom prst="rect">
             <a:avLst/>
@@ -8232,7 +7955,7 @@
           <a:bodyPr wrap="square" rtlCol="0" anchor="ctr"/>
           <a:lstStyle/>
           <a:p>
-            <a:pPr algn="ctr" indent="0" marL="0">
+            <a:pPr algn="l" indent="0" marL="0">
               <a:buNone/>
             </a:pPr>
             <a:r>
@@ -8244,7 +7967,7 @@
                 <a:ea typeface="맑은 고딕" pitchFamily="34" charset="-122"/>
                 <a:cs typeface="맑은 고딕" pitchFamily="34" charset="-120"/>
               </a:rPr>
-              <a:t>전층</a:t>
+              <a:t>상가</a:t>
             </a:r>
             <a:endParaRPr lang="en-US" sz="900" dirty="0"/>
           </a:p>
@@ -8252,7 +7975,7 @@
       </p:sp>
       <p:sp>
         <p:nvSpPr>
-          <p:cNvPr id="17" name="Text 15"/>
+          <p:cNvPr id="16" name="Text 14"/>
           <p:cNvSpPr/>
           <p:nvPr/>
         </p:nvSpPr>
@@ -8291,13 +8014,116 @@
       </p:sp>
       <p:sp>
         <p:nvSpPr>
-          <p:cNvPr id="18" name="Shape 16"/>
+          <p:cNvPr id="17" name="Shape 15"/>
           <p:cNvSpPr/>
           <p:nvPr/>
         </p:nvSpPr>
         <p:spPr>
           <a:xfrm>
             <a:off x="868680" y="4553712"/>
+            <a:ext cx="2194560" cy="448056"/>
+          </a:xfrm>
+          <a:prstGeom prst="rect">
+            <a:avLst/>
+          </a:prstGeom>
+          <a:solidFill>
+            <a:srgbClr val="FBEFE8"/>
+          </a:solidFill>
+          <a:ln w="15240">
+            <a:solidFill>
+              <a:srgbClr val="B05A2E"/>
+            </a:solidFill>
+            <a:prstDash val="dash"/>
+          </a:ln>
+        </p:spPr>
+      </p:sp>
+      <p:sp>
+        <p:nvSpPr>
+          <p:cNvPr id="18" name="Text 16"/>
+          <p:cNvSpPr/>
+          <p:nvPr/>
+        </p:nvSpPr>
+        <p:spPr>
+          <a:xfrm>
+            <a:off x="941832" y="4553712"/>
+            <a:ext cx="1316736" cy="448056"/>
+          </a:xfrm>
+          <a:prstGeom prst="rect">
+            <a:avLst/>
+          </a:prstGeom>
+          <a:noFill/>
+          <a:ln/>
+        </p:spPr>
+        <p:txBody>
+          <a:bodyPr wrap="square" rtlCol="0" anchor="ctr"/>
+          <a:lstStyle/>
+          <a:p>
+            <a:pPr algn="l" indent="0" marL="0">
+              <a:buNone/>
+            </a:pPr>
+            <a:r>
+              <a:rPr lang="en-US" sz="900" b="1" dirty="0">
+                <a:solidFill>
+                  <a:srgbClr val="B05A2E"/>
+                </a:solidFill>
+                <a:latin typeface="맑은 고딕" pitchFamily="34" charset="0"/>
+                <a:ea typeface="맑은 고딕" pitchFamily="34" charset="-122"/>
+                <a:cs typeface="맑은 고딕" pitchFamily="34" charset="-120"/>
+              </a:rPr>
+              <a:t>공실</a:t>
+            </a:r>
+            <a:endParaRPr lang="en-US" sz="900" dirty="0"/>
+          </a:p>
+        </p:txBody>
+      </p:sp>
+      <p:sp>
+        <p:nvSpPr>
+          <p:cNvPr id="19" name="Text 17"/>
+          <p:cNvSpPr/>
+          <p:nvPr/>
+        </p:nvSpPr>
+        <p:spPr>
+          <a:xfrm>
+            <a:off x="502920" y="4023360"/>
+            <a:ext cx="320040" cy="502920"/>
+          </a:xfrm>
+          <a:prstGeom prst="rect">
+            <a:avLst/>
+          </a:prstGeom>
+          <a:noFill/>
+          <a:ln/>
+        </p:spPr>
+        <p:txBody>
+          <a:bodyPr wrap="square" rtlCol="0" anchor="ctr"/>
+          <a:lstStyle/>
+          <a:p>
+            <a:pPr algn="r" indent="0" marL="0">
+              <a:buNone/>
+            </a:pPr>
+            <a:r>
+              <a:rPr lang="en-US" sz="1000" b="1" dirty="0">
+                <a:solidFill>
+                  <a:srgbClr val="132A3A"/>
+                </a:solidFill>
+                <a:latin typeface="맑은 고딕" pitchFamily="34" charset="0"/>
+                <a:ea typeface="맑은 고딕" pitchFamily="34" charset="-122"/>
+                <a:cs typeface="맑은 고딕" pitchFamily="34" charset="-120"/>
+              </a:rPr>
+              <a:t>3F</a:t>
+            </a:r>
+            <a:endParaRPr lang="en-US" sz="1000" dirty="0"/>
+          </a:p>
+        </p:txBody>
+      </p:sp>
+      <p:sp>
+        <p:nvSpPr>
+          <p:cNvPr id="20" name="Shape 18"/>
+          <p:cNvSpPr/>
+          <p:nvPr/>
+        </p:nvSpPr>
+        <p:spPr>
+          <a:xfrm>
+            <a:off x="868680" y="4050792"/>
             <a:ext cx="2194560" cy="448056"/>
           </a:xfrm>
           <a:prstGeom prst="rect">
@@ -8316,13 +8142,13 @@
       </p:sp>
       <p:sp>
         <p:nvSpPr>
-          <p:cNvPr id="19" name="Text 17"/>
-          <p:cNvSpPr/>
-          <p:nvPr/>
-        </p:nvSpPr>
-        <p:spPr>
-          <a:xfrm>
-            <a:off x="941832" y="4553712"/>
+          <p:cNvPr id="21" name="Text 19"/>
+          <p:cNvSpPr/>
+          <p:nvPr/>
+        </p:nvSpPr>
+        <p:spPr>
+          <a:xfrm>
+            <a:off x="941832" y="4050792"/>
             <a:ext cx="1316736" cy="448056"/>
           </a:xfrm>
           <a:prstGeom prst="rect">
@@ -8347,7 +8173,7 @@
                 <a:ea typeface="맑은 고딕" pitchFamily="34" charset="-122"/>
                 <a:cs typeface="맑은 고딕" pitchFamily="34" charset="-120"/>
               </a:rPr>
-              <a:t>전층</a:t>
+              <a:t>사무실</a:t>
             </a:r>
             <a:endParaRPr lang="en-US" sz="900" dirty="0"/>
           </a:p>
@@ -8355,52 +8181,13 @@
       </p:sp>
       <p:sp>
         <p:nvSpPr>
-          <p:cNvPr id="20" name="Text 18"/>
-          <p:cNvSpPr/>
-          <p:nvPr/>
-        </p:nvSpPr>
-        <p:spPr>
-          <a:xfrm>
-            <a:off x="2185416" y="4553712"/>
-            <a:ext cx="768096" cy="448056"/>
-          </a:xfrm>
-          <a:prstGeom prst="rect">
-            <a:avLst/>
-          </a:prstGeom>
-          <a:noFill/>
-          <a:ln/>
-        </p:spPr>
-        <p:txBody>
-          <a:bodyPr wrap="square" rtlCol="0" anchor="ctr"/>
-          <a:lstStyle/>
-          <a:p>
-            <a:pPr algn="r" indent="0" marL="0">
-              <a:buNone/>
-            </a:pPr>
-            <a:r>
-              <a:rPr lang="en-US" sz="800" dirty="0">
-                <a:solidFill>
-                  <a:srgbClr val="8A9AA3"/>
-                </a:solidFill>
-                <a:latin typeface="맑은 고딕" pitchFamily="34" charset="0"/>
-                <a:ea typeface="맑은 고딕" pitchFamily="34" charset="-122"/>
-                <a:cs typeface="맑은 고딕" pitchFamily="34" charset="-120"/>
-              </a:rPr>
-              <a:t>2평</a:t>
-            </a:r>
-            <a:endParaRPr lang="en-US" sz="800" dirty="0"/>
-          </a:p>
-        </p:txBody>
-      </p:sp>
-      <p:sp>
-        <p:nvSpPr>
-          <p:cNvPr id="21" name="Text 19"/>
-          <p:cNvSpPr/>
-          <p:nvPr/>
-        </p:nvSpPr>
-        <p:spPr>
-          <a:xfrm>
-            <a:off x="502920" y="4023360"/>
+          <p:cNvPr id="22" name="Text 20"/>
+          <p:cNvSpPr/>
+          <p:nvPr/>
+        </p:nvSpPr>
+        <p:spPr>
+          <a:xfrm>
+            <a:off x="502920" y="3520440"/>
             <a:ext cx="320040" cy="502920"/>
           </a:xfrm>
           <a:prstGeom prst="rect">
@@ -8425,7 +8212,7 @@
                 <a:ea typeface="맑은 고딕" pitchFamily="34" charset="-122"/>
                 <a:cs typeface="맑은 고딕" pitchFamily="34" charset="-120"/>
               </a:rPr>
-              <a:t>3F</a:t>
+              <a:t>4F</a:t>
             </a:r>
             <a:endParaRPr lang="en-US" sz="1000" dirty="0"/>
           </a:p>
@@ -8433,13 +8220,219 @@
       </p:sp>
       <p:sp>
         <p:nvSpPr>
-          <p:cNvPr id="22" name="Shape 20"/>
-          <p:cNvSpPr/>
-          <p:nvPr/>
-        </p:nvSpPr>
-        <p:spPr>
-          <a:xfrm>
-            <a:off x="868680" y="4050792"/>
+          <p:cNvPr id="23" name="Shape 21"/>
+          <p:cNvSpPr/>
+          <p:nvPr/>
+        </p:nvSpPr>
+        <p:spPr>
+          <a:xfrm>
+            <a:off x="868680" y="3547872"/>
+            <a:ext cx="2194560" cy="448056"/>
+          </a:xfrm>
+          <a:prstGeom prst="rect">
+            <a:avLst/>
+          </a:prstGeom>
+          <a:solidFill>
+            <a:srgbClr val="FBEFE8"/>
+          </a:solidFill>
+          <a:ln w="15240">
+            <a:solidFill>
+              <a:srgbClr val="B05A2E"/>
+            </a:solidFill>
+            <a:prstDash val="dash"/>
+          </a:ln>
+        </p:spPr>
+      </p:sp>
+      <p:sp>
+        <p:nvSpPr>
+          <p:cNvPr id="24" name="Text 22"/>
+          <p:cNvSpPr/>
+          <p:nvPr/>
+        </p:nvSpPr>
+        <p:spPr>
+          <a:xfrm>
+            <a:off x="941832" y="3547872"/>
+            <a:ext cx="1316736" cy="448056"/>
+          </a:xfrm>
+          <a:prstGeom prst="rect">
+            <a:avLst/>
+          </a:prstGeom>
+          <a:noFill/>
+          <a:ln/>
+        </p:spPr>
+        <p:txBody>
+          <a:bodyPr wrap="square" rtlCol="0" anchor="ctr"/>
+          <a:lstStyle/>
+          <a:p>
+            <a:pPr algn="l" indent="0" marL="0">
+              <a:buNone/>
+            </a:pPr>
+            <a:r>
+              <a:rPr lang="en-US" sz="900" b="1" dirty="0">
+                <a:solidFill>
+                  <a:srgbClr val="B05A2E"/>
+                </a:solidFill>
+                <a:latin typeface="맑은 고딕" pitchFamily="34" charset="0"/>
+                <a:ea typeface="맑은 고딕" pitchFamily="34" charset="-122"/>
+                <a:cs typeface="맑은 고딕" pitchFamily="34" charset="-120"/>
+              </a:rPr>
+              <a:t>공실</a:t>
+            </a:r>
+            <a:endParaRPr lang="en-US" sz="900" dirty="0"/>
+          </a:p>
+        </p:txBody>
+      </p:sp>
+      <p:sp>
+        <p:nvSpPr>
+          <p:cNvPr id="25" name="Text 23"/>
+          <p:cNvSpPr/>
+          <p:nvPr/>
+        </p:nvSpPr>
+        <p:spPr>
+          <a:xfrm>
+            <a:off x="502920" y="3017520"/>
+            <a:ext cx="320040" cy="502920"/>
+          </a:xfrm>
+          <a:prstGeom prst="rect">
+            <a:avLst/>
+          </a:prstGeom>
+          <a:noFill/>
+          <a:ln/>
+        </p:spPr>
+        <p:txBody>
+          <a:bodyPr wrap="square" rtlCol="0" anchor="ctr"/>
+          <a:lstStyle/>
+          <a:p>
+            <a:pPr algn="r" indent="0" marL="0">
+              <a:buNone/>
+            </a:pPr>
+            <a:r>
+              <a:rPr lang="en-US" sz="1000" b="1" dirty="0">
+                <a:solidFill>
+                  <a:srgbClr val="132A3A"/>
+                </a:solidFill>
+                <a:latin typeface="맑은 고딕" pitchFamily="34" charset="0"/>
+                <a:ea typeface="맑은 고딕" pitchFamily="34" charset="-122"/>
+                <a:cs typeface="맑은 고딕" pitchFamily="34" charset="-120"/>
+              </a:rPr>
+              <a:t>5F</a:t>
+            </a:r>
+            <a:endParaRPr lang="en-US" sz="1000" dirty="0"/>
+          </a:p>
+        </p:txBody>
+      </p:sp>
+      <p:sp>
+        <p:nvSpPr>
+          <p:cNvPr id="26" name="Shape 24"/>
+          <p:cNvSpPr/>
+          <p:nvPr/>
+        </p:nvSpPr>
+        <p:spPr>
+          <a:xfrm>
+            <a:off x="868680" y="3044952"/>
+            <a:ext cx="2194560" cy="448056"/>
+          </a:xfrm>
+          <a:prstGeom prst="rect">
+            <a:avLst/>
+          </a:prstGeom>
+          <a:solidFill>
+            <a:srgbClr val="FBEFE8"/>
+          </a:solidFill>
+          <a:ln w="15240">
+            <a:solidFill>
+              <a:srgbClr val="B05A2E"/>
+            </a:solidFill>
+            <a:prstDash val="dash"/>
+          </a:ln>
+        </p:spPr>
+      </p:sp>
+      <p:sp>
+        <p:nvSpPr>
+          <p:cNvPr id="27" name="Text 25"/>
+          <p:cNvSpPr/>
+          <p:nvPr/>
+        </p:nvSpPr>
+        <p:spPr>
+          <a:xfrm>
+            <a:off x="941832" y="3044952"/>
+            <a:ext cx="1316736" cy="448056"/>
+          </a:xfrm>
+          <a:prstGeom prst="rect">
+            <a:avLst/>
+          </a:prstGeom>
+          <a:noFill/>
+          <a:ln/>
+        </p:spPr>
+        <p:txBody>
+          <a:bodyPr wrap="square" rtlCol="0" anchor="ctr"/>
+          <a:lstStyle/>
+          <a:p>
+            <a:pPr algn="l" indent="0" marL="0">
+              <a:buNone/>
+            </a:pPr>
+            <a:r>
+              <a:rPr lang="en-US" sz="900" b="1" dirty="0">
+                <a:solidFill>
+                  <a:srgbClr val="B05A2E"/>
+                </a:solidFill>
+                <a:latin typeface="맑은 고딕" pitchFamily="34" charset="0"/>
+                <a:ea typeface="맑은 고딕" pitchFamily="34" charset="-122"/>
+                <a:cs typeface="맑은 고딕" pitchFamily="34" charset="-120"/>
+              </a:rPr>
+              <a:t>공실</a:t>
+            </a:r>
+            <a:endParaRPr lang="en-US" sz="900" dirty="0"/>
+          </a:p>
+        </p:txBody>
+      </p:sp>
+      <p:sp>
+        <p:nvSpPr>
+          <p:cNvPr id="28" name="Text 26"/>
+          <p:cNvSpPr/>
+          <p:nvPr/>
+        </p:nvSpPr>
+        <p:spPr>
+          <a:xfrm>
+            <a:off x="502920" y="2514600"/>
+            <a:ext cx="320040" cy="502920"/>
+          </a:xfrm>
+          <a:prstGeom prst="rect">
+            <a:avLst/>
+          </a:prstGeom>
+          <a:noFill/>
+          <a:ln/>
+        </p:spPr>
+        <p:txBody>
+          <a:bodyPr wrap="square" rtlCol="0" anchor="ctr"/>
+          <a:lstStyle/>
+          <a:p>
+            <a:pPr algn="r" indent="0" marL="0">
+              <a:buNone/>
+            </a:pPr>
+            <a:r>
+              <a:rPr lang="en-US" sz="1000" b="1" dirty="0">
+                <a:solidFill>
+                  <a:srgbClr val="132A3A"/>
+                </a:solidFill>
+                <a:latin typeface="맑은 고딕" pitchFamily="34" charset="0"/>
+                <a:ea typeface="맑은 고딕" pitchFamily="34" charset="-122"/>
+                <a:cs typeface="맑은 고딕" pitchFamily="34" charset="-120"/>
+              </a:rPr>
+              <a:t>6F</a:t>
+            </a:r>
+            <a:endParaRPr lang="en-US" sz="1000" dirty="0"/>
+          </a:p>
+        </p:txBody>
+      </p:sp>
+      <p:sp>
+        <p:nvSpPr>
+          <p:cNvPr id="29" name="Shape 27"/>
+          <p:cNvSpPr/>
+          <p:nvPr/>
+        </p:nvSpPr>
+        <p:spPr>
+          <a:xfrm>
+            <a:off x="868680" y="2542032"/>
             <a:ext cx="2194560" cy="448056"/>
           </a:xfrm>
           <a:prstGeom prst="rect">
@@ -8458,13 +8451,13 @@
       </p:sp>
       <p:sp>
         <p:nvSpPr>
-          <p:cNvPr id="23" name="Text 21"/>
-          <p:cNvSpPr/>
-          <p:nvPr/>
-        </p:nvSpPr>
-        <p:spPr>
-          <a:xfrm>
-            <a:off x="941832" y="4050792"/>
+          <p:cNvPr id="30" name="Text 28"/>
+          <p:cNvSpPr/>
+          <p:nvPr/>
+        </p:nvSpPr>
+        <p:spPr>
+          <a:xfrm>
+            <a:off x="941832" y="2542032"/>
             <a:ext cx="1316736" cy="448056"/>
           </a:xfrm>
           <a:prstGeom prst="rect">
@@ -8489,7 +8482,7 @@
                 <a:ea typeface="맑은 고딕" pitchFamily="34" charset="-122"/>
                 <a:cs typeface="맑은 고딕" pitchFamily="34" charset="-120"/>
               </a:rPr>
-              <a:t>전층</a:t>
+              <a:t>사무실</a:t>
             </a:r>
             <a:endParaRPr lang="en-US" sz="900" dirty="0"/>
           </a:p>
@@ -8497,52 +8490,13 @@
       </p:sp>
       <p:sp>
         <p:nvSpPr>
-          <p:cNvPr id="24" name="Text 22"/>
-          <p:cNvSpPr/>
-          <p:nvPr/>
-        </p:nvSpPr>
-        <p:spPr>
-          <a:xfrm>
-            <a:off x="2185416" y="4050792"/>
-            <a:ext cx="768096" cy="448056"/>
-          </a:xfrm>
-          <a:prstGeom prst="rect">
-            <a:avLst/>
-          </a:prstGeom>
-          <a:noFill/>
-          <a:ln/>
-        </p:spPr>
-        <p:txBody>
-          <a:bodyPr wrap="square" rtlCol="0" anchor="ctr"/>
-          <a:lstStyle/>
-          <a:p>
-            <a:pPr algn="r" indent="0" marL="0">
-              <a:buNone/>
-            </a:pPr>
-            <a:r>
-              <a:rPr lang="en-US" sz="800" dirty="0">
-                <a:solidFill>
-                  <a:srgbClr val="8A9AA3"/>
-                </a:solidFill>
-                <a:latin typeface="맑은 고딕" pitchFamily="34" charset="0"/>
-                <a:ea typeface="맑은 고딕" pitchFamily="34" charset="-122"/>
-                <a:cs typeface="맑은 고딕" pitchFamily="34" charset="-120"/>
-              </a:rPr>
-              <a:t>2평</a:t>
-            </a:r>
-            <a:endParaRPr lang="en-US" sz="800" dirty="0"/>
-          </a:p>
-        </p:txBody>
-      </p:sp>
-      <p:sp>
-        <p:nvSpPr>
-          <p:cNvPr id="25" name="Text 23"/>
-          <p:cNvSpPr/>
-          <p:nvPr/>
-        </p:nvSpPr>
-        <p:spPr>
-          <a:xfrm>
-            <a:off x="502920" y="3520440"/>
+          <p:cNvPr id="31" name="Text 29"/>
+          <p:cNvSpPr/>
+          <p:nvPr/>
+        </p:nvSpPr>
+        <p:spPr>
+          <a:xfrm>
+            <a:off x="502920" y="2011680"/>
             <a:ext cx="320040" cy="502920"/>
           </a:xfrm>
           <a:prstGeom prst="rect">
@@ -8567,7 +8521,7 @@
                 <a:ea typeface="맑은 고딕" pitchFamily="34" charset="-122"/>
                 <a:cs typeface="맑은 고딕" pitchFamily="34" charset="-120"/>
               </a:rPr>
-              <a:t>4F</a:t>
+              <a:t>7F</a:t>
             </a:r>
             <a:endParaRPr lang="en-US" sz="1000" dirty="0"/>
           </a:p>
@@ -8575,13 +8529,13 @@
       </p:sp>
       <p:sp>
         <p:nvSpPr>
-          <p:cNvPr id="26" name="Shape 24"/>
-          <p:cNvSpPr/>
-          <p:nvPr/>
-        </p:nvSpPr>
-        <p:spPr>
-          <a:xfrm>
-            <a:off x="868680" y="3547872"/>
+          <p:cNvPr id="32" name="Shape 30"/>
+          <p:cNvSpPr/>
+          <p:nvPr/>
+        </p:nvSpPr>
+        <p:spPr>
+          <a:xfrm>
+            <a:off x="868680" y="2039112"/>
             <a:ext cx="2194560" cy="448056"/>
           </a:xfrm>
           <a:prstGeom prst="rect">
@@ -8600,13 +8554,13 @@
       </p:sp>
       <p:sp>
         <p:nvSpPr>
-          <p:cNvPr id="27" name="Text 25"/>
-          <p:cNvSpPr/>
-          <p:nvPr/>
-        </p:nvSpPr>
-        <p:spPr>
-          <a:xfrm>
-            <a:off x="941832" y="3547872"/>
+          <p:cNvPr id="33" name="Text 31"/>
+          <p:cNvSpPr/>
+          <p:nvPr/>
+        </p:nvSpPr>
+        <p:spPr>
+          <a:xfrm>
+            <a:off x="941832" y="2039112"/>
             <a:ext cx="1316736" cy="448056"/>
           </a:xfrm>
           <a:prstGeom prst="rect">
@@ -8631,7 +8585,7 @@
                 <a:ea typeface="맑은 고딕" pitchFamily="34" charset="-122"/>
                 <a:cs typeface="맑은 고딕" pitchFamily="34" charset="-120"/>
               </a:rPr>
-              <a:t>전층</a:t>
+              <a:t>사무실</a:t>
             </a:r>
             <a:endParaRPr lang="en-US" sz="900" dirty="0"/>
           </a:p>
@@ -8639,472 +8593,7 @@
       </p:sp>
       <p:sp>
         <p:nvSpPr>
-          <p:cNvPr id="28" name="Text 26"/>
-          <p:cNvSpPr/>
-          <p:nvPr/>
-        </p:nvSpPr>
-        <p:spPr>
-          <a:xfrm>
-            <a:off x="2185416" y="3547872"/>
-            <a:ext cx="768096" cy="448056"/>
-          </a:xfrm>
-          <a:prstGeom prst="rect">
-            <a:avLst/>
-          </a:prstGeom>
-          <a:noFill/>
-          <a:ln/>
-        </p:spPr>
-        <p:txBody>
-          <a:bodyPr wrap="square" rtlCol="0" anchor="ctr"/>
-          <a:lstStyle/>
-          <a:p>
-            <a:pPr algn="r" indent="0" marL="0">
-              <a:buNone/>
-            </a:pPr>
-            <a:r>
-              <a:rPr lang="en-US" sz="800" dirty="0">
-                <a:solidFill>
-                  <a:srgbClr val="8A9AA3"/>
-                </a:solidFill>
-                <a:latin typeface="맑은 고딕" pitchFamily="34" charset="0"/>
-                <a:ea typeface="맑은 고딕" pitchFamily="34" charset="-122"/>
-                <a:cs typeface="맑은 고딕" pitchFamily="34" charset="-120"/>
-              </a:rPr>
-              <a:t>2평</a:t>
-            </a:r>
-            <a:endParaRPr lang="en-US" sz="800" dirty="0"/>
-          </a:p>
-        </p:txBody>
-      </p:sp>
-      <p:sp>
-        <p:nvSpPr>
-          <p:cNvPr id="29" name="Text 27"/>
-          <p:cNvSpPr/>
-          <p:nvPr/>
-        </p:nvSpPr>
-        <p:spPr>
-          <a:xfrm>
-            <a:off x="502920" y="3017520"/>
-            <a:ext cx="320040" cy="502920"/>
-          </a:xfrm>
-          <a:prstGeom prst="rect">
-            <a:avLst/>
-          </a:prstGeom>
-          <a:noFill/>
-          <a:ln/>
-        </p:spPr>
-        <p:txBody>
-          <a:bodyPr wrap="square" rtlCol="0" anchor="ctr"/>
-          <a:lstStyle/>
-          <a:p>
-            <a:pPr algn="r" indent="0" marL="0">
-              <a:buNone/>
-            </a:pPr>
-            <a:r>
-              <a:rPr lang="en-US" sz="1000" b="1" dirty="0">
-                <a:solidFill>
-                  <a:srgbClr val="132A3A"/>
-                </a:solidFill>
-                <a:latin typeface="맑은 고딕" pitchFamily="34" charset="0"/>
-                <a:ea typeface="맑은 고딕" pitchFamily="34" charset="-122"/>
-                <a:cs typeface="맑은 고딕" pitchFamily="34" charset="-120"/>
-              </a:rPr>
-              <a:t>5F</a:t>
-            </a:r>
-            <a:endParaRPr lang="en-US" sz="1000" dirty="0"/>
-          </a:p>
-        </p:txBody>
-      </p:sp>
-      <p:sp>
-        <p:nvSpPr>
-          <p:cNvPr id="30" name="Shape 28"/>
-          <p:cNvSpPr/>
-          <p:nvPr/>
-        </p:nvSpPr>
-        <p:spPr>
-          <a:xfrm>
-            <a:off x="868680" y="3044952"/>
-            <a:ext cx="2194560" cy="448056"/>
-          </a:xfrm>
-          <a:prstGeom prst="rect">
-            <a:avLst/>
-          </a:prstGeom>
-          <a:solidFill>
-            <a:srgbClr val="E2E8F0"/>
-          </a:solidFill>
-          <a:ln w="13970">
-            <a:solidFill>
-              <a:srgbClr val="5B6B73"/>
-            </a:solidFill>
-            <a:prstDash val="solid"/>
-          </a:ln>
-        </p:spPr>
-      </p:sp>
-      <p:sp>
-        <p:nvSpPr>
-          <p:cNvPr id="31" name="Text 29"/>
-          <p:cNvSpPr/>
-          <p:nvPr/>
-        </p:nvSpPr>
-        <p:spPr>
-          <a:xfrm>
-            <a:off x="941832" y="3044952"/>
-            <a:ext cx="1316736" cy="448056"/>
-          </a:xfrm>
-          <a:prstGeom prst="rect">
-            <a:avLst/>
-          </a:prstGeom>
-          <a:noFill/>
-          <a:ln/>
-        </p:spPr>
-        <p:txBody>
-          <a:bodyPr wrap="square" rtlCol="0" anchor="ctr"/>
-          <a:lstStyle/>
-          <a:p>
-            <a:pPr algn="l" indent="0" marL="0">
-              <a:buNone/>
-            </a:pPr>
-            <a:r>
-              <a:rPr lang="en-US" sz="900" dirty="0">
-                <a:solidFill>
-                  <a:srgbClr val="3A3A3A"/>
-                </a:solidFill>
-                <a:latin typeface="맑은 고딕" pitchFamily="34" charset="0"/>
-                <a:ea typeface="맑은 고딕" pitchFamily="34" charset="-122"/>
-                <a:cs typeface="맑은 고딕" pitchFamily="34" charset="-120"/>
-              </a:rPr>
-              <a:t>전층</a:t>
-            </a:r>
-            <a:endParaRPr lang="en-US" sz="900" dirty="0"/>
-          </a:p>
-        </p:txBody>
-      </p:sp>
-      <p:sp>
-        <p:nvSpPr>
-          <p:cNvPr id="32" name="Text 30"/>
-          <p:cNvSpPr/>
-          <p:nvPr/>
-        </p:nvSpPr>
-        <p:spPr>
-          <a:xfrm>
-            <a:off x="2185416" y="3044952"/>
-            <a:ext cx="768096" cy="448056"/>
-          </a:xfrm>
-          <a:prstGeom prst="rect">
-            <a:avLst/>
-          </a:prstGeom>
-          <a:noFill/>
-          <a:ln/>
-        </p:spPr>
-        <p:txBody>
-          <a:bodyPr wrap="square" rtlCol="0" anchor="ctr"/>
-          <a:lstStyle/>
-          <a:p>
-            <a:pPr algn="r" indent="0" marL="0">
-              <a:buNone/>
-            </a:pPr>
-            <a:r>
-              <a:rPr lang="en-US" sz="800" dirty="0">
-                <a:solidFill>
-                  <a:srgbClr val="8A9AA3"/>
-                </a:solidFill>
-                <a:latin typeface="맑은 고딕" pitchFamily="34" charset="0"/>
-                <a:ea typeface="맑은 고딕" pitchFamily="34" charset="-122"/>
-                <a:cs typeface="맑은 고딕" pitchFamily="34" charset="-120"/>
-              </a:rPr>
-              <a:t>2평</a:t>
-            </a:r>
-            <a:endParaRPr lang="en-US" sz="800" dirty="0"/>
-          </a:p>
-        </p:txBody>
-      </p:sp>
-      <p:sp>
-        <p:nvSpPr>
-          <p:cNvPr id="33" name="Text 31"/>
-          <p:cNvSpPr/>
-          <p:nvPr/>
-        </p:nvSpPr>
-        <p:spPr>
-          <a:xfrm>
-            <a:off x="502920" y="2514600"/>
-            <a:ext cx="320040" cy="502920"/>
-          </a:xfrm>
-          <a:prstGeom prst="rect">
-            <a:avLst/>
-          </a:prstGeom>
-          <a:noFill/>
-          <a:ln/>
-        </p:spPr>
-        <p:txBody>
-          <a:bodyPr wrap="square" rtlCol="0" anchor="ctr"/>
-          <a:lstStyle/>
-          <a:p>
-            <a:pPr algn="r" indent="0" marL="0">
-              <a:buNone/>
-            </a:pPr>
-            <a:r>
-              <a:rPr lang="en-US" sz="1000" b="1" dirty="0">
-                <a:solidFill>
-                  <a:srgbClr val="132A3A"/>
-                </a:solidFill>
-                <a:latin typeface="맑은 고딕" pitchFamily="34" charset="0"/>
-                <a:ea typeface="맑은 고딕" pitchFamily="34" charset="-122"/>
-                <a:cs typeface="맑은 고딕" pitchFamily="34" charset="-120"/>
-              </a:rPr>
-              <a:t>6F</a:t>
-            </a:r>
-            <a:endParaRPr lang="en-US" sz="1000" dirty="0"/>
-          </a:p>
-        </p:txBody>
-      </p:sp>
-      <p:sp>
-        <p:nvSpPr>
-          <p:cNvPr id="34" name="Shape 32"/>
-          <p:cNvSpPr/>
-          <p:nvPr/>
-        </p:nvSpPr>
-        <p:spPr>
-          <a:xfrm>
-            <a:off x="868680" y="2542032"/>
-            <a:ext cx="2194560" cy="448056"/>
-          </a:xfrm>
-          <a:prstGeom prst="rect">
-            <a:avLst/>
-          </a:prstGeom>
-          <a:solidFill>
-            <a:srgbClr val="E2E8F0"/>
-          </a:solidFill>
-          <a:ln w="13970">
-            <a:solidFill>
-              <a:srgbClr val="5B6B73"/>
-            </a:solidFill>
-            <a:prstDash val="solid"/>
-          </a:ln>
-        </p:spPr>
-      </p:sp>
-      <p:sp>
-        <p:nvSpPr>
-          <p:cNvPr id="35" name="Text 33"/>
-          <p:cNvSpPr/>
-          <p:nvPr/>
-        </p:nvSpPr>
-        <p:spPr>
-          <a:xfrm>
-            <a:off x="941832" y="2542032"/>
-            <a:ext cx="1316736" cy="448056"/>
-          </a:xfrm>
-          <a:prstGeom prst="rect">
-            <a:avLst/>
-          </a:prstGeom>
-          <a:noFill/>
-          <a:ln/>
-        </p:spPr>
-        <p:txBody>
-          <a:bodyPr wrap="square" rtlCol="0" anchor="ctr"/>
-          <a:lstStyle/>
-          <a:p>
-            <a:pPr algn="l" indent="0" marL="0">
-              <a:buNone/>
-            </a:pPr>
-            <a:r>
-              <a:rPr lang="en-US" sz="900" dirty="0">
-                <a:solidFill>
-                  <a:srgbClr val="3A3A3A"/>
-                </a:solidFill>
-                <a:latin typeface="맑은 고딕" pitchFamily="34" charset="0"/>
-                <a:ea typeface="맑은 고딕" pitchFamily="34" charset="-122"/>
-                <a:cs typeface="맑은 고딕" pitchFamily="34" charset="-120"/>
-              </a:rPr>
-              <a:t>전층</a:t>
-            </a:r>
-            <a:endParaRPr lang="en-US" sz="900" dirty="0"/>
-          </a:p>
-        </p:txBody>
-      </p:sp>
-      <p:sp>
-        <p:nvSpPr>
-          <p:cNvPr id="36" name="Text 34"/>
-          <p:cNvSpPr/>
-          <p:nvPr/>
-        </p:nvSpPr>
-        <p:spPr>
-          <a:xfrm>
-            <a:off x="2185416" y="2542032"/>
-            <a:ext cx="768096" cy="448056"/>
-          </a:xfrm>
-          <a:prstGeom prst="rect">
-            <a:avLst/>
-          </a:prstGeom>
-          <a:noFill/>
-          <a:ln/>
-        </p:spPr>
-        <p:txBody>
-          <a:bodyPr wrap="square" rtlCol="0" anchor="ctr"/>
-          <a:lstStyle/>
-          <a:p>
-            <a:pPr algn="r" indent="0" marL="0">
-              <a:buNone/>
-            </a:pPr>
-            <a:r>
-              <a:rPr lang="en-US" sz="800" dirty="0">
-                <a:solidFill>
-                  <a:srgbClr val="8A9AA3"/>
-                </a:solidFill>
-                <a:latin typeface="맑은 고딕" pitchFamily="34" charset="0"/>
-                <a:ea typeface="맑은 고딕" pitchFamily="34" charset="-122"/>
-                <a:cs typeface="맑은 고딕" pitchFamily="34" charset="-120"/>
-              </a:rPr>
-              <a:t>2평</a:t>
-            </a:r>
-            <a:endParaRPr lang="en-US" sz="800" dirty="0"/>
-          </a:p>
-        </p:txBody>
-      </p:sp>
-      <p:sp>
-        <p:nvSpPr>
-          <p:cNvPr id="37" name="Text 35"/>
-          <p:cNvSpPr/>
-          <p:nvPr/>
-        </p:nvSpPr>
-        <p:spPr>
-          <a:xfrm>
-            <a:off x="502920" y="2011680"/>
-            <a:ext cx="320040" cy="502920"/>
-          </a:xfrm>
-          <a:prstGeom prst="rect">
-            <a:avLst/>
-          </a:prstGeom>
-          <a:noFill/>
-          <a:ln/>
-        </p:spPr>
-        <p:txBody>
-          <a:bodyPr wrap="square" rtlCol="0" anchor="ctr"/>
-          <a:lstStyle/>
-          <a:p>
-            <a:pPr algn="r" indent="0" marL="0">
-              <a:buNone/>
-            </a:pPr>
-            <a:r>
-              <a:rPr lang="en-US" sz="1000" b="1" dirty="0">
-                <a:solidFill>
-                  <a:srgbClr val="132A3A"/>
-                </a:solidFill>
-                <a:latin typeface="맑은 고딕" pitchFamily="34" charset="0"/>
-                <a:ea typeface="맑은 고딕" pitchFamily="34" charset="-122"/>
-                <a:cs typeface="맑은 고딕" pitchFamily="34" charset="-120"/>
-              </a:rPr>
-              <a:t>7F</a:t>
-            </a:r>
-            <a:endParaRPr lang="en-US" sz="1000" dirty="0"/>
-          </a:p>
-        </p:txBody>
-      </p:sp>
-      <p:sp>
-        <p:nvSpPr>
-          <p:cNvPr id="38" name="Shape 36"/>
-          <p:cNvSpPr/>
-          <p:nvPr/>
-        </p:nvSpPr>
-        <p:spPr>
-          <a:xfrm>
-            <a:off x="868680" y="2039112"/>
-            <a:ext cx="2194560" cy="448056"/>
-          </a:xfrm>
-          <a:prstGeom prst="rect">
-            <a:avLst/>
-          </a:prstGeom>
-          <a:solidFill>
-            <a:srgbClr val="E2E8F0"/>
-          </a:solidFill>
-          <a:ln w="13970">
-            <a:solidFill>
-              <a:srgbClr val="5B6B73"/>
-            </a:solidFill>
-            <a:prstDash val="solid"/>
-          </a:ln>
-        </p:spPr>
-      </p:sp>
-      <p:sp>
-        <p:nvSpPr>
-          <p:cNvPr id="39" name="Text 37"/>
-          <p:cNvSpPr/>
-          <p:nvPr/>
-        </p:nvSpPr>
-        <p:spPr>
-          <a:xfrm>
-            <a:off x="941832" y="2039112"/>
-            <a:ext cx="1316736" cy="448056"/>
-          </a:xfrm>
-          <a:prstGeom prst="rect">
-            <a:avLst/>
-          </a:prstGeom>
-          <a:noFill/>
-          <a:ln/>
-        </p:spPr>
-        <p:txBody>
-          <a:bodyPr wrap="square" rtlCol="0" anchor="ctr"/>
-          <a:lstStyle/>
-          <a:p>
-            <a:pPr algn="l" indent="0" marL="0">
-              <a:buNone/>
-            </a:pPr>
-            <a:r>
-              <a:rPr lang="en-US" sz="900" dirty="0">
-                <a:solidFill>
-                  <a:srgbClr val="3A3A3A"/>
-                </a:solidFill>
-                <a:latin typeface="맑은 고딕" pitchFamily="34" charset="0"/>
-                <a:ea typeface="맑은 고딕" pitchFamily="34" charset="-122"/>
-                <a:cs typeface="맑은 고딕" pitchFamily="34" charset="-120"/>
-              </a:rPr>
-              <a:t>전층</a:t>
-            </a:r>
-            <a:endParaRPr lang="en-US" sz="900" dirty="0"/>
-          </a:p>
-        </p:txBody>
-      </p:sp>
-      <p:sp>
-        <p:nvSpPr>
-          <p:cNvPr id="40" name="Text 38"/>
-          <p:cNvSpPr/>
-          <p:nvPr/>
-        </p:nvSpPr>
-        <p:spPr>
-          <a:xfrm>
-            <a:off x="2185416" y="2039112"/>
-            <a:ext cx="768096" cy="448056"/>
-          </a:xfrm>
-          <a:prstGeom prst="rect">
-            <a:avLst/>
-          </a:prstGeom>
-          <a:noFill/>
-          <a:ln/>
-        </p:spPr>
-        <p:txBody>
-          <a:bodyPr wrap="square" rtlCol="0" anchor="ctr"/>
-          <a:lstStyle/>
-          <a:p>
-            <a:pPr algn="r" indent="0" marL="0">
-              <a:buNone/>
-            </a:pPr>
-            <a:r>
-              <a:rPr lang="en-US" sz="800" dirty="0">
-                <a:solidFill>
-                  <a:srgbClr val="8A9AA3"/>
-                </a:solidFill>
-                <a:latin typeface="맑은 고딕" pitchFamily="34" charset="0"/>
-                <a:ea typeface="맑은 고딕" pitchFamily="34" charset="-122"/>
-                <a:cs typeface="맑은 고딕" pitchFamily="34" charset="-120"/>
-              </a:rPr>
-              <a:t>2평</a:t>
-            </a:r>
-            <a:endParaRPr lang="en-US" sz="800" dirty="0"/>
-          </a:p>
-        </p:txBody>
-      </p:sp>
-      <p:sp>
-        <p:nvSpPr>
-          <p:cNvPr id="41" name="Text 39"/>
+          <p:cNvPr id="34" name="Text 32"/>
           <p:cNvSpPr/>
           <p:nvPr/>
         </p:nvSpPr>
@@ -9805,7 +9294,7 @@
                           <a:ea typeface="맑은 고딕" pitchFamily="34" charset="-122"/>
                           <a:cs typeface="맑은 고딕" pitchFamily="34" charset="-120"/>
                         </a:rPr>
-                        <a:t>7F</a:t>
+                        <a:t>B1</a:t>
                       </a:r>
                       <a:endParaRPr lang="en-US" sz="850" dirty="0">
                         <a:latin typeface="맑은 고딕" charset="0"/>
@@ -9873,7 +9362,7 @@
                           <a:ea typeface="맑은 고딕" pitchFamily="34" charset="-122"/>
                           <a:cs typeface="맑은 고딕" pitchFamily="34" charset="-120"/>
                         </a:rPr>
-                        <a:t>전층</a:t>
+                        <a:t>-</a:t>
                       </a:r>
                       <a:endParaRPr lang="en-US" sz="850" dirty="0">
                         <a:latin typeface="맑은 고딕" charset="0"/>
@@ -9941,7 +9430,7 @@
                           <a:ea typeface="맑은 고딕" pitchFamily="34" charset="-122"/>
                           <a:cs typeface="맑은 고딕" pitchFamily="34" charset="-120"/>
                         </a:rPr>
-                        <a:t>제2종근생(사무소)</a:t>
+                        <a:t>파티룸</a:t>
                       </a:r>
                       <a:endParaRPr lang="en-US" sz="850" dirty="0">
                         <a:latin typeface="맑은 고딕" charset="0"/>
@@ -10009,7 +9498,7 @@
                           <a:ea typeface="맑은 고딕" pitchFamily="34" charset="-122"/>
                           <a:cs typeface="맑은 고딕" pitchFamily="34" charset="-120"/>
                         </a:rPr>
-                        <a:t>일반법인</a:t>
+                        <a:t>파티룸</a:t>
                       </a:r>
                       <a:endParaRPr lang="en-US" sz="850" dirty="0">
                         <a:latin typeface="맑은 고딕" charset="0"/>
@@ -10077,7 +9566,7 @@
                           <a:ea typeface="맑은 고딕" pitchFamily="34" charset="-122"/>
                           <a:cs typeface="맑은 고딕" pitchFamily="34" charset="-120"/>
                         </a:rPr>
-                        <a:t>250.0</a:t>
+                        <a:t>-</a:t>
                       </a:r>
                       <a:endParaRPr lang="en-US" sz="850" dirty="0">
                         <a:latin typeface="맑은 고딕" charset="0"/>
@@ -10281,7 +9770,7 @@
                           <a:ea typeface="맑은 고딕" pitchFamily="34" charset="-122"/>
                           <a:cs typeface="맑은 고딕" pitchFamily="34" charset="-120"/>
                         </a:rPr>
-                        <a:t>0</a:t>
+                        <a:t>-</a:t>
                       </a:r>
                       <a:endParaRPr lang="en-US" sz="850" dirty="0">
                         <a:latin typeface="맑은 고딕" charset="0"/>
@@ -10349,7 +9838,7 @@
                           <a:ea typeface="맑은 고딕" pitchFamily="34" charset="-122"/>
                           <a:cs typeface="맑은 고딕" pitchFamily="34" charset="-120"/>
                         </a:rPr>
-                        <a:t>2025</a:t>
+                        <a:t>-</a:t>
                       </a:r>
                       <a:endParaRPr lang="en-US" sz="850" dirty="0">
                         <a:latin typeface="맑은 고딕" charset="0"/>
@@ -10408,17 +9897,6 @@
                       <a:pPr algn="ctr" indent="0" marL="0">
                         <a:buNone/>
                       </a:pPr>
-                      <a:r>
-                        <a:rPr lang="en-US" sz="850" dirty="0">
-                          <a:solidFill>
-                            <a:srgbClr val="2B2B2B"/>
-                          </a:solidFill>
-                          <a:latin typeface="맑은 고딕" pitchFamily="34" charset="0"/>
-                          <a:ea typeface="맑은 고딕" pitchFamily="34" charset="-122"/>
-                          <a:cs typeface="맑은 고딕" pitchFamily="34" charset="-120"/>
-                        </a:rPr>
-                        <a:t>퇴거협의 가능</a:t>
-                      </a:r>
                       <a:endParaRPr lang="en-US" sz="850" dirty="0">
                         <a:latin typeface="맑은 고딕" charset="0"/>
                         <a:ea typeface="맑은 고딕" charset="0"/>
@@ -10487,7 +9965,7 @@
                           <a:ea typeface="맑은 고딕" pitchFamily="34" charset="-122"/>
                           <a:cs typeface="맑은 고딕" pitchFamily="34" charset="-120"/>
                         </a:rPr>
-                        <a:t>6F</a:t>
+                        <a:t>1F</a:t>
                       </a:r>
                       <a:endParaRPr lang="en-US" sz="850" dirty="0">
                         <a:latin typeface="맑은 고딕" charset="0"/>
@@ -10555,7 +10033,7 @@
                           <a:ea typeface="맑은 고딕" pitchFamily="34" charset="-122"/>
                           <a:cs typeface="맑은 고딕" pitchFamily="34" charset="-120"/>
                         </a:rPr>
-                        <a:t>전층</a:t>
+                        <a:t>-</a:t>
                       </a:r>
                       <a:endParaRPr lang="en-US" sz="850" dirty="0">
                         <a:latin typeface="맑은 고딕" charset="0"/>
@@ -10623,7 +10101,7 @@
                           <a:ea typeface="맑은 고딕" pitchFamily="34" charset="-122"/>
                           <a:cs typeface="맑은 고딕" pitchFamily="34" charset="-120"/>
                         </a:rPr>
-                        <a:t>제2종근생(사무소)</a:t>
+                        <a:t>상가</a:t>
                       </a:r>
                       <a:endParaRPr lang="en-US" sz="850" dirty="0">
                         <a:latin typeface="맑은 고딕" charset="0"/>
@@ -10691,7 +10169,7 @@
                           <a:ea typeface="맑은 고딕" pitchFamily="34" charset="-122"/>
                           <a:cs typeface="맑은 고딕" pitchFamily="34" charset="-120"/>
                         </a:rPr>
-                        <a:t>일반법인</a:t>
+                        <a:t>상가</a:t>
                       </a:r>
                       <a:endParaRPr lang="en-US" sz="850" dirty="0">
                         <a:latin typeface="맑은 고딕" charset="0"/>
@@ -10759,7 +10237,7 @@
                           <a:ea typeface="맑은 고딕" pitchFamily="34" charset="-122"/>
                           <a:cs typeface="맑은 고딕" pitchFamily="34" charset="-120"/>
                         </a:rPr>
-                        <a:t>250.0</a:t>
+                        <a:t>-</a:t>
                       </a:r>
                       <a:endParaRPr lang="en-US" sz="850" dirty="0">
                         <a:latin typeface="맑은 고딕" charset="0"/>
@@ -10963,7 +10441,7 @@
                           <a:ea typeface="맑은 고딕" pitchFamily="34" charset="-122"/>
                           <a:cs typeface="맑은 고딕" pitchFamily="34" charset="-120"/>
                         </a:rPr>
-                        <a:t>0</a:t>
+                        <a:t>-</a:t>
                       </a:r>
                       <a:endParaRPr lang="en-US" sz="850" dirty="0">
                         <a:latin typeface="맑은 고딕" charset="0"/>
@@ -11031,7 +10509,7 @@
                           <a:ea typeface="맑은 고딕" pitchFamily="34" charset="-122"/>
                           <a:cs typeface="맑은 고딕" pitchFamily="34" charset="-120"/>
                         </a:rPr>
-                        <a:t>2025</a:t>
+                        <a:t>-</a:t>
                       </a:r>
                       <a:endParaRPr lang="en-US" sz="850" dirty="0">
                         <a:latin typeface="맑은 고딕" charset="0"/>
@@ -11090,17 +10568,6 @@
                       <a:pPr algn="ctr" indent="0" marL="0">
                         <a:buNone/>
                       </a:pPr>
-                      <a:r>
-                        <a:rPr lang="en-US" sz="850" dirty="0">
-                          <a:solidFill>
-                            <a:srgbClr val="2B2B2B"/>
-                          </a:solidFill>
-                          <a:latin typeface="맑은 고딕" pitchFamily="34" charset="0"/>
-                          <a:ea typeface="맑은 고딕" pitchFamily="34" charset="-122"/>
-                          <a:cs typeface="맑은 고딕" pitchFamily="34" charset="-120"/>
-                        </a:rPr>
-                        <a:t>퇴거협의 가능</a:t>
-                      </a:r>
                       <a:endParaRPr lang="en-US" sz="850" dirty="0">
                         <a:latin typeface="맑은 고딕" charset="0"/>
                         <a:ea typeface="맑은 고딕" charset="0"/>
@@ -11169,7 +10636,7 @@
                           <a:ea typeface="맑은 고딕" pitchFamily="34" charset="-122"/>
                           <a:cs typeface="맑은 고딕" pitchFamily="34" charset="-120"/>
                         </a:rPr>
-                        <a:t>5F</a:t>
+                        <a:t>2F</a:t>
                       </a:r>
                       <a:endParaRPr lang="en-US" sz="850" dirty="0">
                         <a:latin typeface="맑은 고딕" charset="0"/>
@@ -11237,75 +10704,7 @@
                           <a:ea typeface="맑은 고딕" pitchFamily="34" charset="-122"/>
                           <a:cs typeface="맑은 고딕" pitchFamily="34" charset="-120"/>
                         </a:rPr>
-                        <a:t>전층</a:t>
-                      </a:r>
-                      <a:endParaRPr lang="en-US" sz="850" dirty="0">
-                        <a:latin typeface="맑은 고딕" charset="0"/>
-                        <a:ea typeface="맑은 고딕" charset="0"/>
-                        <a:cs typeface="맑은 고딕" charset="0"/>
-                      </a:endParaRPr>
-                    </a:p>
-                  </a:txBody>
-                  <a:tcPr marL="91440" marR="91440" marT="45720" marB="45720" anchor="ctr">
-                    <a:lnL w="12700" cap="flat" cmpd="sng" algn="ctr">
-                      <a:solidFill>
-                        <a:srgbClr val="CBD5E0"/>
-                      </a:solidFill>
-                      <a:prstDash val="solid"/>
-                      <a:round/>
-                      <a:headEnd type="none" w="med" len="med"/>
-                      <a:tailEnd type="none" w="med" len="med"/>
-                    </a:lnL>
-                    <a:lnR w="12700" cap="flat" cmpd="sng" algn="ctr">
-                      <a:solidFill>
-                        <a:srgbClr val="CBD5E0"/>
-                      </a:solidFill>
-                      <a:prstDash val="solid"/>
-                      <a:round/>
-                      <a:headEnd type="none" w="med" len="med"/>
-                      <a:tailEnd type="none" w="med" len="med"/>
-                    </a:lnR>
-                    <a:lnT w="12700" cap="flat" cmpd="sng" algn="ctr">
-                      <a:solidFill>
-                        <a:srgbClr val="CBD5E0"/>
-                      </a:solidFill>
-                      <a:prstDash val="solid"/>
-                      <a:round/>
-                      <a:headEnd type="none" w="med" len="med"/>
-                      <a:tailEnd type="none" w="med" len="med"/>
-                    </a:lnT>
-                    <a:lnB w="12700" cap="flat" cmpd="sng" algn="ctr">
-                      <a:solidFill>
-                        <a:srgbClr val="CBD5E0"/>
-                      </a:solidFill>
-                      <a:prstDash val="solid"/>
-                      <a:round/>
-                      <a:headEnd type="none" w="med" len="med"/>
-                      <a:tailEnd type="none" w="med" len="med"/>
-                    </a:lnB>
-                    <a:solidFill>
-                      <a:srgbClr val="FBEFE8"/>
-                    </a:solidFill>
-                  </a:tcPr>
-                </a:tc>
-                <a:tc>
-                  <a:txBody>
-                    <a:bodyPr/>
-                    <a:lstStyle/>
-                    <a:p>
-                      <a:pPr algn="ctr" indent="0" marL="0">
-                        <a:buNone/>
-                      </a:pPr>
-                      <a:r>
-                        <a:rPr lang="en-US" sz="850" b="1" dirty="0">
-                          <a:solidFill>
-                            <a:srgbClr val="B05A2E"/>
-                          </a:solidFill>
-                          <a:latin typeface="맑은 고딕" pitchFamily="34" charset="0"/>
-                          <a:ea typeface="맑은 고딕" pitchFamily="34" charset="-122"/>
-                          <a:cs typeface="맑은 고딕" pitchFamily="34" charset="-120"/>
-                        </a:rPr>
-                        <a:t>제2종근생(사무소)</a:t>
+                        <a:t>-</a:t>
                       </a:r>
                       <a:endParaRPr lang="en-US" sz="850" dirty="0">
                         <a:latin typeface="맑은 고딕" charset="0"/>
@@ -11429,6 +10828,74 @@
                     <a:bodyPr/>
                     <a:lstStyle/>
                     <a:p>
+                      <a:pPr algn="ctr" indent="0" marL="0">
+                        <a:buNone/>
+                      </a:pPr>
+                      <a:r>
+                        <a:rPr lang="en-US" sz="850" b="1" dirty="0">
+                          <a:solidFill>
+                            <a:srgbClr val="B05A2E"/>
+                          </a:solidFill>
+                          <a:latin typeface="맑은 고딕" pitchFamily="34" charset="0"/>
+                          <a:ea typeface="맑은 고딕" pitchFamily="34" charset="-122"/>
+                          <a:cs typeface="맑은 고딕" pitchFamily="34" charset="-120"/>
+                        </a:rPr>
+                        <a:t>공실</a:t>
+                      </a:r>
+                      <a:endParaRPr lang="en-US" sz="850" dirty="0">
+                        <a:latin typeface="맑은 고딕" charset="0"/>
+                        <a:ea typeface="맑은 고딕" charset="0"/>
+                        <a:cs typeface="맑은 고딕" charset="0"/>
+                      </a:endParaRPr>
+                    </a:p>
+                  </a:txBody>
+                  <a:tcPr marL="91440" marR="91440" marT="45720" marB="45720" anchor="ctr">
+                    <a:lnL w="12700" cap="flat" cmpd="sng" algn="ctr">
+                      <a:solidFill>
+                        <a:srgbClr val="CBD5E0"/>
+                      </a:solidFill>
+                      <a:prstDash val="solid"/>
+                      <a:round/>
+                      <a:headEnd type="none" w="med" len="med"/>
+                      <a:tailEnd type="none" w="med" len="med"/>
+                    </a:lnL>
+                    <a:lnR w="12700" cap="flat" cmpd="sng" algn="ctr">
+                      <a:solidFill>
+                        <a:srgbClr val="CBD5E0"/>
+                      </a:solidFill>
+                      <a:prstDash val="solid"/>
+                      <a:round/>
+                      <a:headEnd type="none" w="med" len="med"/>
+                      <a:tailEnd type="none" w="med" len="med"/>
+                    </a:lnR>
+                    <a:lnT w="12700" cap="flat" cmpd="sng" algn="ctr">
+                      <a:solidFill>
+                        <a:srgbClr val="CBD5E0"/>
+                      </a:solidFill>
+                      <a:prstDash val="solid"/>
+                      <a:round/>
+                      <a:headEnd type="none" w="med" len="med"/>
+                      <a:tailEnd type="none" w="med" len="med"/>
+                    </a:lnT>
+                    <a:lnB w="12700" cap="flat" cmpd="sng" algn="ctr">
+                      <a:solidFill>
+                        <a:srgbClr val="CBD5E0"/>
+                      </a:solidFill>
+                      <a:prstDash val="solid"/>
+                      <a:round/>
+                      <a:headEnd type="none" w="med" len="med"/>
+                      <a:tailEnd type="none" w="med" len="med"/>
+                    </a:lnB>
+                    <a:solidFill>
+                      <a:srgbClr val="FBEFE8"/>
+                    </a:solidFill>
+                  </a:tcPr>
+                </a:tc>
+                <a:tc>
+                  <a:txBody>
+                    <a:bodyPr/>
+                    <a:lstStyle/>
+                    <a:p>
                       <a:pPr algn="r" indent="0" marL="0">
                         <a:buNone/>
                       </a:pPr>
@@ -11441,7 +10908,7 @@
                           <a:ea typeface="맑은 고딕" pitchFamily="34" charset="-122"/>
                           <a:cs typeface="맑은 고딕" pitchFamily="34" charset="-120"/>
                         </a:rPr>
-                        <a:t>250.0</a:t>
+                        <a:t>-</a:t>
                       </a:r>
                       <a:endParaRPr lang="en-US" sz="850" dirty="0">
                         <a:latin typeface="맑은 고딕" charset="0"/>
@@ -11645,7 +11112,7 @@
                           <a:ea typeface="맑은 고딕" pitchFamily="34" charset="-122"/>
                           <a:cs typeface="맑은 고딕" pitchFamily="34" charset="-120"/>
                         </a:rPr>
-                        <a:t>0</a:t>
+                        <a:t>-</a:t>
                       </a:r>
                       <a:endParaRPr lang="en-US" sz="850" dirty="0">
                         <a:latin typeface="맑은 고딕" charset="0"/>
@@ -11781,689 +11248,7 @@
                           <a:ea typeface="맑은 고딕" pitchFamily="34" charset="-122"/>
                           <a:cs typeface="맑은 고딕" pitchFamily="34" charset="-120"/>
                         </a:rPr>
-                        <a:t>즉시 입주</a:t>
-                      </a:r>
-                      <a:endParaRPr lang="en-US" sz="850" dirty="0">
-                        <a:latin typeface="맑은 고딕" charset="0"/>
-                        <a:ea typeface="맑은 고딕" charset="0"/>
-                        <a:cs typeface="맑은 고딕" charset="0"/>
-                      </a:endParaRPr>
-                    </a:p>
-                  </a:txBody>
-                  <a:tcPr marL="91440" marR="91440" marT="45720" marB="45720" anchor="ctr">
-                    <a:lnL w="12700" cap="flat" cmpd="sng" algn="ctr">
-                      <a:solidFill>
-                        <a:srgbClr val="CBD5E0"/>
-                      </a:solidFill>
-                      <a:prstDash val="solid"/>
-                      <a:round/>
-                      <a:headEnd type="none" w="med" len="med"/>
-                      <a:tailEnd type="none" w="med" len="med"/>
-                    </a:lnL>
-                    <a:lnR w="12700" cap="flat" cmpd="sng" algn="ctr">
-                      <a:solidFill>
-                        <a:srgbClr val="CBD5E0"/>
-                      </a:solidFill>
-                      <a:prstDash val="solid"/>
-                      <a:round/>
-                      <a:headEnd type="none" w="med" len="med"/>
-                      <a:tailEnd type="none" w="med" len="med"/>
-                    </a:lnR>
-                    <a:lnT w="12700" cap="flat" cmpd="sng" algn="ctr">
-                      <a:solidFill>
-                        <a:srgbClr val="CBD5E0"/>
-                      </a:solidFill>
-                      <a:prstDash val="solid"/>
-                      <a:round/>
-                      <a:headEnd type="none" w="med" len="med"/>
-                      <a:tailEnd type="none" w="med" len="med"/>
-                    </a:lnT>
-                    <a:lnB w="12700" cap="flat" cmpd="sng" algn="ctr">
-                      <a:solidFill>
-                        <a:srgbClr val="CBD5E0"/>
-                      </a:solidFill>
-                      <a:prstDash val="solid"/>
-                      <a:round/>
-                      <a:headEnd type="none" w="med" len="med"/>
-                      <a:tailEnd type="none" w="med" len="med"/>
-                    </a:lnB>
-                    <a:solidFill>
-                      <a:srgbClr val="FBEFE8"/>
-                    </a:solidFill>
-                  </a:tcPr>
-                </a:tc>
-              </a:tr>
-              <a:tr h="320040">
-                <a:tc>
-                  <a:txBody>
-                    <a:bodyPr/>
-                    <a:lstStyle/>
-                    <a:p>
-                      <a:pPr algn="ctr" indent="0" marL="0">
-                        <a:buNone/>
-                      </a:pPr>
-                      <a:r>
-                        <a:rPr lang="en-US" sz="850" b="1" dirty="0">
-                          <a:solidFill>
-                            <a:srgbClr val="B05A2E"/>
-                          </a:solidFill>
-                          <a:latin typeface="맑은 고딕" pitchFamily="34" charset="0"/>
-                          <a:ea typeface="맑은 고딕" pitchFamily="34" charset="-122"/>
-                          <a:cs typeface="맑은 고딕" pitchFamily="34" charset="-120"/>
-                        </a:rPr>
-                        <a:t>4F</a:t>
-                      </a:r>
-                      <a:endParaRPr lang="en-US" sz="850" dirty="0">
-                        <a:latin typeface="맑은 고딕" charset="0"/>
-                        <a:ea typeface="맑은 고딕" charset="0"/>
-                        <a:cs typeface="맑은 고딕" charset="0"/>
-                      </a:endParaRPr>
-                    </a:p>
-                  </a:txBody>
-                  <a:tcPr marL="91440" marR="91440" marT="45720" marB="45720" anchor="ctr">
-                    <a:lnL w="12700" cap="flat" cmpd="sng" algn="ctr">
-                      <a:solidFill>
-                        <a:srgbClr val="CBD5E0"/>
-                      </a:solidFill>
-                      <a:prstDash val="solid"/>
-                      <a:round/>
-                      <a:headEnd type="none" w="med" len="med"/>
-                      <a:tailEnd type="none" w="med" len="med"/>
-                    </a:lnL>
-                    <a:lnR w="12700" cap="flat" cmpd="sng" algn="ctr">
-                      <a:solidFill>
-                        <a:srgbClr val="CBD5E0"/>
-                      </a:solidFill>
-                      <a:prstDash val="solid"/>
-                      <a:round/>
-                      <a:headEnd type="none" w="med" len="med"/>
-                      <a:tailEnd type="none" w="med" len="med"/>
-                    </a:lnR>
-                    <a:lnT w="12700" cap="flat" cmpd="sng" algn="ctr">
-                      <a:solidFill>
-                        <a:srgbClr val="CBD5E0"/>
-                      </a:solidFill>
-                      <a:prstDash val="solid"/>
-                      <a:round/>
-                      <a:headEnd type="none" w="med" len="med"/>
-                      <a:tailEnd type="none" w="med" len="med"/>
-                    </a:lnT>
-                    <a:lnB w="12700" cap="flat" cmpd="sng" algn="ctr">
-                      <a:solidFill>
-                        <a:srgbClr val="CBD5E0"/>
-                      </a:solidFill>
-                      <a:prstDash val="solid"/>
-                      <a:round/>
-                      <a:headEnd type="none" w="med" len="med"/>
-                      <a:tailEnd type="none" w="med" len="med"/>
-                    </a:lnB>
-                    <a:solidFill>
-                      <a:srgbClr val="FBEFE8"/>
-                    </a:solidFill>
-                  </a:tcPr>
-                </a:tc>
-                <a:tc>
-                  <a:txBody>
-                    <a:bodyPr/>
-                    <a:lstStyle/>
-                    <a:p>
-                      <a:pPr algn="ctr" indent="0" marL="0">
-                        <a:buNone/>
-                      </a:pPr>
-                      <a:r>
-                        <a:rPr lang="en-US" sz="850" b="1" dirty="0">
-                          <a:solidFill>
-                            <a:srgbClr val="B05A2E"/>
-                          </a:solidFill>
-                          <a:latin typeface="맑은 고딕" pitchFamily="34" charset="0"/>
-                          <a:ea typeface="맑은 고딕" pitchFamily="34" charset="-122"/>
-                          <a:cs typeface="맑은 고딕" pitchFamily="34" charset="-120"/>
-                        </a:rPr>
-                        <a:t>전층</a:t>
-                      </a:r>
-                      <a:endParaRPr lang="en-US" sz="850" dirty="0">
-                        <a:latin typeface="맑은 고딕" charset="0"/>
-                        <a:ea typeface="맑은 고딕" charset="0"/>
-                        <a:cs typeface="맑은 고딕" charset="0"/>
-                      </a:endParaRPr>
-                    </a:p>
-                  </a:txBody>
-                  <a:tcPr marL="91440" marR="91440" marT="45720" marB="45720" anchor="ctr">
-                    <a:lnL w="12700" cap="flat" cmpd="sng" algn="ctr">
-                      <a:solidFill>
-                        <a:srgbClr val="CBD5E0"/>
-                      </a:solidFill>
-                      <a:prstDash val="solid"/>
-                      <a:round/>
-                      <a:headEnd type="none" w="med" len="med"/>
-                      <a:tailEnd type="none" w="med" len="med"/>
-                    </a:lnL>
-                    <a:lnR w="12700" cap="flat" cmpd="sng" algn="ctr">
-                      <a:solidFill>
-                        <a:srgbClr val="CBD5E0"/>
-                      </a:solidFill>
-                      <a:prstDash val="solid"/>
-                      <a:round/>
-                      <a:headEnd type="none" w="med" len="med"/>
-                      <a:tailEnd type="none" w="med" len="med"/>
-                    </a:lnR>
-                    <a:lnT w="12700" cap="flat" cmpd="sng" algn="ctr">
-                      <a:solidFill>
-                        <a:srgbClr val="CBD5E0"/>
-                      </a:solidFill>
-                      <a:prstDash val="solid"/>
-                      <a:round/>
-                      <a:headEnd type="none" w="med" len="med"/>
-                      <a:tailEnd type="none" w="med" len="med"/>
-                    </a:lnT>
-                    <a:lnB w="12700" cap="flat" cmpd="sng" algn="ctr">
-                      <a:solidFill>
-                        <a:srgbClr val="CBD5E0"/>
-                      </a:solidFill>
-                      <a:prstDash val="solid"/>
-                      <a:round/>
-                      <a:headEnd type="none" w="med" len="med"/>
-                      <a:tailEnd type="none" w="med" len="med"/>
-                    </a:lnB>
-                    <a:solidFill>
-                      <a:srgbClr val="FBEFE8"/>
-                    </a:solidFill>
-                  </a:tcPr>
-                </a:tc>
-                <a:tc>
-                  <a:txBody>
-                    <a:bodyPr/>
-                    <a:lstStyle/>
-                    <a:p>
-                      <a:pPr algn="ctr" indent="0" marL="0">
-                        <a:buNone/>
-                      </a:pPr>
-                      <a:r>
-                        <a:rPr lang="en-US" sz="850" b="1" dirty="0">
-                          <a:solidFill>
-                            <a:srgbClr val="B05A2E"/>
-                          </a:solidFill>
-                          <a:latin typeface="맑은 고딕" pitchFamily="34" charset="0"/>
-                          <a:ea typeface="맑은 고딕" pitchFamily="34" charset="-122"/>
-                          <a:cs typeface="맑은 고딕" pitchFamily="34" charset="-120"/>
-                        </a:rPr>
-                        <a:t>제2종근생(사무소)</a:t>
-                      </a:r>
-                      <a:endParaRPr lang="en-US" sz="850" dirty="0">
-                        <a:latin typeface="맑은 고딕" charset="0"/>
-                        <a:ea typeface="맑은 고딕" charset="0"/>
-                        <a:cs typeface="맑은 고딕" charset="0"/>
-                      </a:endParaRPr>
-                    </a:p>
-                  </a:txBody>
-                  <a:tcPr marL="91440" marR="91440" marT="45720" marB="45720" anchor="ctr">
-                    <a:lnL w="12700" cap="flat" cmpd="sng" algn="ctr">
-                      <a:solidFill>
-                        <a:srgbClr val="CBD5E0"/>
-                      </a:solidFill>
-                      <a:prstDash val="solid"/>
-                      <a:round/>
-                      <a:headEnd type="none" w="med" len="med"/>
-                      <a:tailEnd type="none" w="med" len="med"/>
-                    </a:lnL>
-                    <a:lnR w="12700" cap="flat" cmpd="sng" algn="ctr">
-                      <a:solidFill>
-                        <a:srgbClr val="CBD5E0"/>
-                      </a:solidFill>
-                      <a:prstDash val="solid"/>
-                      <a:round/>
-                      <a:headEnd type="none" w="med" len="med"/>
-                      <a:tailEnd type="none" w="med" len="med"/>
-                    </a:lnR>
-                    <a:lnT w="12700" cap="flat" cmpd="sng" algn="ctr">
-                      <a:solidFill>
-                        <a:srgbClr val="CBD5E0"/>
-                      </a:solidFill>
-                      <a:prstDash val="solid"/>
-                      <a:round/>
-                      <a:headEnd type="none" w="med" len="med"/>
-                      <a:tailEnd type="none" w="med" len="med"/>
-                    </a:lnT>
-                    <a:lnB w="12700" cap="flat" cmpd="sng" algn="ctr">
-                      <a:solidFill>
-                        <a:srgbClr val="CBD5E0"/>
-                      </a:solidFill>
-                      <a:prstDash val="solid"/>
-                      <a:round/>
-                      <a:headEnd type="none" w="med" len="med"/>
-                      <a:tailEnd type="none" w="med" len="med"/>
-                    </a:lnB>
-                    <a:solidFill>
-                      <a:srgbClr val="FBEFE8"/>
-                    </a:solidFill>
-                  </a:tcPr>
-                </a:tc>
-                <a:tc>
-                  <a:txBody>
-                    <a:bodyPr/>
-                    <a:lstStyle/>
-                    <a:p>
-                      <a:pPr algn="ctr" indent="0" marL="0">
-                        <a:buNone/>
-                      </a:pPr>
-                      <a:r>
-                        <a:rPr lang="en-US" sz="850" b="1" dirty="0">
-                          <a:solidFill>
-                            <a:srgbClr val="B05A2E"/>
-                          </a:solidFill>
-                          <a:latin typeface="맑은 고딕" pitchFamily="34" charset="0"/>
-                          <a:ea typeface="맑은 고딕" pitchFamily="34" charset="-122"/>
-                          <a:cs typeface="맑은 고딕" pitchFamily="34" charset="-120"/>
-                        </a:rPr>
                         <a:t>공실</a:t>
-                      </a:r>
-                      <a:endParaRPr lang="en-US" sz="850" dirty="0">
-                        <a:latin typeface="맑은 고딕" charset="0"/>
-                        <a:ea typeface="맑은 고딕" charset="0"/>
-                        <a:cs typeface="맑은 고딕" charset="0"/>
-                      </a:endParaRPr>
-                    </a:p>
-                  </a:txBody>
-                  <a:tcPr marL="91440" marR="91440" marT="45720" marB="45720" anchor="ctr">
-                    <a:lnL w="12700" cap="flat" cmpd="sng" algn="ctr">
-                      <a:solidFill>
-                        <a:srgbClr val="CBD5E0"/>
-                      </a:solidFill>
-                      <a:prstDash val="solid"/>
-                      <a:round/>
-                      <a:headEnd type="none" w="med" len="med"/>
-                      <a:tailEnd type="none" w="med" len="med"/>
-                    </a:lnL>
-                    <a:lnR w="12700" cap="flat" cmpd="sng" algn="ctr">
-                      <a:solidFill>
-                        <a:srgbClr val="CBD5E0"/>
-                      </a:solidFill>
-                      <a:prstDash val="solid"/>
-                      <a:round/>
-                      <a:headEnd type="none" w="med" len="med"/>
-                      <a:tailEnd type="none" w="med" len="med"/>
-                    </a:lnR>
-                    <a:lnT w="12700" cap="flat" cmpd="sng" algn="ctr">
-                      <a:solidFill>
-                        <a:srgbClr val="CBD5E0"/>
-                      </a:solidFill>
-                      <a:prstDash val="solid"/>
-                      <a:round/>
-                      <a:headEnd type="none" w="med" len="med"/>
-                      <a:tailEnd type="none" w="med" len="med"/>
-                    </a:lnT>
-                    <a:lnB w="12700" cap="flat" cmpd="sng" algn="ctr">
-                      <a:solidFill>
-                        <a:srgbClr val="CBD5E0"/>
-                      </a:solidFill>
-                      <a:prstDash val="solid"/>
-                      <a:round/>
-                      <a:headEnd type="none" w="med" len="med"/>
-                      <a:tailEnd type="none" w="med" len="med"/>
-                    </a:lnB>
-                    <a:solidFill>
-                      <a:srgbClr val="FBEFE8"/>
-                    </a:solidFill>
-                  </a:tcPr>
-                </a:tc>
-                <a:tc>
-                  <a:txBody>
-                    <a:bodyPr/>
-                    <a:lstStyle/>
-                    <a:p>
-                      <a:pPr algn="r" indent="0" marL="0">
-                        <a:buNone/>
-                      </a:pPr>
-                      <a:r>
-                        <a:rPr lang="en-US" sz="850" b="1" dirty="0">
-                          <a:solidFill>
-                            <a:srgbClr val="B05A2E"/>
-                          </a:solidFill>
-                          <a:latin typeface="맑은 고딕" pitchFamily="34" charset="0"/>
-                          <a:ea typeface="맑은 고딕" pitchFamily="34" charset="-122"/>
-                          <a:cs typeface="맑은 고딕" pitchFamily="34" charset="-120"/>
-                        </a:rPr>
-                        <a:t>250.0</a:t>
-                      </a:r>
-                      <a:endParaRPr lang="en-US" sz="850" dirty="0">
-                        <a:latin typeface="맑은 고딕" charset="0"/>
-                        <a:ea typeface="맑은 고딕" charset="0"/>
-                        <a:cs typeface="맑은 고딕" charset="0"/>
-                      </a:endParaRPr>
-                    </a:p>
-                  </a:txBody>
-                  <a:tcPr marL="91440" marR="91440" marT="45720" marB="45720" anchor="ctr">
-                    <a:lnL w="12700" cap="flat" cmpd="sng" algn="ctr">
-                      <a:solidFill>
-                        <a:srgbClr val="CBD5E0"/>
-                      </a:solidFill>
-                      <a:prstDash val="solid"/>
-                      <a:round/>
-                      <a:headEnd type="none" w="med" len="med"/>
-                      <a:tailEnd type="none" w="med" len="med"/>
-                    </a:lnL>
-                    <a:lnR w="12700" cap="flat" cmpd="sng" algn="ctr">
-                      <a:solidFill>
-                        <a:srgbClr val="CBD5E0"/>
-                      </a:solidFill>
-                      <a:prstDash val="solid"/>
-                      <a:round/>
-                      <a:headEnd type="none" w="med" len="med"/>
-                      <a:tailEnd type="none" w="med" len="med"/>
-                    </a:lnR>
-                    <a:lnT w="12700" cap="flat" cmpd="sng" algn="ctr">
-                      <a:solidFill>
-                        <a:srgbClr val="CBD5E0"/>
-                      </a:solidFill>
-                      <a:prstDash val="solid"/>
-                      <a:round/>
-                      <a:headEnd type="none" w="med" len="med"/>
-                      <a:tailEnd type="none" w="med" len="med"/>
-                    </a:lnT>
-                    <a:lnB w="12700" cap="flat" cmpd="sng" algn="ctr">
-                      <a:solidFill>
-                        <a:srgbClr val="CBD5E0"/>
-                      </a:solidFill>
-                      <a:prstDash val="solid"/>
-                      <a:round/>
-                      <a:headEnd type="none" w="med" len="med"/>
-                      <a:tailEnd type="none" w="med" len="med"/>
-                    </a:lnB>
-                    <a:solidFill>
-                      <a:srgbClr val="FBEFE8"/>
-                    </a:solidFill>
-                  </a:tcPr>
-                </a:tc>
-                <a:tc>
-                  <a:txBody>
-                    <a:bodyPr/>
-                    <a:lstStyle/>
-                    <a:p>
-                      <a:pPr algn="r" indent="0" marL="0">
-                        <a:buNone/>
-                      </a:pPr>
-                      <a:r>
-                        <a:rPr lang="en-US" sz="850" b="1" dirty="0">
-                          <a:solidFill>
-                            <a:srgbClr val="B05A2E"/>
-                          </a:solidFill>
-                          <a:latin typeface="맑은 고딕" pitchFamily="34" charset="0"/>
-                          <a:ea typeface="맑은 고딕" pitchFamily="34" charset="-122"/>
-                          <a:cs typeface="맑은 고딕" pitchFamily="34" charset="-120"/>
-                        </a:rPr>
-                        <a:t>0</a:t>
-                      </a:r>
-                      <a:endParaRPr lang="en-US" sz="850" dirty="0">
-                        <a:latin typeface="맑은 고딕" charset="0"/>
-                        <a:ea typeface="맑은 고딕" charset="0"/>
-                        <a:cs typeface="맑은 고딕" charset="0"/>
-                      </a:endParaRPr>
-                    </a:p>
-                  </a:txBody>
-                  <a:tcPr marL="91440" marR="91440" marT="45720" marB="45720" anchor="ctr">
-                    <a:lnL w="12700" cap="flat" cmpd="sng" algn="ctr">
-                      <a:solidFill>
-                        <a:srgbClr val="CBD5E0"/>
-                      </a:solidFill>
-                      <a:prstDash val="solid"/>
-                      <a:round/>
-                      <a:headEnd type="none" w="med" len="med"/>
-                      <a:tailEnd type="none" w="med" len="med"/>
-                    </a:lnL>
-                    <a:lnR w="12700" cap="flat" cmpd="sng" algn="ctr">
-                      <a:solidFill>
-                        <a:srgbClr val="CBD5E0"/>
-                      </a:solidFill>
-                      <a:prstDash val="solid"/>
-                      <a:round/>
-                      <a:headEnd type="none" w="med" len="med"/>
-                      <a:tailEnd type="none" w="med" len="med"/>
-                    </a:lnR>
-                    <a:lnT w="12700" cap="flat" cmpd="sng" algn="ctr">
-                      <a:solidFill>
-                        <a:srgbClr val="CBD5E0"/>
-                      </a:solidFill>
-                      <a:prstDash val="solid"/>
-                      <a:round/>
-                      <a:headEnd type="none" w="med" len="med"/>
-                      <a:tailEnd type="none" w="med" len="med"/>
-                    </a:lnT>
-                    <a:lnB w="12700" cap="flat" cmpd="sng" algn="ctr">
-                      <a:solidFill>
-                        <a:srgbClr val="CBD5E0"/>
-                      </a:solidFill>
-                      <a:prstDash val="solid"/>
-                      <a:round/>
-                      <a:headEnd type="none" w="med" len="med"/>
-                      <a:tailEnd type="none" w="med" len="med"/>
-                    </a:lnB>
-                    <a:solidFill>
-                      <a:srgbClr val="FBEFE8"/>
-                    </a:solidFill>
-                  </a:tcPr>
-                </a:tc>
-                <a:tc>
-                  <a:txBody>
-                    <a:bodyPr/>
-                    <a:lstStyle/>
-                    <a:p>
-                      <a:pPr algn="r" indent="0" marL="0">
-                        <a:buNone/>
-                      </a:pPr>
-                      <a:r>
-                        <a:rPr lang="en-US" sz="850" b="1" dirty="0">
-                          <a:solidFill>
-                            <a:srgbClr val="B05A2E"/>
-                          </a:solidFill>
-                          <a:latin typeface="맑은 고딕" pitchFamily="34" charset="0"/>
-                          <a:ea typeface="맑은 고딕" pitchFamily="34" charset="-122"/>
-                          <a:cs typeface="맑은 고딕" pitchFamily="34" charset="-120"/>
-                        </a:rPr>
-                        <a:t>0</a:t>
-                      </a:r>
-                      <a:endParaRPr lang="en-US" sz="850" dirty="0">
-                        <a:latin typeface="맑은 고딕" charset="0"/>
-                        <a:ea typeface="맑은 고딕" charset="0"/>
-                        <a:cs typeface="맑은 고딕" charset="0"/>
-                      </a:endParaRPr>
-                    </a:p>
-                  </a:txBody>
-                  <a:tcPr marL="91440" marR="91440" marT="45720" marB="45720" anchor="ctr">
-                    <a:lnL w="12700" cap="flat" cmpd="sng" algn="ctr">
-                      <a:solidFill>
-                        <a:srgbClr val="CBD5E0"/>
-                      </a:solidFill>
-                      <a:prstDash val="solid"/>
-                      <a:round/>
-                      <a:headEnd type="none" w="med" len="med"/>
-                      <a:tailEnd type="none" w="med" len="med"/>
-                    </a:lnL>
-                    <a:lnR w="12700" cap="flat" cmpd="sng" algn="ctr">
-                      <a:solidFill>
-                        <a:srgbClr val="CBD5E0"/>
-                      </a:solidFill>
-                      <a:prstDash val="solid"/>
-                      <a:round/>
-                      <a:headEnd type="none" w="med" len="med"/>
-                      <a:tailEnd type="none" w="med" len="med"/>
-                    </a:lnR>
-                    <a:lnT w="12700" cap="flat" cmpd="sng" algn="ctr">
-                      <a:solidFill>
-                        <a:srgbClr val="CBD5E0"/>
-                      </a:solidFill>
-                      <a:prstDash val="solid"/>
-                      <a:round/>
-                      <a:headEnd type="none" w="med" len="med"/>
-                      <a:tailEnd type="none" w="med" len="med"/>
-                    </a:lnT>
-                    <a:lnB w="12700" cap="flat" cmpd="sng" algn="ctr">
-                      <a:solidFill>
-                        <a:srgbClr val="CBD5E0"/>
-                      </a:solidFill>
-                      <a:prstDash val="solid"/>
-                      <a:round/>
-                      <a:headEnd type="none" w="med" len="med"/>
-                      <a:tailEnd type="none" w="med" len="med"/>
-                    </a:lnB>
-                    <a:solidFill>
-                      <a:srgbClr val="FBEFE8"/>
-                    </a:solidFill>
-                  </a:tcPr>
-                </a:tc>
-                <a:tc>
-                  <a:txBody>
-                    <a:bodyPr/>
-                    <a:lstStyle/>
-                    <a:p>
-                      <a:pPr algn="r" indent="0" marL="0">
-                        <a:buNone/>
-                      </a:pPr>
-                      <a:r>
-                        <a:rPr lang="en-US" sz="850" b="1" dirty="0">
-                          <a:solidFill>
-                            <a:srgbClr val="B05A2E"/>
-                          </a:solidFill>
-                          <a:latin typeface="맑은 고딕" pitchFamily="34" charset="0"/>
-                          <a:ea typeface="맑은 고딕" pitchFamily="34" charset="-122"/>
-                          <a:cs typeface="맑은 고딕" pitchFamily="34" charset="-120"/>
-                        </a:rPr>
-                        <a:t>0</a:t>
-                      </a:r>
-                      <a:endParaRPr lang="en-US" sz="850" dirty="0">
-                        <a:latin typeface="맑은 고딕" charset="0"/>
-                        <a:ea typeface="맑은 고딕" charset="0"/>
-                        <a:cs typeface="맑은 고딕" charset="0"/>
-                      </a:endParaRPr>
-                    </a:p>
-                  </a:txBody>
-                  <a:tcPr marL="91440" marR="91440" marT="45720" marB="45720" anchor="ctr">
-                    <a:lnL w="12700" cap="flat" cmpd="sng" algn="ctr">
-                      <a:solidFill>
-                        <a:srgbClr val="CBD5E0"/>
-                      </a:solidFill>
-                      <a:prstDash val="solid"/>
-                      <a:round/>
-                      <a:headEnd type="none" w="med" len="med"/>
-                      <a:tailEnd type="none" w="med" len="med"/>
-                    </a:lnL>
-                    <a:lnR w="12700" cap="flat" cmpd="sng" algn="ctr">
-                      <a:solidFill>
-                        <a:srgbClr val="CBD5E0"/>
-                      </a:solidFill>
-                      <a:prstDash val="solid"/>
-                      <a:round/>
-                      <a:headEnd type="none" w="med" len="med"/>
-                      <a:tailEnd type="none" w="med" len="med"/>
-                    </a:lnR>
-                    <a:lnT w="12700" cap="flat" cmpd="sng" algn="ctr">
-                      <a:solidFill>
-                        <a:srgbClr val="CBD5E0"/>
-                      </a:solidFill>
-                      <a:prstDash val="solid"/>
-                      <a:round/>
-                      <a:headEnd type="none" w="med" len="med"/>
-                      <a:tailEnd type="none" w="med" len="med"/>
-                    </a:lnT>
-                    <a:lnB w="12700" cap="flat" cmpd="sng" algn="ctr">
-                      <a:solidFill>
-                        <a:srgbClr val="CBD5E0"/>
-                      </a:solidFill>
-                      <a:prstDash val="solid"/>
-                      <a:round/>
-                      <a:headEnd type="none" w="med" len="med"/>
-                      <a:tailEnd type="none" w="med" len="med"/>
-                    </a:lnB>
-                    <a:solidFill>
-                      <a:srgbClr val="FBEFE8"/>
-                    </a:solidFill>
-                  </a:tcPr>
-                </a:tc>
-                <a:tc>
-                  <a:txBody>
-                    <a:bodyPr/>
-                    <a:lstStyle/>
-                    <a:p>
-                      <a:pPr algn="ctr" indent="0" marL="0">
-                        <a:buNone/>
-                      </a:pPr>
-                      <a:r>
-                        <a:rPr lang="en-US" sz="850" b="1" dirty="0">
-                          <a:solidFill>
-                            <a:srgbClr val="B05A2E"/>
-                          </a:solidFill>
-                          <a:latin typeface="맑은 고딕" pitchFamily="34" charset="0"/>
-                          <a:ea typeface="맑은 고딕" pitchFamily="34" charset="-122"/>
-                          <a:cs typeface="맑은 고딕" pitchFamily="34" charset="-120"/>
-                        </a:rPr>
-                        <a:t>-</a:t>
-                      </a:r>
-                      <a:endParaRPr lang="en-US" sz="850" dirty="0">
-                        <a:latin typeface="맑은 고딕" charset="0"/>
-                        <a:ea typeface="맑은 고딕" charset="0"/>
-                        <a:cs typeface="맑은 고딕" charset="0"/>
-                      </a:endParaRPr>
-                    </a:p>
-                  </a:txBody>
-                  <a:tcPr marL="91440" marR="91440" marT="45720" marB="45720" anchor="ctr">
-                    <a:lnL w="12700" cap="flat" cmpd="sng" algn="ctr">
-                      <a:solidFill>
-                        <a:srgbClr val="CBD5E0"/>
-                      </a:solidFill>
-                      <a:prstDash val="solid"/>
-                      <a:round/>
-                      <a:headEnd type="none" w="med" len="med"/>
-                      <a:tailEnd type="none" w="med" len="med"/>
-                    </a:lnL>
-                    <a:lnR w="12700" cap="flat" cmpd="sng" algn="ctr">
-                      <a:solidFill>
-                        <a:srgbClr val="CBD5E0"/>
-                      </a:solidFill>
-                      <a:prstDash val="solid"/>
-                      <a:round/>
-                      <a:headEnd type="none" w="med" len="med"/>
-                      <a:tailEnd type="none" w="med" len="med"/>
-                    </a:lnR>
-                    <a:lnT w="12700" cap="flat" cmpd="sng" algn="ctr">
-                      <a:solidFill>
-                        <a:srgbClr val="CBD5E0"/>
-                      </a:solidFill>
-                      <a:prstDash val="solid"/>
-                      <a:round/>
-                      <a:headEnd type="none" w="med" len="med"/>
-                      <a:tailEnd type="none" w="med" len="med"/>
-                    </a:lnT>
-                    <a:lnB w="12700" cap="flat" cmpd="sng" algn="ctr">
-                      <a:solidFill>
-                        <a:srgbClr val="CBD5E0"/>
-                      </a:solidFill>
-                      <a:prstDash val="solid"/>
-                      <a:round/>
-                      <a:headEnd type="none" w="med" len="med"/>
-                      <a:tailEnd type="none" w="med" len="med"/>
-                    </a:lnB>
-                    <a:solidFill>
-                      <a:srgbClr val="FBEFE8"/>
-                    </a:solidFill>
-                  </a:tcPr>
-                </a:tc>
-                <a:tc>
-                  <a:txBody>
-                    <a:bodyPr/>
-                    <a:lstStyle/>
-                    <a:p>
-                      <a:pPr algn="ctr" indent="0" marL="0">
-                        <a:buNone/>
-                      </a:pPr>
-                      <a:r>
-                        <a:rPr lang="en-US" sz="850" b="1" dirty="0">
-                          <a:solidFill>
-                            <a:srgbClr val="B05A2E"/>
-                          </a:solidFill>
-                          <a:latin typeface="맑은 고딕" pitchFamily="34" charset="0"/>
-                          <a:ea typeface="맑은 고딕" pitchFamily="34" charset="-122"/>
-                          <a:cs typeface="맑은 고딕" pitchFamily="34" charset="-120"/>
-                        </a:rPr>
-                        <a:t>즉시 입주</a:t>
                       </a:r>
                       <a:endParaRPr lang="en-US" sz="850" dirty="0">
                         <a:latin typeface="맑은 고딕" charset="0"/>
@@ -12580,7 +11365,7 @@
                       <a:tailEnd type="none" w="med" len="med"/>
                     </a:lnB>
                     <a:solidFill>
-                      <a:srgbClr val="FFFFFF"/>
+                      <a:srgbClr val="F3F6F7"/>
                     </a:solidFill>
                   </a:tcPr>
                 </a:tc>
@@ -12601,7 +11386,1974 @@
                           <a:ea typeface="맑은 고딕" pitchFamily="34" charset="-122"/>
                           <a:cs typeface="맑은 고딕" pitchFamily="34" charset="-120"/>
                         </a:rPr>
-                        <a:t>전층</a:t>
+                        <a:t>-</a:t>
+                      </a:r>
+                      <a:endParaRPr lang="en-US" sz="850" dirty="0">
+                        <a:latin typeface="맑은 고딕" charset="0"/>
+                        <a:ea typeface="맑은 고딕" charset="0"/>
+                        <a:cs typeface="맑은 고딕" charset="0"/>
+                      </a:endParaRPr>
+                    </a:p>
+                  </a:txBody>
+                  <a:tcPr marL="91440" marR="91440" marT="45720" marB="45720" anchor="ctr">
+                    <a:lnL w="12700" cap="flat" cmpd="sng" algn="ctr">
+                      <a:solidFill>
+                        <a:srgbClr val="CBD5E0"/>
+                      </a:solidFill>
+                      <a:prstDash val="solid"/>
+                      <a:round/>
+                      <a:headEnd type="none" w="med" len="med"/>
+                      <a:tailEnd type="none" w="med" len="med"/>
+                    </a:lnL>
+                    <a:lnR w="12700" cap="flat" cmpd="sng" algn="ctr">
+                      <a:solidFill>
+                        <a:srgbClr val="CBD5E0"/>
+                      </a:solidFill>
+                      <a:prstDash val="solid"/>
+                      <a:round/>
+                      <a:headEnd type="none" w="med" len="med"/>
+                      <a:tailEnd type="none" w="med" len="med"/>
+                    </a:lnR>
+                    <a:lnT w="12700" cap="flat" cmpd="sng" algn="ctr">
+                      <a:solidFill>
+                        <a:srgbClr val="CBD5E0"/>
+                      </a:solidFill>
+                      <a:prstDash val="solid"/>
+                      <a:round/>
+                      <a:headEnd type="none" w="med" len="med"/>
+                      <a:tailEnd type="none" w="med" len="med"/>
+                    </a:lnT>
+                    <a:lnB w="12700" cap="flat" cmpd="sng" algn="ctr">
+                      <a:solidFill>
+                        <a:srgbClr val="CBD5E0"/>
+                      </a:solidFill>
+                      <a:prstDash val="solid"/>
+                      <a:round/>
+                      <a:headEnd type="none" w="med" len="med"/>
+                      <a:tailEnd type="none" w="med" len="med"/>
+                    </a:lnB>
+                    <a:solidFill>
+                      <a:srgbClr val="F3F6F7"/>
+                    </a:solidFill>
+                  </a:tcPr>
+                </a:tc>
+                <a:tc>
+                  <a:txBody>
+                    <a:bodyPr/>
+                    <a:lstStyle/>
+                    <a:p>
+                      <a:pPr algn="ctr" indent="0" marL="0">
+                        <a:buNone/>
+                      </a:pPr>
+                      <a:r>
+                        <a:rPr lang="en-US" sz="850" dirty="0">
+                          <a:solidFill>
+                            <a:srgbClr val="2B2B2B"/>
+                          </a:solidFill>
+                          <a:latin typeface="맑은 고딕" pitchFamily="34" charset="0"/>
+                          <a:ea typeface="맑은 고딕" pitchFamily="34" charset="-122"/>
+                          <a:cs typeface="맑은 고딕" pitchFamily="34" charset="-120"/>
+                        </a:rPr>
+                        <a:t>사무실</a:t>
+                      </a:r>
+                      <a:endParaRPr lang="en-US" sz="850" dirty="0">
+                        <a:latin typeface="맑은 고딕" charset="0"/>
+                        <a:ea typeface="맑은 고딕" charset="0"/>
+                        <a:cs typeface="맑은 고딕" charset="0"/>
+                      </a:endParaRPr>
+                    </a:p>
+                  </a:txBody>
+                  <a:tcPr marL="91440" marR="91440" marT="45720" marB="45720" anchor="ctr">
+                    <a:lnL w="12700" cap="flat" cmpd="sng" algn="ctr">
+                      <a:solidFill>
+                        <a:srgbClr val="CBD5E0"/>
+                      </a:solidFill>
+                      <a:prstDash val="solid"/>
+                      <a:round/>
+                      <a:headEnd type="none" w="med" len="med"/>
+                      <a:tailEnd type="none" w="med" len="med"/>
+                    </a:lnL>
+                    <a:lnR w="12700" cap="flat" cmpd="sng" algn="ctr">
+                      <a:solidFill>
+                        <a:srgbClr val="CBD5E0"/>
+                      </a:solidFill>
+                      <a:prstDash val="solid"/>
+                      <a:round/>
+                      <a:headEnd type="none" w="med" len="med"/>
+                      <a:tailEnd type="none" w="med" len="med"/>
+                    </a:lnR>
+                    <a:lnT w="12700" cap="flat" cmpd="sng" algn="ctr">
+                      <a:solidFill>
+                        <a:srgbClr val="CBD5E0"/>
+                      </a:solidFill>
+                      <a:prstDash val="solid"/>
+                      <a:round/>
+                      <a:headEnd type="none" w="med" len="med"/>
+                      <a:tailEnd type="none" w="med" len="med"/>
+                    </a:lnT>
+                    <a:lnB w="12700" cap="flat" cmpd="sng" algn="ctr">
+                      <a:solidFill>
+                        <a:srgbClr val="CBD5E0"/>
+                      </a:solidFill>
+                      <a:prstDash val="solid"/>
+                      <a:round/>
+                      <a:headEnd type="none" w="med" len="med"/>
+                      <a:tailEnd type="none" w="med" len="med"/>
+                    </a:lnB>
+                    <a:solidFill>
+                      <a:srgbClr val="F3F6F7"/>
+                    </a:solidFill>
+                  </a:tcPr>
+                </a:tc>
+                <a:tc>
+                  <a:txBody>
+                    <a:bodyPr/>
+                    <a:lstStyle/>
+                    <a:p>
+                      <a:pPr algn="ctr" indent="0" marL="0">
+                        <a:buNone/>
+                      </a:pPr>
+                      <a:r>
+                        <a:rPr lang="en-US" sz="850" dirty="0">
+                          <a:solidFill>
+                            <a:srgbClr val="2B2B2B"/>
+                          </a:solidFill>
+                          <a:latin typeface="맑은 고딕" pitchFamily="34" charset="0"/>
+                          <a:ea typeface="맑은 고딕" pitchFamily="34" charset="-122"/>
+                          <a:cs typeface="맑은 고딕" pitchFamily="34" charset="-120"/>
+                        </a:rPr>
+                        <a:t>사무실</a:t>
+                      </a:r>
+                      <a:endParaRPr lang="en-US" sz="850" dirty="0">
+                        <a:latin typeface="맑은 고딕" charset="0"/>
+                        <a:ea typeface="맑은 고딕" charset="0"/>
+                        <a:cs typeface="맑은 고딕" charset="0"/>
+                      </a:endParaRPr>
+                    </a:p>
+                  </a:txBody>
+                  <a:tcPr marL="91440" marR="91440" marT="45720" marB="45720" anchor="ctr">
+                    <a:lnL w="12700" cap="flat" cmpd="sng" algn="ctr">
+                      <a:solidFill>
+                        <a:srgbClr val="CBD5E0"/>
+                      </a:solidFill>
+                      <a:prstDash val="solid"/>
+                      <a:round/>
+                      <a:headEnd type="none" w="med" len="med"/>
+                      <a:tailEnd type="none" w="med" len="med"/>
+                    </a:lnL>
+                    <a:lnR w="12700" cap="flat" cmpd="sng" algn="ctr">
+                      <a:solidFill>
+                        <a:srgbClr val="CBD5E0"/>
+                      </a:solidFill>
+                      <a:prstDash val="solid"/>
+                      <a:round/>
+                      <a:headEnd type="none" w="med" len="med"/>
+                      <a:tailEnd type="none" w="med" len="med"/>
+                    </a:lnR>
+                    <a:lnT w="12700" cap="flat" cmpd="sng" algn="ctr">
+                      <a:solidFill>
+                        <a:srgbClr val="CBD5E0"/>
+                      </a:solidFill>
+                      <a:prstDash val="solid"/>
+                      <a:round/>
+                      <a:headEnd type="none" w="med" len="med"/>
+                      <a:tailEnd type="none" w="med" len="med"/>
+                    </a:lnT>
+                    <a:lnB w="12700" cap="flat" cmpd="sng" algn="ctr">
+                      <a:solidFill>
+                        <a:srgbClr val="CBD5E0"/>
+                      </a:solidFill>
+                      <a:prstDash val="solid"/>
+                      <a:round/>
+                      <a:headEnd type="none" w="med" len="med"/>
+                      <a:tailEnd type="none" w="med" len="med"/>
+                    </a:lnB>
+                    <a:solidFill>
+                      <a:srgbClr val="F3F6F7"/>
+                    </a:solidFill>
+                  </a:tcPr>
+                </a:tc>
+                <a:tc>
+                  <a:txBody>
+                    <a:bodyPr/>
+                    <a:lstStyle/>
+                    <a:p>
+                      <a:pPr algn="r" indent="0" marL="0">
+                        <a:buNone/>
+                      </a:pPr>
+                      <a:r>
+                        <a:rPr lang="en-US" sz="850" dirty="0">
+                          <a:solidFill>
+                            <a:srgbClr val="2B2B2B"/>
+                          </a:solidFill>
+                          <a:latin typeface="맑은 고딕" pitchFamily="34" charset="0"/>
+                          <a:ea typeface="맑은 고딕" pitchFamily="34" charset="-122"/>
+                          <a:cs typeface="맑은 고딕" pitchFamily="34" charset="-120"/>
+                        </a:rPr>
+                        <a:t>-</a:t>
+                      </a:r>
+                      <a:endParaRPr lang="en-US" sz="850" dirty="0">
+                        <a:latin typeface="맑은 고딕" charset="0"/>
+                        <a:ea typeface="맑은 고딕" charset="0"/>
+                        <a:cs typeface="맑은 고딕" charset="0"/>
+                      </a:endParaRPr>
+                    </a:p>
+                  </a:txBody>
+                  <a:tcPr marL="91440" marR="91440" marT="45720" marB="45720" anchor="ctr">
+                    <a:lnL w="12700" cap="flat" cmpd="sng" algn="ctr">
+                      <a:solidFill>
+                        <a:srgbClr val="CBD5E0"/>
+                      </a:solidFill>
+                      <a:prstDash val="solid"/>
+                      <a:round/>
+                      <a:headEnd type="none" w="med" len="med"/>
+                      <a:tailEnd type="none" w="med" len="med"/>
+                    </a:lnL>
+                    <a:lnR w="12700" cap="flat" cmpd="sng" algn="ctr">
+                      <a:solidFill>
+                        <a:srgbClr val="CBD5E0"/>
+                      </a:solidFill>
+                      <a:prstDash val="solid"/>
+                      <a:round/>
+                      <a:headEnd type="none" w="med" len="med"/>
+                      <a:tailEnd type="none" w="med" len="med"/>
+                    </a:lnR>
+                    <a:lnT w="12700" cap="flat" cmpd="sng" algn="ctr">
+                      <a:solidFill>
+                        <a:srgbClr val="CBD5E0"/>
+                      </a:solidFill>
+                      <a:prstDash val="solid"/>
+                      <a:round/>
+                      <a:headEnd type="none" w="med" len="med"/>
+                      <a:tailEnd type="none" w="med" len="med"/>
+                    </a:lnT>
+                    <a:lnB w="12700" cap="flat" cmpd="sng" algn="ctr">
+                      <a:solidFill>
+                        <a:srgbClr val="CBD5E0"/>
+                      </a:solidFill>
+                      <a:prstDash val="solid"/>
+                      <a:round/>
+                      <a:headEnd type="none" w="med" len="med"/>
+                      <a:tailEnd type="none" w="med" len="med"/>
+                    </a:lnB>
+                    <a:solidFill>
+                      <a:srgbClr val="F3F6F7"/>
+                    </a:solidFill>
+                  </a:tcPr>
+                </a:tc>
+                <a:tc>
+                  <a:txBody>
+                    <a:bodyPr/>
+                    <a:lstStyle/>
+                    <a:p>
+                      <a:pPr algn="r" indent="0" marL="0">
+                        <a:buNone/>
+                      </a:pPr>
+                      <a:r>
+                        <a:rPr lang="en-US" sz="850" dirty="0">
+                          <a:solidFill>
+                            <a:srgbClr val="2B2B2B"/>
+                          </a:solidFill>
+                          <a:latin typeface="맑은 고딕" pitchFamily="34" charset="0"/>
+                          <a:ea typeface="맑은 고딕" pitchFamily="34" charset="-122"/>
+                          <a:cs typeface="맑은 고딕" pitchFamily="34" charset="-120"/>
+                        </a:rPr>
+                        <a:t>0</a:t>
+                      </a:r>
+                      <a:endParaRPr lang="en-US" sz="850" dirty="0">
+                        <a:latin typeface="맑은 고딕" charset="0"/>
+                        <a:ea typeface="맑은 고딕" charset="0"/>
+                        <a:cs typeface="맑은 고딕" charset="0"/>
+                      </a:endParaRPr>
+                    </a:p>
+                  </a:txBody>
+                  <a:tcPr marL="91440" marR="91440" marT="45720" marB="45720" anchor="ctr">
+                    <a:lnL w="12700" cap="flat" cmpd="sng" algn="ctr">
+                      <a:solidFill>
+                        <a:srgbClr val="CBD5E0"/>
+                      </a:solidFill>
+                      <a:prstDash val="solid"/>
+                      <a:round/>
+                      <a:headEnd type="none" w="med" len="med"/>
+                      <a:tailEnd type="none" w="med" len="med"/>
+                    </a:lnL>
+                    <a:lnR w="12700" cap="flat" cmpd="sng" algn="ctr">
+                      <a:solidFill>
+                        <a:srgbClr val="CBD5E0"/>
+                      </a:solidFill>
+                      <a:prstDash val="solid"/>
+                      <a:round/>
+                      <a:headEnd type="none" w="med" len="med"/>
+                      <a:tailEnd type="none" w="med" len="med"/>
+                    </a:lnR>
+                    <a:lnT w="12700" cap="flat" cmpd="sng" algn="ctr">
+                      <a:solidFill>
+                        <a:srgbClr val="CBD5E0"/>
+                      </a:solidFill>
+                      <a:prstDash val="solid"/>
+                      <a:round/>
+                      <a:headEnd type="none" w="med" len="med"/>
+                      <a:tailEnd type="none" w="med" len="med"/>
+                    </a:lnT>
+                    <a:lnB w="12700" cap="flat" cmpd="sng" algn="ctr">
+                      <a:solidFill>
+                        <a:srgbClr val="CBD5E0"/>
+                      </a:solidFill>
+                      <a:prstDash val="solid"/>
+                      <a:round/>
+                      <a:headEnd type="none" w="med" len="med"/>
+                      <a:tailEnd type="none" w="med" len="med"/>
+                    </a:lnB>
+                    <a:solidFill>
+                      <a:srgbClr val="F3F6F7"/>
+                    </a:solidFill>
+                  </a:tcPr>
+                </a:tc>
+                <a:tc>
+                  <a:txBody>
+                    <a:bodyPr/>
+                    <a:lstStyle/>
+                    <a:p>
+                      <a:pPr algn="r" indent="0" marL="0">
+                        <a:buNone/>
+                      </a:pPr>
+                      <a:r>
+                        <a:rPr lang="en-US" sz="850" dirty="0">
+                          <a:solidFill>
+                            <a:srgbClr val="2B2B2B"/>
+                          </a:solidFill>
+                          <a:latin typeface="맑은 고딕" pitchFamily="34" charset="0"/>
+                          <a:ea typeface="맑은 고딕" pitchFamily="34" charset="-122"/>
+                          <a:cs typeface="맑은 고딕" pitchFamily="34" charset="-120"/>
+                        </a:rPr>
+                        <a:t>0</a:t>
+                      </a:r>
+                      <a:endParaRPr lang="en-US" sz="850" dirty="0">
+                        <a:latin typeface="맑은 고딕" charset="0"/>
+                        <a:ea typeface="맑은 고딕" charset="0"/>
+                        <a:cs typeface="맑은 고딕" charset="0"/>
+                      </a:endParaRPr>
+                    </a:p>
+                  </a:txBody>
+                  <a:tcPr marL="91440" marR="91440" marT="45720" marB="45720" anchor="ctr">
+                    <a:lnL w="12700" cap="flat" cmpd="sng" algn="ctr">
+                      <a:solidFill>
+                        <a:srgbClr val="CBD5E0"/>
+                      </a:solidFill>
+                      <a:prstDash val="solid"/>
+                      <a:round/>
+                      <a:headEnd type="none" w="med" len="med"/>
+                      <a:tailEnd type="none" w="med" len="med"/>
+                    </a:lnL>
+                    <a:lnR w="12700" cap="flat" cmpd="sng" algn="ctr">
+                      <a:solidFill>
+                        <a:srgbClr val="CBD5E0"/>
+                      </a:solidFill>
+                      <a:prstDash val="solid"/>
+                      <a:round/>
+                      <a:headEnd type="none" w="med" len="med"/>
+                      <a:tailEnd type="none" w="med" len="med"/>
+                    </a:lnR>
+                    <a:lnT w="12700" cap="flat" cmpd="sng" algn="ctr">
+                      <a:solidFill>
+                        <a:srgbClr val="CBD5E0"/>
+                      </a:solidFill>
+                      <a:prstDash val="solid"/>
+                      <a:round/>
+                      <a:headEnd type="none" w="med" len="med"/>
+                      <a:tailEnd type="none" w="med" len="med"/>
+                    </a:lnT>
+                    <a:lnB w="12700" cap="flat" cmpd="sng" algn="ctr">
+                      <a:solidFill>
+                        <a:srgbClr val="CBD5E0"/>
+                      </a:solidFill>
+                      <a:prstDash val="solid"/>
+                      <a:round/>
+                      <a:headEnd type="none" w="med" len="med"/>
+                      <a:tailEnd type="none" w="med" len="med"/>
+                    </a:lnB>
+                    <a:solidFill>
+                      <a:srgbClr val="F3F6F7"/>
+                    </a:solidFill>
+                  </a:tcPr>
+                </a:tc>
+                <a:tc>
+                  <a:txBody>
+                    <a:bodyPr/>
+                    <a:lstStyle/>
+                    <a:p>
+                      <a:pPr algn="r" indent="0" marL="0">
+                        <a:buNone/>
+                      </a:pPr>
+                      <a:r>
+                        <a:rPr lang="en-US" sz="850" dirty="0">
+                          <a:solidFill>
+                            <a:srgbClr val="2B2B2B"/>
+                          </a:solidFill>
+                          <a:latin typeface="맑은 고딕" pitchFamily="34" charset="0"/>
+                          <a:ea typeface="맑은 고딕" pitchFamily="34" charset="-122"/>
+                          <a:cs typeface="맑은 고딕" pitchFamily="34" charset="-120"/>
+                        </a:rPr>
+                        <a:t>-</a:t>
+                      </a:r>
+                      <a:endParaRPr lang="en-US" sz="850" dirty="0">
+                        <a:latin typeface="맑은 고딕" charset="0"/>
+                        <a:ea typeface="맑은 고딕" charset="0"/>
+                        <a:cs typeface="맑은 고딕" charset="0"/>
+                      </a:endParaRPr>
+                    </a:p>
+                  </a:txBody>
+                  <a:tcPr marL="91440" marR="91440" marT="45720" marB="45720" anchor="ctr">
+                    <a:lnL w="12700" cap="flat" cmpd="sng" algn="ctr">
+                      <a:solidFill>
+                        <a:srgbClr val="CBD5E0"/>
+                      </a:solidFill>
+                      <a:prstDash val="solid"/>
+                      <a:round/>
+                      <a:headEnd type="none" w="med" len="med"/>
+                      <a:tailEnd type="none" w="med" len="med"/>
+                    </a:lnL>
+                    <a:lnR w="12700" cap="flat" cmpd="sng" algn="ctr">
+                      <a:solidFill>
+                        <a:srgbClr val="CBD5E0"/>
+                      </a:solidFill>
+                      <a:prstDash val="solid"/>
+                      <a:round/>
+                      <a:headEnd type="none" w="med" len="med"/>
+                      <a:tailEnd type="none" w="med" len="med"/>
+                    </a:lnR>
+                    <a:lnT w="12700" cap="flat" cmpd="sng" algn="ctr">
+                      <a:solidFill>
+                        <a:srgbClr val="CBD5E0"/>
+                      </a:solidFill>
+                      <a:prstDash val="solid"/>
+                      <a:round/>
+                      <a:headEnd type="none" w="med" len="med"/>
+                      <a:tailEnd type="none" w="med" len="med"/>
+                    </a:lnT>
+                    <a:lnB w="12700" cap="flat" cmpd="sng" algn="ctr">
+                      <a:solidFill>
+                        <a:srgbClr val="CBD5E0"/>
+                      </a:solidFill>
+                      <a:prstDash val="solid"/>
+                      <a:round/>
+                      <a:headEnd type="none" w="med" len="med"/>
+                      <a:tailEnd type="none" w="med" len="med"/>
+                    </a:lnB>
+                    <a:solidFill>
+                      <a:srgbClr val="F3F6F7"/>
+                    </a:solidFill>
+                  </a:tcPr>
+                </a:tc>
+                <a:tc>
+                  <a:txBody>
+                    <a:bodyPr/>
+                    <a:lstStyle/>
+                    <a:p>
+                      <a:pPr algn="ctr" indent="0" marL="0">
+                        <a:buNone/>
+                      </a:pPr>
+                      <a:r>
+                        <a:rPr lang="en-US" sz="850" dirty="0">
+                          <a:solidFill>
+                            <a:srgbClr val="2B2B2B"/>
+                          </a:solidFill>
+                          <a:latin typeface="맑은 고딕" pitchFamily="34" charset="0"/>
+                          <a:ea typeface="맑은 고딕" pitchFamily="34" charset="-122"/>
+                          <a:cs typeface="맑은 고딕" pitchFamily="34" charset="-120"/>
+                        </a:rPr>
+                        <a:t>-</a:t>
+                      </a:r>
+                      <a:endParaRPr lang="en-US" sz="850" dirty="0">
+                        <a:latin typeface="맑은 고딕" charset="0"/>
+                        <a:ea typeface="맑은 고딕" charset="0"/>
+                        <a:cs typeface="맑은 고딕" charset="0"/>
+                      </a:endParaRPr>
+                    </a:p>
+                  </a:txBody>
+                  <a:tcPr marL="91440" marR="91440" marT="45720" marB="45720" anchor="ctr">
+                    <a:lnL w="12700" cap="flat" cmpd="sng" algn="ctr">
+                      <a:solidFill>
+                        <a:srgbClr val="CBD5E0"/>
+                      </a:solidFill>
+                      <a:prstDash val="solid"/>
+                      <a:round/>
+                      <a:headEnd type="none" w="med" len="med"/>
+                      <a:tailEnd type="none" w="med" len="med"/>
+                    </a:lnL>
+                    <a:lnR w="12700" cap="flat" cmpd="sng" algn="ctr">
+                      <a:solidFill>
+                        <a:srgbClr val="CBD5E0"/>
+                      </a:solidFill>
+                      <a:prstDash val="solid"/>
+                      <a:round/>
+                      <a:headEnd type="none" w="med" len="med"/>
+                      <a:tailEnd type="none" w="med" len="med"/>
+                    </a:lnR>
+                    <a:lnT w="12700" cap="flat" cmpd="sng" algn="ctr">
+                      <a:solidFill>
+                        <a:srgbClr val="CBD5E0"/>
+                      </a:solidFill>
+                      <a:prstDash val="solid"/>
+                      <a:round/>
+                      <a:headEnd type="none" w="med" len="med"/>
+                      <a:tailEnd type="none" w="med" len="med"/>
+                    </a:lnT>
+                    <a:lnB w="12700" cap="flat" cmpd="sng" algn="ctr">
+                      <a:solidFill>
+                        <a:srgbClr val="CBD5E0"/>
+                      </a:solidFill>
+                      <a:prstDash val="solid"/>
+                      <a:round/>
+                      <a:headEnd type="none" w="med" len="med"/>
+                      <a:tailEnd type="none" w="med" len="med"/>
+                    </a:lnB>
+                    <a:solidFill>
+                      <a:srgbClr val="F3F6F7"/>
+                    </a:solidFill>
+                  </a:tcPr>
+                </a:tc>
+                <a:tc>
+                  <a:txBody>
+                    <a:bodyPr/>
+                    <a:lstStyle/>
+                    <a:p>
+                      <a:pPr algn="ctr" indent="0" marL="0">
+                        <a:buNone/>
+                      </a:pPr>
+                      <a:endParaRPr lang="en-US" sz="850" dirty="0">
+                        <a:latin typeface="맑은 고딕" charset="0"/>
+                        <a:ea typeface="맑은 고딕" charset="0"/>
+                        <a:cs typeface="맑은 고딕" charset="0"/>
+                      </a:endParaRPr>
+                    </a:p>
+                  </a:txBody>
+                  <a:tcPr marL="91440" marR="91440" marT="45720" marB="45720" anchor="ctr">
+                    <a:lnL w="12700" cap="flat" cmpd="sng" algn="ctr">
+                      <a:solidFill>
+                        <a:srgbClr val="CBD5E0"/>
+                      </a:solidFill>
+                      <a:prstDash val="solid"/>
+                      <a:round/>
+                      <a:headEnd type="none" w="med" len="med"/>
+                      <a:tailEnd type="none" w="med" len="med"/>
+                    </a:lnL>
+                    <a:lnR w="12700" cap="flat" cmpd="sng" algn="ctr">
+                      <a:solidFill>
+                        <a:srgbClr val="CBD5E0"/>
+                      </a:solidFill>
+                      <a:prstDash val="solid"/>
+                      <a:round/>
+                      <a:headEnd type="none" w="med" len="med"/>
+                      <a:tailEnd type="none" w="med" len="med"/>
+                    </a:lnR>
+                    <a:lnT w="12700" cap="flat" cmpd="sng" algn="ctr">
+                      <a:solidFill>
+                        <a:srgbClr val="CBD5E0"/>
+                      </a:solidFill>
+                      <a:prstDash val="solid"/>
+                      <a:round/>
+                      <a:headEnd type="none" w="med" len="med"/>
+                      <a:tailEnd type="none" w="med" len="med"/>
+                    </a:lnT>
+                    <a:lnB w="12700" cap="flat" cmpd="sng" algn="ctr">
+                      <a:solidFill>
+                        <a:srgbClr val="CBD5E0"/>
+                      </a:solidFill>
+                      <a:prstDash val="solid"/>
+                      <a:round/>
+                      <a:headEnd type="none" w="med" len="med"/>
+                      <a:tailEnd type="none" w="med" len="med"/>
+                    </a:lnB>
+                    <a:solidFill>
+                      <a:srgbClr val="F3F6F7"/>
+                    </a:solidFill>
+                  </a:tcPr>
+                </a:tc>
+              </a:tr>
+              <a:tr h="320040">
+                <a:tc>
+                  <a:txBody>
+                    <a:bodyPr/>
+                    <a:lstStyle/>
+                    <a:p>
+                      <a:pPr algn="ctr" indent="0" marL="0">
+                        <a:buNone/>
+                      </a:pPr>
+                      <a:r>
+                        <a:rPr lang="en-US" sz="850" b="1" dirty="0">
+                          <a:solidFill>
+                            <a:srgbClr val="B05A2E"/>
+                          </a:solidFill>
+                          <a:latin typeface="맑은 고딕" pitchFamily="34" charset="0"/>
+                          <a:ea typeface="맑은 고딕" pitchFamily="34" charset="-122"/>
+                          <a:cs typeface="맑은 고딕" pitchFamily="34" charset="-120"/>
+                        </a:rPr>
+                        <a:t>4F</a:t>
+                      </a:r>
+                      <a:endParaRPr lang="en-US" sz="850" dirty="0">
+                        <a:latin typeface="맑은 고딕" charset="0"/>
+                        <a:ea typeface="맑은 고딕" charset="0"/>
+                        <a:cs typeface="맑은 고딕" charset="0"/>
+                      </a:endParaRPr>
+                    </a:p>
+                  </a:txBody>
+                  <a:tcPr marL="91440" marR="91440" marT="45720" marB="45720" anchor="ctr">
+                    <a:lnL w="12700" cap="flat" cmpd="sng" algn="ctr">
+                      <a:solidFill>
+                        <a:srgbClr val="CBD5E0"/>
+                      </a:solidFill>
+                      <a:prstDash val="solid"/>
+                      <a:round/>
+                      <a:headEnd type="none" w="med" len="med"/>
+                      <a:tailEnd type="none" w="med" len="med"/>
+                    </a:lnL>
+                    <a:lnR w="12700" cap="flat" cmpd="sng" algn="ctr">
+                      <a:solidFill>
+                        <a:srgbClr val="CBD5E0"/>
+                      </a:solidFill>
+                      <a:prstDash val="solid"/>
+                      <a:round/>
+                      <a:headEnd type="none" w="med" len="med"/>
+                      <a:tailEnd type="none" w="med" len="med"/>
+                    </a:lnR>
+                    <a:lnT w="12700" cap="flat" cmpd="sng" algn="ctr">
+                      <a:solidFill>
+                        <a:srgbClr val="CBD5E0"/>
+                      </a:solidFill>
+                      <a:prstDash val="solid"/>
+                      <a:round/>
+                      <a:headEnd type="none" w="med" len="med"/>
+                      <a:tailEnd type="none" w="med" len="med"/>
+                    </a:lnT>
+                    <a:lnB w="12700" cap="flat" cmpd="sng" algn="ctr">
+                      <a:solidFill>
+                        <a:srgbClr val="CBD5E0"/>
+                      </a:solidFill>
+                      <a:prstDash val="solid"/>
+                      <a:round/>
+                      <a:headEnd type="none" w="med" len="med"/>
+                      <a:tailEnd type="none" w="med" len="med"/>
+                    </a:lnB>
+                    <a:solidFill>
+                      <a:srgbClr val="FBEFE8"/>
+                    </a:solidFill>
+                  </a:tcPr>
+                </a:tc>
+                <a:tc>
+                  <a:txBody>
+                    <a:bodyPr/>
+                    <a:lstStyle/>
+                    <a:p>
+                      <a:pPr algn="ctr" indent="0" marL="0">
+                        <a:buNone/>
+                      </a:pPr>
+                      <a:r>
+                        <a:rPr lang="en-US" sz="850" b="1" dirty="0">
+                          <a:solidFill>
+                            <a:srgbClr val="B05A2E"/>
+                          </a:solidFill>
+                          <a:latin typeface="맑은 고딕" pitchFamily="34" charset="0"/>
+                          <a:ea typeface="맑은 고딕" pitchFamily="34" charset="-122"/>
+                          <a:cs typeface="맑은 고딕" pitchFamily="34" charset="-120"/>
+                        </a:rPr>
+                        <a:t>-</a:t>
+                      </a:r>
+                      <a:endParaRPr lang="en-US" sz="850" dirty="0">
+                        <a:latin typeface="맑은 고딕" charset="0"/>
+                        <a:ea typeface="맑은 고딕" charset="0"/>
+                        <a:cs typeface="맑은 고딕" charset="0"/>
+                      </a:endParaRPr>
+                    </a:p>
+                  </a:txBody>
+                  <a:tcPr marL="91440" marR="91440" marT="45720" marB="45720" anchor="ctr">
+                    <a:lnL w="12700" cap="flat" cmpd="sng" algn="ctr">
+                      <a:solidFill>
+                        <a:srgbClr val="CBD5E0"/>
+                      </a:solidFill>
+                      <a:prstDash val="solid"/>
+                      <a:round/>
+                      <a:headEnd type="none" w="med" len="med"/>
+                      <a:tailEnd type="none" w="med" len="med"/>
+                    </a:lnL>
+                    <a:lnR w="12700" cap="flat" cmpd="sng" algn="ctr">
+                      <a:solidFill>
+                        <a:srgbClr val="CBD5E0"/>
+                      </a:solidFill>
+                      <a:prstDash val="solid"/>
+                      <a:round/>
+                      <a:headEnd type="none" w="med" len="med"/>
+                      <a:tailEnd type="none" w="med" len="med"/>
+                    </a:lnR>
+                    <a:lnT w="12700" cap="flat" cmpd="sng" algn="ctr">
+                      <a:solidFill>
+                        <a:srgbClr val="CBD5E0"/>
+                      </a:solidFill>
+                      <a:prstDash val="solid"/>
+                      <a:round/>
+                      <a:headEnd type="none" w="med" len="med"/>
+                      <a:tailEnd type="none" w="med" len="med"/>
+                    </a:lnT>
+                    <a:lnB w="12700" cap="flat" cmpd="sng" algn="ctr">
+                      <a:solidFill>
+                        <a:srgbClr val="CBD5E0"/>
+                      </a:solidFill>
+                      <a:prstDash val="solid"/>
+                      <a:round/>
+                      <a:headEnd type="none" w="med" len="med"/>
+                      <a:tailEnd type="none" w="med" len="med"/>
+                    </a:lnB>
+                    <a:solidFill>
+                      <a:srgbClr val="FBEFE8"/>
+                    </a:solidFill>
+                  </a:tcPr>
+                </a:tc>
+                <a:tc>
+                  <a:txBody>
+                    <a:bodyPr/>
+                    <a:lstStyle/>
+                    <a:p>
+                      <a:pPr algn="ctr" indent="0" marL="0">
+                        <a:buNone/>
+                      </a:pPr>
+                      <a:r>
+                        <a:rPr lang="en-US" sz="850" b="1" dirty="0">
+                          <a:solidFill>
+                            <a:srgbClr val="B05A2E"/>
+                          </a:solidFill>
+                          <a:latin typeface="맑은 고딕" pitchFamily="34" charset="0"/>
+                          <a:ea typeface="맑은 고딕" pitchFamily="34" charset="-122"/>
+                          <a:cs typeface="맑은 고딕" pitchFamily="34" charset="-120"/>
+                        </a:rPr>
+                        <a:t>공실</a:t>
+                      </a:r>
+                      <a:endParaRPr lang="en-US" sz="850" dirty="0">
+                        <a:latin typeface="맑은 고딕" charset="0"/>
+                        <a:ea typeface="맑은 고딕" charset="0"/>
+                        <a:cs typeface="맑은 고딕" charset="0"/>
+                      </a:endParaRPr>
+                    </a:p>
+                  </a:txBody>
+                  <a:tcPr marL="91440" marR="91440" marT="45720" marB="45720" anchor="ctr">
+                    <a:lnL w="12700" cap="flat" cmpd="sng" algn="ctr">
+                      <a:solidFill>
+                        <a:srgbClr val="CBD5E0"/>
+                      </a:solidFill>
+                      <a:prstDash val="solid"/>
+                      <a:round/>
+                      <a:headEnd type="none" w="med" len="med"/>
+                      <a:tailEnd type="none" w="med" len="med"/>
+                    </a:lnL>
+                    <a:lnR w="12700" cap="flat" cmpd="sng" algn="ctr">
+                      <a:solidFill>
+                        <a:srgbClr val="CBD5E0"/>
+                      </a:solidFill>
+                      <a:prstDash val="solid"/>
+                      <a:round/>
+                      <a:headEnd type="none" w="med" len="med"/>
+                      <a:tailEnd type="none" w="med" len="med"/>
+                    </a:lnR>
+                    <a:lnT w="12700" cap="flat" cmpd="sng" algn="ctr">
+                      <a:solidFill>
+                        <a:srgbClr val="CBD5E0"/>
+                      </a:solidFill>
+                      <a:prstDash val="solid"/>
+                      <a:round/>
+                      <a:headEnd type="none" w="med" len="med"/>
+                      <a:tailEnd type="none" w="med" len="med"/>
+                    </a:lnT>
+                    <a:lnB w="12700" cap="flat" cmpd="sng" algn="ctr">
+                      <a:solidFill>
+                        <a:srgbClr val="CBD5E0"/>
+                      </a:solidFill>
+                      <a:prstDash val="solid"/>
+                      <a:round/>
+                      <a:headEnd type="none" w="med" len="med"/>
+                      <a:tailEnd type="none" w="med" len="med"/>
+                    </a:lnB>
+                    <a:solidFill>
+                      <a:srgbClr val="FBEFE8"/>
+                    </a:solidFill>
+                  </a:tcPr>
+                </a:tc>
+                <a:tc>
+                  <a:txBody>
+                    <a:bodyPr/>
+                    <a:lstStyle/>
+                    <a:p>
+                      <a:pPr algn="ctr" indent="0" marL="0">
+                        <a:buNone/>
+                      </a:pPr>
+                      <a:r>
+                        <a:rPr lang="en-US" sz="850" b="1" dirty="0">
+                          <a:solidFill>
+                            <a:srgbClr val="B05A2E"/>
+                          </a:solidFill>
+                          <a:latin typeface="맑은 고딕" pitchFamily="34" charset="0"/>
+                          <a:ea typeface="맑은 고딕" pitchFamily="34" charset="-122"/>
+                          <a:cs typeface="맑은 고딕" pitchFamily="34" charset="-120"/>
+                        </a:rPr>
+                        <a:t>공실</a:t>
+                      </a:r>
+                      <a:endParaRPr lang="en-US" sz="850" dirty="0">
+                        <a:latin typeface="맑은 고딕" charset="0"/>
+                        <a:ea typeface="맑은 고딕" charset="0"/>
+                        <a:cs typeface="맑은 고딕" charset="0"/>
+                      </a:endParaRPr>
+                    </a:p>
+                  </a:txBody>
+                  <a:tcPr marL="91440" marR="91440" marT="45720" marB="45720" anchor="ctr">
+                    <a:lnL w="12700" cap="flat" cmpd="sng" algn="ctr">
+                      <a:solidFill>
+                        <a:srgbClr val="CBD5E0"/>
+                      </a:solidFill>
+                      <a:prstDash val="solid"/>
+                      <a:round/>
+                      <a:headEnd type="none" w="med" len="med"/>
+                      <a:tailEnd type="none" w="med" len="med"/>
+                    </a:lnL>
+                    <a:lnR w="12700" cap="flat" cmpd="sng" algn="ctr">
+                      <a:solidFill>
+                        <a:srgbClr val="CBD5E0"/>
+                      </a:solidFill>
+                      <a:prstDash val="solid"/>
+                      <a:round/>
+                      <a:headEnd type="none" w="med" len="med"/>
+                      <a:tailEnd type="none" w="med" len="med"/>
+                    </a:lnR>
+                    <a:lnT w="12700" cap="flat" cmpd="sng" algn="ctr">
+                      <a:solidFill>
+                        <a:srgbClr val="CBD5E0"/>
+                      </a:solidFill>
+                      <a:prstDash val="solid"/>
+                      <a:round/>
+                      <a:headEnd type="none" w="med" len="med"/>
+                      <a:tailEnd type="none" w="med" len="med"/>
+                    </a:lnT>
+                    <a:lnB w="12700" cap="flat" cmpd="sng" algn="ctr">
+                      <a:solidFill>
+                        <a:srgbClr val="CBD5E0"/>
+                      </a:solidFill>
+                      <a:prstDash val="solid"/>
+                      <a:round/>
+                      <a:headEnd type="none" w="med" len="med"/>
+                      <a:tailEnd type="none" w="med" len="med"/>
+                    </a:lnB>
+                    <a:solidFill>
+                      <a:srgbClr val="FBEFE8"/>
+                    </a:solidFill>
+                  </a:tcPr>
+                </a:tc>
+                <a:tc>
+                  <a:txBody>
+                    <a:bodyPr/>
+                    <a:lstStyle/>
+                    <a:p>
+                      <a:pPr algn="r" indent="0" marL="0">
+                        <a:buNone/>
+                      </a:pPr>
+                      <a:r>
+                        <a:rPr lang="en-US" sz="850" b="1" dirty="0">
+                          <a:solidFill>
+                            <a:srgbClr val="B05A2E"/>
+                          </a:solidFill>
+                          <a:latin typeface="맑은 고딕" pitchFamily="34" charset="0"/>
+                          <a:ea typeface="맑은 고딕" pitchFamily="34" charset="-122"/>
+                          <a:cs typeface="맑은 고딕" pitchFamily="34" charset="-120"/>
+                        </a:rPr>
+                        <a:t>-</a:t>
+                      </a:r>
+                      <a:endParaRPr lang="en-US" sz="850" dirty="0">
+                        <a:latin typeface="맑은 고딕" charset="0"/>
+                        <a:ea typeface="맑은 고딕" charset="0"/>
+                        <a:cs typeface="맑은 고딕" charset="0"/>
+                      </a:endParaRPr>
+                    </a:p>
+                  </a:txBody>
+                  <a:tcPr marL="91440" marR="91440" marT="45720" marB="45720" anchor="ctr">
+                    <a:lnL w="12700" cap="flat" cmpd="sng" algn="ctr">
+                      <a:solidFill>
+                        <a:srgbClr val="CBD5E0"/>
+                      </a:solidFill>
+                      <a:prstDash val="solid"/>
+                      <a:round/>
+                      <a:headEnd type="none" w="med" len="med"/>
+                      <a:tailEnd type="none" w="med" len="med"/>
+                    </a:lnL>
+                    <a:lnR w="12700" cap="flat" cmpd="sng" algn="ctr">
+                      <a:solidFill>
+                        <a:srgbClr val="CBD5E0"/>
+                      </a:solidFill>
+                      <a:prstDash val="solid"/>
+                      <a:round/>
+                      <a:headEnd type="none" w="med" len="med"/>
+                      <a:tailEnd type="none" w="med" len="med"/>
+                    </a:lnR>
+                    <a:lnT w="12700" cap="flat" cmpd="sng" algn="ctr">
+                      <a:solidFill>
+                        <a:srgbClr val="CBD5E0"/>
+                      </a:solidFill>
+                      <a:prstDash val="solid"/>
+                      <a:round/>
+                      <a:headEnd type="none" w="med" len="med"/>
+                      <a:tailEnd type="none" w="med" len="med"/>
+                    </a:lnT>
+                    <a:lnB w="12700" cap="flat" cmpd="sng" algn="ctr">
+                      <a:solidFill>
+                        <a:srgbClr val="CBD5E0"/>
+                      </a:solidFill>
+                      <a:prstDash val="solid"/>
+                      <a:round/>
+                      <a:headEnd type="none" w="med" len="med"/>
+                      <a:tailEnd type="none" w="med" len="med"/>
+                    </a:lnB>
+                    <a:solidFill>
+                      <a:srgbClr val="FBEFE8"/>
+                    </a:solidFill>
+                  </a:tcPr>
+                </a:tc>
+                <a:tc>
+                  <a:txBody>
+                    <a:bodyPr/>
+                    <a:lstStyle/>
+                    <a:p>
+                      <a:pPr algn="r" indent="0" marL="0">
+                        <a:buNone/>
+                      </a:pPr>
+                      <a:r>
+                        <a:rPr lang="en-US" sz="850" b="1" dirty="0">
+                          <a:solidFill>
+                            <a:srgbClr val="B05A2E"/>
+                          </a:solidFill>
+                          <a:latin typeface="맑은 고딕" pitchFamily="34" charset="0"/>
+                          <a:ea typeface="맑은 고딕" pitchFamily="34" charset="-122"/>
+                          <a:cs typeface="맑은 고딕" pitchFamily="34" charset="-120"/>
+                        </a:rPr>
+                        <a:t>0</a:t>
+                      </a:r>
+                      <a:endParaRPr lang="en-US" sz="850" dirty="0">
+                        <a:latin typeface="맑은 고딕" charset="0"/>
+                        <a:ea typeface="맑은 고딕" charset="0"/>
+                        <a:cs typeface="맑은 고딕" charset="0"/>
+                      </a:endParaRPr>
+                    </a:p>
+                  </a:txBody>
+                  <a:tcPr marL="91440" marR="91440" marT="45720" marB="45720" anchor="ctr">
+                    <a:lnL w="12700" cap="flat" cmpd="sng" algn="ctr">
+                      <a:solidFill>
+                        <a:srgbClr val="CBD5E0"/>
+                      </a:solidFill>
+                      <a:prstDash val="solid"/>
+                      <a:round/>
+                      <a:headEnd type="none" w="med" len="med"/>
+                      <a:tailEnd type="none" w="med" len="med"/>
+                    </a:lnL>
+                    <a:lnR w="12700" cap="flat" cmpd="sng" algn="ctr">
+                      <a:solidFill>
+                        <a:srgbClr val="CBD5E0"/>
+                      </a:solidFill>
+                      <a:prstDash val="solid"/>
+                      <a:round/>
+                      <a:headEnd type="none" w="med" len="med"/>
+                      <a:tailEnd type="none" w="med" len="med"/>
+                    </a:lnR>
+                    <a:lnT w="12700" cap="flat" cmpd="sng" algn="ctr">
+                      <a:solidFill>
+                        <a:srgbClr val="CBD5E0"/>
+                      </a:solidFill>
+                      <a:prstDash val="solid"/>
+                      <a:round/>
+                      <a:headEnd type="none" w="med" len="med"/>
+                      <a:tailEnd type="none" w="med" len="med"/>
+                    </a:lnT>
+                    <a:lnB w="12700" cap="flat" cmpd="sng" algn="ctr">
+                      <a:solidFill>
+                        <a:srgbClr val="CBD5E0"/>
+                      </a:solidFill>
+                      <a:prstDash val="solid"/>
+                      <a:round/>
+                      <a:headEnd type="none" w="med" len="med"/>
+                      <a:tailEnd type="none" w="med" len="med"/>
+                    </a:lnB>
+                    <a:solidFill>
+                      <a:srgbClr val="FBEFE8"/>
+                    </a:solidFill>
+                  </a:tcPr>
+                </a:tc>
+                <a:tc>
+                  <a:txBody>
+                    <a:bodyPr/>
+                    <a:lstStyle/>
+                    <a:p>
+                      <a:pPr algn="r" indent="0" marL="0">
+                        <a:buNone/>
+                      </a:pPr>
+                      <a:r>
+                        <a:rPr lang="en-US" sz="850" b="1" dirty="0">
+                          <a:solidFill>
+                            <a:srgbClr val="B05A2E"/>
+                          </a:solidFill>
+                          <a:latin typeface="맑은 고딕" pitchFamily="34" charset="0"/>
+                          <a:ea typeface="맑은 고딕" pitchFamily="34" charset="-122"/>
+                          <a:cs typeface="맑은 고딕" pitchFamily="34" charset="-120"/>
+                        </a:rPr>
+                        <a:t>0</a:t>
+                      </a:r>
+                      <a:endParaRPr lang="en-US" sz="850" dirty="0">
+                        <a:latin typeface="맑은 고딕" charset="0"/>
+                        <a:ea typeface="맑은 고딕" charset="0"/>
+                        <a:cs typeface="맑은 고딕" charset="0"/>
+                      </a:endParaRPr>
+                    </a:p>
+                  </a:txBody>
+                  <a:tcPr marL="91440" marR="91440" marT="45720" marB="45720" anchor="ctr">
+                    <a:lnL w="12700" cap="flat" cmpd="sng" algn="ctr">
+                      <a:solidFill>
+                        <a:srgbClr val="CBD5E0"/>
+                      </a:solidFill>
+                      <a:prstDash val="solid"/>
+                      <a:round/>
+                      <a:headEnd type="none" w="med" len="med"/>
+                      <a:tailEnd type="none" w="med" len="med"/>
+                    </a:lnL>
+                    <a:lnR w="12700" cap="flat" cmpd="sng" algn="ctr">
+                      <a:solidFill>
+                        <a:srgbClr val="CBD5E0"/>
+                      </a:solidFill>
+                      <a:prstDash val="solid"/>
+                      <a:round/>
+                      <a:headEnd type="none" w="med" len="med"/>
+                      <a:tailEnd type="none" w="med" len="med"/>
+                    </a:lnR>
+                    <a:lnT w="12700" cap="flat" cmpd="sng" algn="ctr">
+                      <a:solidFill>
+                        <a:srgbClr val="CBD5E0"/>
+                      </a:solidFill>
+                      <a:prstDash val="solid"/>
+                      <a:round/>
+                      <a:headEnd type="none" w="med" len="med"/>
+                      <a:tailEnd type="none" w="med" len="med"/>
+                    </a:lnT>
+                    <a:lnB w="12700" cap="flat" cmpd="sng" algn="ctr">
+                      <a:solidFill>
+                        <a:srgbClr val="CBD5E0"/>
+                      </a:solidFill>
+                      <a:prstDash val="solid"/>
+                      <a:round/>
+                      <a:headEnd type="none" w="med" len="med"/>
+                      <a:tailEnd type="none" w="med" len="med"/>
+                    </a:lnB>
+                    <a:solidFill>
+                      <a:srgbClr val="FBEFE8"/>
+                    </a:solidFill>
+                  </a:tcPr>
+                </a:tc>
+                <a:tc>
+                  <a:txBody>
+                    <a:bodyPr/>
+                    <a:lstStyle/>
+                    <a:p>
+                      <a:pPr algn="r" indent="0" marL="0">
+                        <a:buNone/>
+                      </a:pPr>
+                      <a:r>
+                        <a:rPr lang="en-US" sz="850" b="1" dirty="0">
+                          <a:solidFill>
+                            <a:srgbClr val="B05A2E"/>
+                          </a:solidFill>
+                          <a:latin typeface="맑은 고딕" pitchFamily="34" charset="0"/>
+                          <a:ea typeface="맑은 고딕" pitchFamily="34" charset="-122"/>
+                          <a:cs typeface="맑은 고딕" pitchFamily="34" charset="-120"/>
+                        </a:rPr>
+                        <a:t>-</a:t>
+                      </a:r>
+                      <a:endParaRPr lang="en-US" sz="850" dirty="0">
+                        <a:latin typeface="맑은 고딕" charset="0"/>
+                        <a:ea typeface="맑은 고딕" charset="0"/>
+                        <a:cs typeface="맑은 고딕" charset="0"/>
+                      </a:endParaRPr>
+                    </a:p>
+                  </a:txBody>
+                  <a:tcPr marL="91440" marR="91440" marT="45720" marB="45720" anchor="ctr">
+                    <a:lnL w="12700" cap="flat" cmpd="sng" algn="ctr">
+                      <a:solidFill>
+                        <a:srgbClr val="CBD5E0"/>
+                      </a:solidFill>
+                      <a:prstDash val="solid"/>
+                      <a:round/>
+                      <a:headEnd type="none" w="med" len="med"/>
+                      <a:tailEnd type="none" w="med" len="med"/>
+                    </a:lnL>
+                    <a:lnR w="12700" cap="flat" cmpd="sng" algn="ctr">
+                      <a:solidFill>
+                        <a:srgbClr val="CBD5E0"/>
+                      </a:solidFill>
+                      <a:prstDash val="solid"/>
+                      <a:round/>
+                      <a:headEnd type="none" w="med" len="med"/>
+                      <a:tailEnd type="none" w="med" len="med"/>
+                    </a:lnR>
+                    <a:lnT w="12700" cap="flat" cmpd="sng" algn="ctr">
+                      <a:solidFill>
+                        <a:srgbClr val="CBD5E0"/>
+                      </a:solidFill>
+                      <a:prstDash val="solid"/>
+                      <a:round/>
+                      <a:headEnd type="none" w="med" len="med"/>
+                      <a:tailEnd type="none" w="med" len="med"/>
+                    </a:lnT>
+                    <a:lnB w="12700" cap="flat" cmpd="sng" algn="ctr">
+                      <a:solidFill>
+                        <a:srgbClr val="CBD5E0"/>
+                      </a:solidFill>
+                      <a:prstDash val="solid"/>
+                      <a:round/>
+                      <a:headEnd type="none" w="med" len="med"/>
+                      <a:tailEnd type="none" w="med" len="med"/>
+                    </a:lnB>
+                    <a:solidFill>
+                      <a:srgbClr val="FBEFE8"/>
+                    </a:solidFill>
+                  </a:tcPr>
+                </a:tc>
+                <a:tc>
+                  <a:txBody>
+                    <a:bodyPr/>
+                    <a:lstStyle/>
+                    <a:p>
+                      <a:pPr algn="ctr" indent="0" marL="0">
+                        <a:buNone/>
+                      </a:pPr>
+                      <a:r>
+                        <a:rPr lang="en-US" sz="850" b="1" dirty="0">
+                          <a:solidFill>
+                            <a:srgbClr val="B05A2E"/>
+                          </a:solidFill>
+                          <a:latin typeface="맑은 고딕" pitchFamily="34" charset="0"/>
+                          <a:ea typeface="맑은 고딕" pitchFamily="34" charset="-122"/>
+                          <a:cs typeface="맑은 고딕" pitchFamily="34" charset="-120"/>
+                        </a:rPr>
+                        <a:t>-</a:t>
+                      </a:r>
+                      <a:endParaRPr lang="en-US" sz="850" dirty="0">
+                        <a:latin typeface="맑은 고딕" charset="0"/>
+                        <a:ea typeface="맑은 고딕" charset="0"/>
+                        <a:cs typeface="맑은 고딕" charset="0"/>
+                      </a:endParaRPr>
+                    </a:p>
+                  </a:txBody>
+                  <a:tcPr marL="91440" marR="91440" marT="45720" marB="45720" anchor="ctr">
+                    <a:lnL w="12700" cap="flat" cmpd="sng" algn="ctr">
+                      <a:solidFill>
+                        <a:srgbClr val="CBD5E0"/>
+                      </a:solidFill>
+                      <a:prstDash val="solid"/>
+                      <a:round/>
+                      <a:headEnd type="none" w="med" len="med"/>
+                      <a:tailEnd type="none" w="med" len="med"/>
+                    </a:lnL>
+                    <a:lnR w="12700" cap="flat" cmpd="sng" algn="ctr">
+                      <a:solidFill>
+                        <a:srgbClr val="CBD5E0"/>
+                      </a:solidFill>
+                      <a:prstDash val="solid"/>
+                      <a:round/>
+                      <a:headEnd type="none" w="med" len="med"/>
+                      <a:tailEnd type="none" w="med" len="med"/>
+                    </a:lnR>
+                    <a:lnT w="12700" cap="flat" cmpd="sng" algn="ctr">
+                      <a:solidFill>
+                        <a:srgbClr val="CBD5E0"/>
+                      </a:solidFill>
+                      <a:prstDash val="solid"/>
+                      <a:round/>
+                      <a:headEnd type="none" w="med" len="med"/>
+                      <a:tailEnd type="none" w="med" len="med"/>
+                    </a:lnT>
+                    <a:lnB w="12700" cap="flat" cmpd="sng" algn="ctr">
+                      <a:solidFill>
+                        <a:srgbClr val="CBD5E0"/>
+                      </a:solidFill>
+                      <a:prstDash val="solid"/>
+                      <a:round/>
+                      <a:headEnd type="none" w="med" len="med"/>
+                      <a:tailEnd type="none" w="med" len="med"/>
+                    </a:lnB>
+                    <a:solidFill>
+                      <a:srgbClr val="FBEFE8"/>
+                    </a:solidFill>
+                  </a:tcPr>
+                </a:tc>
+                <a:tc>
+                  <a:txBody>
+                    <a:bodyPr/>
+                    <a:lstStyle/>
+                    <a:p>
+                      <a:pPr algn="ctr" indent="0" marL="0">
+                        <a:buNone/>
+                      </a:pPr>
+                      <a:r>
+                        <a:rPr lang="en-US" sz="850" b="1" dirty="0">
+                          <a:solidFill>
+                            <a:srgbClr val="B05A2E"/>
+                          </a:solidFill>
+                          <a:latin typeface="맑은 고딕" pitchFamily="34" charset="0"/>
+                          <a:ea typeface="맑은 고딕" pitchFamily="34" charset="-122"/>
+                          <a:cs typeface="맑은 고딕" pitchFamily="34" charset="-120"/>
+                        </a:rPr>
+                        <a:t>공실</a:t>
+                      </a:r>
+                      <a:endParaRPr lang="en-US" sz="850" dirty="0">
+                        <a:latin typeface="맑은 고딕" charset="0"/>
+                        <a:ea typeface="맑은 고딕" charset="0"/>
+                        <a:cs typeface="맑은 고딕" charset="0"/>
+                      </a:endParaRPr>
+                    </a:p>
+                  </a:txBody>
+                  <a:tcPr marL="91440" marR="91440" marT="45720" marB="45720" anchor="ctr">
+                    <a:lnL w="12700" cap="flat" cmpd="sng" algn="ctr">
+                      <a:solidFill>
+                        <a:srgbClr val="CBD5E0"/>
+                      </a:solidFill>
+                      <a:prstDash val="solid"/>
+                      <a:round/>
+                      <a:headEnd type="none" w="med" len="med"/>
+                      <a:tailEnd type="none" w="med" len="med"/>
+                    </a:lnL>
+                    <a:lnR w="12700" cap="flat" cmpd="sng" algn="ctr">
+                      <a:solidFill>
+                        <a:srgbClr val="CBD5E0"/>
+                      </a:solidFill>
+                      <a:prstDash val="solid"/>
+                      <a:round/>
+                      <a:headEnd type="none" w="med" len="med"/>
+                      <a:tailEnd type="none" w="med" len="med"/>
+                    </a:lnR>
+                    <a:lnT w="12700" cap="flat" cmpd="sng" algn="ctr">
+                      <a:solidFill>
+                        <a:srgbClr val="CBD5E0"/>
+                      </a:solidFill>
+                      <a:prstDash val="solid"/>
+                      <a:round/>
+                      <a:headEnd type="none" w="med" len="med"/>
+                      <a:tailEnd type="none" w="med" len="med"/>
+                    </a:lnT>
+                    <a:lnB w="12700" cap="flat" cmpd="sng" algn="ctr">
+                      <a:solidFill>
+                        <a:srgbClr val="CBD5E0"/>
+                      </a:solidFill>
+                      <a:prstDash val="solid"/>
+                      <a:round/>
+                      <a:headEnd type="none" w="med" len="med"/>
+                      <a:tailEnd type="none" w="med" len="med"/>
+                    </a:lnB>
+                    <a:solidFill>
+                      <a:srgbClr val="FBEFE8"/>
+                    </a:solidFill>
+                  </a:tcPr>
+                </a:tc>
+              </a:tr>
+              <a:tr h="320040">
+                <a:tc>
+                  <a:txBody>
+                    <a:bodyPr/>
+                    <a:lstStyle/>
+                    <a:p>
+                      <a:pPr algn="ctr" indent="0" marL="0">
+                        <a:buNone/>
+                      </a:pPr>
+                      <a:r>
+                        <a:rPr lang="en-US" sz="850" b="1" dirty="0">
+                          <a:solidFill>
+                            <a:srgbClr val="B05A2E"/>
+                          </a:solidFill>
+                          <a:latin typeface="맑은 고딕" pitchFamily="34" charset="0"/>
+                          <a:ea typeface="맑은 고딕" pitchFamily="34" charset="-122"/>
+                          <a:cs typeface="맑은 고딕" pitchFamily="34" charset="-120"/>
+                        </a:rPr>
+                        <a:t>5F</a:t>
+                      </a:r>
+                      <a:endParaRPr lang="en-US" sz="850" dirty="0">
+                        <a:latin typeface="맑은 고딕" charset="0"/>
+                        <a:ea typeface="맑은 고딕" charset="0"/>
+                        <a:cs typeface="맑은 고딕" charset="0"/>
+                      </a:endParaRPr>
+                    </a:p>
+                  </a:txBody>
+                  <a:tcPr marL="91440" marR="91440" marT="45720" marB="45720" anchor="ctr">
+                    <a:lnL w="12700" cap="flat" cmpd="sng" algn="ctr">
+                      <a:solidFill>
+                        <a:srgbClr val="CBD5E0"/>
+                      </a:solidFill>
+                      <a:prstDash val="solid"/>
+                      <a:round/>
+                      <a:headEnd type="none" w="med" len="med"/>
+                      <a:tailEnd type="none" w="med" len="med"/>
+                    </a:lnL>
+                    <a:lnR w="12700" cap="flat" cmpd="sng" algn="ctr">
+                      <a:solidFill>
+                        <a:srgbClr val="CBD5E0"/>
+                      </a:solidFill>
+                      <a:prstDash val="solid"/>
+                      <a:round/>
+                      <a:headEnd type="none" w="med" len="med"/>
+                      <a:tailEnd type="none" w="med" len="med"/>
+                    </a:lnR>
+                    <a:lnT w="12700" cap="flat" cmpd="sng" algn="ctr">
+                      <a:solidFill>
+                        <a:srgbClr val="CBD5E0"/>
+                      </a:solidFill>
+                      <a:prstDash val="solid"/>
+                      <a:round/>
+                      <a:headEnd type="none" w="med" len="med"/>
+                      <a:tailEnd type="none" w="med" len="med"/>
+                    </a:lnT>
+                    <a:lnB w="12700" cap="flat" cmpd="sng" algn="ctr">
+                      <a:solidFill>
+                        <a:srgbClr val="CBD5E0"/>
+                      </a:solidFill>
+                      <a:prstDash val="solid"/>
+                      <a:round/>
+                      <a:headEnd type="none" w="med" len="med"/>
+                      <a:tailEnd type="none" w="med" len="med"/>
+                    </a:lnB>
+                    <a:solidFill>
+                      <a:srgbClr val="FBEFE8"/>
+                    </a:solidFill>
+                  </a:tcPr>
+                </a:tc>
+                <a:tc>
+                  <a:txBody>
+                    <a:bodyPr/>
+                    <a:lstStyle/>
+                    <a:p>
+                      <a:pPr algn="ctr" indent="0" marL="0">
+                        <a:buNone/>
+                      </a:pPr>
+                      <a:r>
+                        <a:rPr lang="en-US" sz="850" b="1" dirty="0">
+                          <a:solidFill>
+                            <a:srgbClr val="B05A2E"/>
+                          </a:solidFill>
+                          <a:latin typeface="맑은 고딕" pitchFamily="34" charset="0"/>
+                          <a:ea typeface="맑은 고딕" pitchFamily="34" charset="-122"/>
+                          <a:cs typeface="맑은 고딕" pitchFamily="34" charset="-120"/>
+                        </a:rPr>
+                        <a:t>-</a:t>
+                      </a:r>
+                      <a:endParaRPr lang="en-US" sz="850" dirty="0">
+                        <a:latin typeface="맑은 고딕" charset="0"/>
+                        <a:ea typeface="맑은 고딕" charset="0"/>
+                        <a:cs typeface="맑은 고딕" charset="0"/>
+                      </a:endParaRPr>
+                    </a:p>
+                  </a:txBody>
+                  <a:tcPr marL="91440" marR="91440" marT="45720" marB="45720" anchor="ctr">
+                    <a:lnL w="12700" cap="flat" cmpd="sng" algn="ctr">
+                      <a:solidFill>
+                        <a:srgbClr val="CBD5E0"/>
+                      </a:solidFill>
+                      <a:prstDash val="solid"/>
+                      <a:round/>
+                      <a:headEnd type="none" w="med" len="med"/>
+                      <a:tailEnd type="none" w="med" len="med"/>
+                    </a:lnL>
+                    <a:lnR w="12700" cap="flat" cmpd="sng" algn="ctr">
+                      <a:solidFill>
+                        <a:srgbClr val="CBD5E0"/>
+                      </a:solidFill>
+                      <a:prstDash val="solid"/>
+                      <a:round/>
+                      <a:headEnd type="none" w="med" len="med"/>
+                      <a:tailEnd type="none" w="med" len="med"/>
+                    </a:lnR>
+                    <a:lnT w="12700" cap="flat" cmpd="sng" algn="ctr">
+                      <a:solidFill>
+                        <a:srgbClr val="CBD5E0"/>
+                      </a:solidFill>
+                      <a:prstDash val="solid"/>
+                      <a:round/>
+                      <a:headEnd type="none" w="med" len="med"/>
+                      <a:tailEnd type="none" w="med" len="med"/>
+                    </a:lnT>
+                    <a:lnB w="12700" cap="flat" cmpd="sng" algn="ctr">
+                      <a:solidFill>
+                        <a:srgbClr val="CBD5E0"/>
+                      </a:solidFill>
+                      <a:prstDash val="solid"/>
+                      <a:round/>
+                      <a:headEnd type="none" w="med" len="med"/>
+                      <a:tailEnd type="none" w="med" len="med"/>
+                    </a:lnB>
+                    <a:solidFill>
+                      <a:srgbClr val="FBEFE8"/>
+                    </a:solidFill>
+                  </a:tcPr>
+                </a:tc>
+                <a:tc>
+                  <a:txBody>
+                    <a:bodyPr/>
+                    <a:lstStyle/>
+                    <a:p>
+                      <a:pPr algn="ctr" indent="0" marL="0">
+                        <a:buNone/>
+                      </a:pPr>
+                      <a:r>
+                        <a:rPr lang="en-US" sz="850" b="1" dirty="0">
+                          <a:solidFill>
+                            <a:srgbClr val="B05A2E"/>
+                          </a:solidFill>
+                          <a:latin typeface="맑은 고딕" pitchFamily="34" charset="0"/>
+                          <a:ea typeface="맑은 고딕" pitchFamily="34" charset="-122"/>
+                          <a:cs typeface="맑은 고딕" pitchFamily="34" charset="-120"/>
+                        </a:rPr>
+                        <a:t>공실</a:t>
+                      </a:r>
+                      <a:endParaRPr lang="en-US" sz="850" dirty="0">
+                        <a:latin typeface="맑은 고딕" charset="0"/>
+                        <a:ea typeface="맑은 고딕" charset="0"/>
+                        <a:cs typeface="맑은 고딕" charset="0"/>
+                      </a:endParaRPr>
+                    </a:p>
+                  </a:txBody>
+                  <a:tcPr marL="91440" marR="91440" marT="45720" marB="45720" anchor="ctr">
+                    <a:lnL w="12700" cap="flat" cmpd="sng" algn="ctr">
+                      <a:solidFill>
+                        <a:srgbClr val="CBD5E0"/>
+                      </a:solidFill>
+                      <a:prstDash val="solid"/>
+                      <a:round/>
+                      <a:headEnd type="none" w="med" len="med"/>
+                      <a:tailEnd type="none" w="med" len="med"/>
+                    </a:lnL>
+                    <a:lnR w="12700" cap="flat" cmpd="sng" algn="ctr">
+                      <a:solidFill>
+                        <a:srgbClr val="CBD5E0"/>
+                      </a:solidFill>
+                      <a:prstDash val="solid"/>
+                      <a:round/>
+                      <a:headEnd type="none" w="med" len="med"/>
+                      <a:tailEnd type="none" w="med" len="med"/>
+                    </a:lnR>
+                    <a:lnT w="12700" cap="flat" cmpd="sng" algn="ctr">
+                      <a:solidFill>
+                        <a:srgbClr val="CBD5E0"/>
+                      </a:solidFill>
+                      <a:prstDash val="solid"/>
+                      <a:round/>
+                      <a:headEnd type="none" w="med" len="med"/>
+                      <a:tailEnd type="none" w="med" len="med"/>
+                    </a:lnT>
+                    <a:lnB w="12700" cap="flat" cmpd="sng" algn="ctr">
+                      <a:solidFill>
+                        <a:srgbClr val="CBD5E0"/>
+                      </a:solidFill>
+                      <a:prstDash val="solid"/>
+                      <a:round/>
+                      <a:headEnd type="none" w="med" len="med"/>
+                      <a:tailEnd type="none" w="med" len="med"/>
+                    </a:lnB>
+                    <a:solidFill>
+                      <a:srgbClr val="FBEFE8"/>
+                    </a:solidFill>
+                  </a:tcPr>
+                </a:tc>
+                <a:tc>
+                  <a:txBody>
+                    <a:bodyPr/>
+                    <a:lstStyle/>
+                    <a:p>
+                      <a:pPr algn="ctr" indent="0" marL="0">
+                        <a:buNone/>
+                      </a:pPr>
+                      <a:r>
+                        <a:rPr lang="en-US" sz="850" b="1" dirty="0">
+                          <a:solidFill>
+                            <a:srgbClr val="B05A2E"/>
+                          </a:solidFill>
+                          <a:latin typeface="맑은 고딕" pitchFamily="34" charset="0"/>
+                          <a:ea typeface="맑은 고딕" pitchFamily="34" charset="-122"/>
+                          <a:cs typeface="맑은 고딕" pitchFamily="34" charset="-120"/>
+                        </a:rPr>
+                        <a:t>공실</a:t>
+                      </a:r>
+                      <a:endParaRPr lang="en-US" sz="850" dirty="0">
+                        <a:latin typeface="맑은 고딕" charset="0"/>
+                        <a:ea typeface="맑은 고딕" charset="0"/>
+                        <a:cs typeface="맑은 고딕" charset="0"/>
+                      </a:endParaRPr>
+                    </a:p>
+                  </a:txBody>
+                  <a:tcPr marL="91440" marR="91440" marT="45720" marB="45720" anchor="ctr">
+                    <a:lnL w="12700" cap="flat" cmpd="sng" algn="ctr">
+                      <a:solidFill>
+                        <a:srgbClr val="CBD5E0"/>
+                      </a:solidFill>
+                      <a:prstDash val="solid"/>
+                      <a:round/>
+                      <a:headEnd type="none" w="med" len="med"/>
+                      <a:tailEnd type="none" w="med" len="med"/>
+                    </a:lnL>
+                    <a:lnR w="12700" cap="flat" cmpd="sng" algn="ctr">
+                      <a:solidFill>
+                        <a:srgbClr val="CBD5E0"/>
+                      </a:solidFill>
+                      <a:prstDash val="solid"/>
+                      <a:round/>
+                      <a:headEnd type="none" w="med" len="med"/>
+                      <a:tailEnd type="none" w="med" len="med"/>
+                    </a:lnR>
+                    <a:lnT w="12700" cap="flat" cmpd="sng" algn="ctr">
+                      <a:solidFill>
+                        <a:srgbClr val="CBD5E0"/>
+                      </a:solidFill>
+                      <a:prstDash val="solid"/>
+                      <a:round/>
+                      <a:headEnd type="none" w="med" len="med"/>
+                      <a:tailEnd type="none" w="med" len="med"/>
+                    </a:lnT>
+                    <a:lnB w="12700" cap="flat" cmpd="sng" algn="ctr">
+                      <a:solidFill>
+                        <a:srgbClr val="CBD5E0"/>
+                      </a:solidFill>
+                      <a:prstDash val="solid"/>
+                      <a:round/>
+                      <a:headEnd type="none" w="med" len="med"/>
+                      <a:tailEnd type="none" w="med" len="med"/>
+                    </a:lnB>
+                    <a:solidFill>
+                      <a:srgbClr val="FBEFE8"/>
+                    </a:solidFill>
+                  </a:tcPr>
+                </a:tc>
+                <a:tc>
+                  <a:txBody>
+                    <a:bodyPr/>
+                    <a:lstStyle/>
+                    <a:p>
+                      <a:pPr algn="r" indent="0" marL="0">
+                        <a:buNone/>
+                      </a:pPr>
+                      <a:r>
+                        <a:rPr lang="en-US" sz="850" b="1" dirty="0">
+                          <a:solidFill>
+                            <a:srgbClr val="B05A2E"/>
+                          </a:solidFill>
+                          <a:latin typeface="맑은 고딕" pitchFamily="34" charset="0"/>
+                          <a:ea typeface="맑은 고딕" pitchFamily="34" charset="-122"/>
+                          <a:cs typeface="맑은 고딕" pitchFamily="34" charset="-120"/>
+                        </a:rPr>
+                        <a:t>-</a:t>
+                      </a:r>
+                      <a:endParaRPr lang="en-US" sz="850" dirty="0">
+                        <a:latin typeface="맑은 고딕" charset="0"/>
+                        <a:ea typeface="맑은 고딕" charset="0"/>
+                        <a:cs typeface="맑은 고딕" charset="0"/>
+                      </a:endParaRPr>
+                    </a:p>
+                  </a:txBody>
+                  <a:tcPr marL="91440" marR="91440" marT="45720" marB="45720" anchor="ctr">
+                    <a:lnL w="12700" cap="flat" cmpd="sng" algn="ctr">
+                      <a:solidFill>
+                        <a:srgbClr val="CBD5E0"/>
+                      </a:solidFill>
+                      <a:prstDash val="solid"/>
+                      <a:round/>
+                      <a:headEnd type="none" w="med" len="med"/>
+                      <a:tailEnd type="none" w="med" len="med"/>
+                    </a:lnL>
+                    <a:lnR w="12700" cap="flat" cmpd="sng" algn="ctr">
+                      <a:solidFill>
+                        <a:srgbClr val="CBD5E0"/>
+                      </a:solidFill>
+                      <a:prstDash val="solid"/>
+                      <a:round/>
+                      <a:headEnd type="none" w="med" len="med"/>
+                      <a:tailEnd type="none" w="med" len="med"/>
+                    </a:lnR>
+                    <a:lnT w="12700" cap="flat" cmpd="sng" algn="ctr">
+                      <a:solidFill>
+                        <a:srgbClr val="CBD5E0"/>
+                      </a:solidFill>
+                      <a:prstDash val="solid"/>
+                      <a:round/>
+                      <a:headEnd type="none" w="med" len="med"/>
+                      <a:tailEnd type="none" w="med" len="med"/>
+                    </a:lnT>
+                    <a:lnB w="12700" cap="flat" cmpd="sng" algn="ctr">
+                      <a:solidFill>
+                        <a:srgbClr val="CBD5E0"/>
+                      </a:solidFill>
+                      <a:prstDash val="solid"/>
+                      <a:round/>
+                      <a:headEnd type="none" w="med" len="med"/>
+                      <a:tailEnd type="none" w="med" len="med"/>
+                    </a:lnB>
+                    <a:solidFill>
+                      <a:srgbClr val="FBEFE8"/>
+                    </a:solidFill>
+                  </a:tcPr>
+                </a:tc>
+                <a:tc>
+                  <a:txBody>
+                    <a:bodyPr/>
+                    <a:lstStyle/>
+                    <a:p>
+                      <a:pPr algn="r" indent="0" marL="0">
+                        <a:buNone/>
+                      </a:pPr>
+                      <a:r>
+                        <a:rPr lang="en-US" sz="850" b="1" dirty="0">
+                          <a:solidFill>
+                            <a:srgbClr val="B05A2E"/>
+                          </a:solidFill>
+                          <a:latin typeface="맑은 고딕" pitchFamily="34" charset="0"/>
+                          <a:ea typeface="맑은 고딕" pitchFamily="34" charset="-122"/>
+                          <a:cs typeface="맑은 고딕" pitchFamily="34" charset="-120"/>
+                        </a:rPr>
+                        <a:t>0</a:t>
+                      </a:r>
+                      <a:endParaRPr lang="en-US" sz="850" dirty="0">
+                        <a:latin typeface="맑은 고딕" charset="0"/>
+                        <a:ea typeface="맑은 고딕" charset="0"/>
+                        <a:cs typeface="맑은 고딕" charset="0"/>
+                      </a:endParaRPr>
+                    </a:p>
+                  </a:txBody>
+                  <a:tcPr marL="91440" marR="91440" marT="45720" marB="45720" anchor="ctr">
+                    <a:lnL w="12700" cap="flat" cmpd="sng" algn="ctr">
+                      <a:solidFill>
+                        <a:srgbClr val="CBD5E0"/>
+                      </a:solidFill>
+                      <a:prstDash val="solid"/>
+                      <a:round/>
+                      <a:headEnd type="none" w="med" len="med"/>
+                      <a:tailEnd type="none" w="med" len="med"/>
+                    </a:lnL>
+                    <a:lnR w="12700" cap="flat" cmpd="sng" algn="ctr">
+                      <a:solidFill>
+                        <a:srgbClr val="CBD5E0"/>
+                      </a:solidFill>
+                      <a:prstDash val="solid"/>
+                      <a:round/>
+                      <a:headEnd type="none" w="med" len="med"/>
+                      <a:tailEnd type="none" w="med" len="med"/>
+                    </a:lnR>
+                    <a:lnT w="12700" cap="flat" cmpd="sng" algn="ctr">
+                      <a:solidFill>
+                        <a:srgbClr val="CBD5E0"/>
+                      </a:solidFill>
+                      <a:prstDash val="solid"/>
+                      <a:round/>
+                      <a:headEnd type="none" w="med" len="med"/>
+                      <a:tailEnd type="none" w="med" len="med"/>
+                    </a:lnT>
+                    <a:lnB w="12700" cap="flat" cmpd="sng" algn="ctr">
+                      <a:solidFill>
+                        <a:srgbClr val="CBD5E0"/>
+                      </a:solidFill>
+                      <a:prstDash val="solid"/>
+                      <a:round/>
+                      <a:headEnd type="none" w="med" len="med"/>
+                      <a:tailEnd type="none" w="med" len="med"/>
+                    </a:lnB>
+                    <a:solidFill>
+                      <a:srgbClr val="FBEFE8"/>
+                    </a:solidFill>
+                  </a:tcPr>
+                </a:tc>
+                <a:tc>
+                  <a:txBody>
+                    <a:bodyPr/>
+                    <a:lstStyle/>
+                    <a:p>
+                      <a:pPr algn="r" indent="0" marL="0">
+                        <a:buNone/>
+                      </a:pPr>
+                      <a:r>
+                        <a:rPr lang="en-US" sz="850" b="1" dirty="0">
+                          <a:solidFill>
+                            <a:srgbClr val="B05A2E"/>
+                          </a:solidFill>
+                          <a:latin typeface="맑은 고딕" pitchFamily="34" charset="0"/>
+                          <a:ea typeface="맑은 고딕" pitchFamily="34" charset="-122"/>
+                          <a:cs typeface="맑은 고딕" pitchFamily="34" charset="-120"/>
+                        </a:rPr>
+                        <a:t>0</a:t>
+                      </a:r>
+                      <a:endParaRPr lang="en-US" sz="850" dirty="0">
+                        <a:latin typeface="맑은 고딕" charset="0"/>
+                        <a:ea typeface="맑은 고딕" charset="0"/>
+                        <a:cs typeface="맑은 고딕" charset="0"/>
+                      </a:endParaRPr>
+                    </a:p>
+                  </a:txBody>
+                  <a:tcPr marL="91440" marR="91440" marT="45720" marB="45720" anchor="ctr">
+                    <a:lnL w="12700" cap="flat" cmpd="sng" algn="ctr">
+                      <a:solidFill>
+                        <a:srgbClr val="CBD5E0"/>
+                      </a:solidFill>
+                      <a:prstDash val="solid"/>
+                      <a:round/>
+                      <a:headEnd type="none" w="med" len="med"/>
+                      <a:tailEnd type="none" w="med" len="med"/>
+                    </a:lnL>
+                    <a:lnR w="12700" cap="flat" cmpd="sng" algn="ctr">
+                      <a:solidFill>
+                        <a:srgbClr val="CBD5E0"/>
+                      </a:solidFill>
+                      <a:prstDash val="solid"/>
+                      <a:round/>
+                      <a:headEnd type="none" w="med" len="med"/>
+                      <a:tailEnd type="none" w="med" len="med"/>
+                    </a:lnR>
+                    <a:lnT w="12700" cap="flat" cmpd="sng" algn="ctr">
+                      <a:solidFill>
+                        <a:srgbClr val="CBD5E0"/>
+                      </a:solidFill>
+                      <a:prstDash val="solid"/>
+                      <a:round/>
+                      <a:headEnd type="none" w="med" len="med"/>
+                      <a:tailEnd type="none" w="med" len="med"/>
+                    </a:lnT>
+                    <a:lnB w="12700" cap="flat" cmpd="sng" algn="ctr">
+                      <a:solidFill>
+                        <a:srgbClr val="CBD5E0"/>
+                      </a:solidFill>
+                      <a:prstDash val="solid"/>
+                      <a:round/>
+                      <a:headEnd type="none" w="med" len="med"/>
+                      <a:tailEnd type="none" w="med" len="med"/>
+                    </a:lnB>
+                    <a:solidFill>
+                      <a:srgbClr val="FBEFE8"/>
+                    </a:solidFill>
+                  </a:tcPr>
+                </a:tc>
+                <a:tc>
+                  <a:txBody>
+                    <a:bodyPr/>
+                    <a:lstStyle/>
+                    <a:p>
+                      <a:pPr algn="r" indent="0" marL="0">
+                        <a:buNone/>
+                      </a:pPr>
+                      <a:r>
+                        <a:rPr lang="en-US" sz="850" b="1" dirty="0">
+                          <a:solidFill>
+                            <a:srgbClr val="B05A2E"/>
+                          </a:solidFill>
+                          <a:latin typeface="맑은 고딕" pitchFamily="34" charset="0"/>
+                          <a:ea typeface="맑은 고딕" pitchFamily="34" charset="-122"/>
+                          <a:cs typeface="맑은 고딕" pitchFamily="34" charset="-120"/>
+                        </a:rPr>
+                        <a:t>-</a:t>
+                      </a:r>
+                      <a:endParaRPr lang="en-US" sz="850" dirty="0">
+                        <a:latin typeface="맑은 고딕" charset="0"/>
+                        <a:ea typeface="맑은 고딕" charset="0"/>
+                        <a:cs typeface="맑은 고딕" charset="0"/>
+                      </a:endParaRPr>
+                    </a:p>
+                  </a:txBody>
+                  <a:tcPr marL="91440" marR="91440" marT="45720" marB="45720" anchor="ctr">
+                    <a:lnL w="12700" cap="flat" cmpd="sng" algn="ctr">
+                      <a:solidFill>
+                        <a:srgbClr val="CBD5E0"/>
+                      </a:solidFill>
+                      <a:prstDash val="solid"/>
+                      <a:round/>
+                      <a:headEnd type="none" w="med" len="med"/>
+                      <a:tailEnd type="none" w="med" len="med"/>
+                    </a:lnL>
+                    <a:lnR w="12700" cap="flat" cmpd="sng" algn="ctr">
+                      <a:solidFill>
+                        <a:srgbClr val="CBD5E0"/>
+                      </a:solidFill>
+                      <a:prstDash val="solid"/>
+                      <a:round/>
+                      <a:headEnd type="none" w="med" len="med"/>
+                      <a:tailEnd type="none" w="med" len="med"/>
+                    </a:lnR>
+                    <a:lnT w="12700" cap="flat" cmpd="sng" algn="ctr">
+                      <a:solidFill>
+                        <a:srgbClr val="CBD5E0"/>
+                      </a:solidFill>
+                      <a:prstDash val="solid"/>
+                      <a:round/>
+                      <a:headEnd type="none" w="med" len="med"/>
+                      <a:tailEnd type="none" w="med" len="med"/>
+                    </a:lnT>
+                    <a:lnB w="12700" cap="flat" cmpd="sng" algn="ctr">
+                      <a:solidFill>
+                        <a:srgbClr val="CBD5E0"/>
+                      </a:solidFill>
+                      <a:prstDash val="solid"/>
+                      <a:round/>
+                      <a:headEnd type="none" w="med" len="med"/>
+                      <a:tailEnd type="none" w="med" len="med"/>
+                    </a:lnB>
+                    <a:solidFill>
+                      <a:srgbClr val="FBEFE8"/>
+                    </a:solidFill>
+                  </a:tcPr>
+                </a:tc>
+                <a:tc>
+                  <a:txBody>
+                    <a:bodyPr/>
+                    <a:lstStyle/>
+                    <a:p>
+                      <a:pPr algn="ctr" indent="0" marL="0">
+                        <a:buNone/>
+                      </a:pPr>
+                      <a:r>
+                        <a:rPr lang="en-US" sz="850" b="1" dirty="0">
+                          <a:solidFill>
+                            <a:srgbClr val="B05A2E"/>
+                          </a:solidFill>
+                          <a:latin typeface="맑은 고딕" pitchFamily="34" charset="0"/>
+                          <a:ea typeface="맑은 고딕" pitchFamily="34" charset="-122"/>
+                          <a:cs typeface="맑은 고딕" pitchFamily="34" charset="-120"/>
+                        </a:rPr>
+                        <a:t>-</a:t>
+                      </a:r>
+                      <a:endParaRPr lang="en-US" sz="850" dirty="0">
+                        <a:latin typeface="맑은 고딕" charset="0"/>
+                        <a:ea typeface="맑은 고딕" charset="0"/>
+                        <a:cs typeface="맑은 고딕" charset="0"/>
+                      </a:endParaRPr>
+                    </a:p>
+                  </a:txBody>
+                  <a:tcPr marL="91440" marR="91440" marT="45720" marB="45720" anchor="ctr">
+                    <a:lnL w="12700" cap="flat" cmpd="sng" algn="ctr">
+                      <a:solidFill>
+                        <a:srgbClr val="CBD5E0"/>
+                      </a:solidFill>
+                      <a:prstDash val="solid"/>
+                      <a:round/>
+                      <a:headEnd type="none" w="med" len="med"/>
+                      <a:tailEnd type="none" w="med" len="med"/>
+                    </a:lnL>
+                    <a:lnR w="12700" cap="flat" cmpd="sng" algn="ctr">
+                      <a:solidFill>
+                        <a:srgbClr val="CBD5E0"/>
+                      </a:solidFill>
+                      <a:prstDash val="solid"/>
+                      <a:round/>
+                      <a:headEnd type="none" w="med" len="med"/>
+                      <a:tailEnd type="none" w="med" len="med"/>
+                    </a:lnR>
+                    <a:lnT w="12700" cap="flat" cmpd="sng" algn="ctr">
+                      <a:solidFill>
+                        <a:srgbClr val="CBD5E0"/>
+                      </a:solidFill>
+                      <a:prstDash val="solid"/>
+                      <a:round/>
+                      <a:headEnd type="none" w="med" len="med"/>
+                      <a:tailEnd type="none" w="med" len="med"/>
+                    </a:lnT>
+                    <a:lnB w="12700" cap="flat" cmpd="sng" algn="ctr">
+                      <a:solidFill>
+                        <a:srgbClr val="CBD5E0"/>
+                      </a:solidFill>
+                      <a:prstDash val="solid"/>
+                      <a:round/>
+                      <a:headEnd type="none" w="med" len="med"/>
+                      <a:tailEnd type="none" w="med" len="med"/>
+                    </a:lnB>
+                    <a:solidFill>
+                      <a:srgbClr val="FBEFE8"/>
+                    </a:solidFill>
+                  </a:tcPr>
+                </a:tc>
+                <a:tc>
+                  <a:txBody>
+                    <a:bodyPr/>
+                    <a:lstStyle/>
+                    <a:p>
+                      <a:pPr algn="ctr" indent="0" marL="0">
+                        <a:buNone/>
+                      </a:pPr>
+                      <a:r>
+                        <a:rPr lang="en-US" sz="850" b="1" dirty="0">
+                          <a:solidFill>
+                            <a:srgbClr val="B05A2E"/>
+                          </a:solidFill>
+                          <a:latin typeface="맑은 고딕" pitchFamily="34" charset="0"/>
+                          <a:ea typeface="맑은 고딕" pitchFamily="34" charset="-122"/>
+                          <a:cs typeface="맑은 고딕" pitchFamily="34" charset="-120"/>
+                        </a:rPr>
+                        <a:t>공실</a:t>
+                      </a:r>
+                      <a:endParaRPr lang="en-US" sz="850" dirty="0">
+                        <a:latin typeface="맑은 고딕" charset="0"/>
+                        <a:ea typeface="맑은 고딕" charset="0"/>
+                        <a:cs typeface="맑은 고딕" charset="0"/>
+                      </a:endParaRPr>
+                    </a:p>
+                  </a:txBody>
+                  <a:tcPr marL="91440" marR="91440" marT="45720" marB="45720" anchor="ctr">
+                    <a:lnL w="12700" cap="flat" cmpd="sng" algn="ctr">
+                      <a:solidFill>
+                        <a:srgbClr val="CBD5E0"/>
+                      </a:solidFill>
+                      <a:prstDash val="solid"/>
+                      <a:round/>
+                      <a:headEnd type="none" w="med" len="med"/>
+                      <a:tailEnd type="none" w="med" len="med"/>
+                    </a:lnL>
+                    <a:lnR w="12700" cap="flat" cmpd="sng" algn="ctr">
+                      <a:solidFill>
+                        <a:srgbClr val="CBD5E0"/>
+                      </a:solidFill>
+                      <a:prstDash val="solid"/>
+                      <a:round/>
+                      <a:headEnd type="none" w="med" len="med"/>
+                      <a:tailEnd type="none" w="med" len="med"/>
+                    </a:lnR>
+                    <a:lnT w="12700" cap="flat" cmpd="sng" algn="ctr">
+                      <a:solidFill>
+                        <a:srgbClr val="CBD5E0"/>
+                      </a:solidFill>
+                      <a:prstDash val="solid"/>
+                      <a:round/>
+                      <a:headEnd type="none" w="med" len="med"/>
+                      <a:tailEnd type="none" w="med" len="med"/>
+                    </a:lnT>
+                    <a:lnB w="12700" cap="flat" cmpd="sng" algn="ctr">
+                      <a:solidFill>
+                        <a:srgbClr val="CBD5E0"/>
+                      </a:solidFill>
+                      <a:prstDash val="solid"/>
+                      <a:round/>
+                      <a:headEnd type="none" w="med" len="med"/>
+                      <a:tailEnd type="none" w="med" len="med"/>
+                    </a:lnB>
+                    <a:solidFill>
+                      <a:srgbClr val="FBEFE8"/>
+                    </a:solidFill>
+                  </a:tcPr>
+                </a:tc>
+              </a:tr>
+              <a:tr h="320040">
+                <a:tc>
+                  <a:txBody>
+                    <a:bodyPr/>
+                    <a:lstStyle/>
+                    <a:p>
+                      <a:pPr algn="ctr" indent="0" marL="0">
+                        <a:buNone/>
+                      </a:pPr>
+                      <a:r>
+                        <a:rPr lang="en-US" sz="850" dirty="0">
+                          <a:solidFill>
+                            <a:srgbClr val="2B2B2B"/>
+                          </a:solidFill>
+                          <a:latin typeface="맑은 고딕" pitchFamily="34" charset="0"/>
+                          <a:ea typeface="맑은 고딕" pitchFamily="34" charset="-122"/>
+                          <a:cs typeface="맑은 고딕" pitchFamily="34" charset="-120"/>
+                        </a:rPr>
+                        <a:t>6F</a:t>
                       </a:r>
                       <a:endParaRPr lang="en-US" sz="850" dirty="0">
                         <a:latin typeface="맑은 고딕" charset="0"/>
@@ -12669,7 +13421,7 @@
                           <a:ea typeface="맑은 고딕" pitchFamily="34" charset="-122"/>
                           <a:cs typeface="맑은 고딕" pitchFamily="34" charset="-120"/>
                         </a:rPr>
-                        <a:t>제2종근생(사무소)</a:t>
+                        <a:t>-</a:t>
                       </a:r>
                       <a:endParaRPr lang="en-US" sz="850" dirty="0">
                         <a:latin typeface="맑은 고딕" charset="0"/>
@@ -12737,7 +13489,75 @@
                           <a:ea typeface="맑은 고딕" pitchFamily="34" charset="-122"/>
                           <a:cs typeface="맑은 고딕" pitchFamily="34" charset="-120"/>
                         </a:rPr>
-                        <a:t>일반법인</a:t>
+                        <a:t>사무실</a:t>
+                      </a:r>
+                      <a:endParaRPr lang="en-US" sz="850" dirty="0">
+                        <a:latin typeface="맑은 고딕" charset="0"/>
+                        <a:ea typeface="맑은 고딕" charset="0"/>
+                        <a:cs typeface="맑은 고딕" charset="0"/>
+                      </a:endParaRPr>
+                    </a:p>
+                  </a:txBody>
+                  <a:tcPr marL="91440" marR="91440" marT="45720" marB="45720" anchor="ctr">
+                    <a:lnL w="12700" cap="flat" cmpd="sng" algn="ctr">
+                      <a:solidFill>
+                        <a:srgbClr val="CBD5E0"/>
+                      </a:solidFill>
+                      <a:prstDash val="solid"/>
+                      <a:round/>
+                      <a:headEnd type="none" w="med" len="med"/>
+                      <a:tailEnd type="none" w="med" len="med"/>
+                    </a:lnL>
+                    <a:lnR w="12700" cap="flat" cmpd="sng" algn="ctr">
+                      <a:solidFill>
+                        <a:srgbClr val="CBD5E0"/>
+                      </a:solidFill>
+                      <a:prstDash val="solid"/>
+                      <a:round/>
+                      <a:headEnd type="none" w="med" len="med"/>
+                      <a:tailEnd type="none" w="med" len="med"/>
+                    </a:lnR>
+                    <a:lnT w="12700" cap="flat" cmpd="sng" algn="ctr">
+                      <a:solidFill>
+                        <a:srgbClr val="CBD5E0"/>
+                      </a:solidFill>
+                      <a:prstDash val="solid"/>
+                      <a:round/>
+                      <a:headEnd type="none" w="med" len="med"/>
+                      <a:tailEnd type="none" w="med" len="med"/>
+                    </a:lnT>
+                    <a:lnB w="12700" cap="flat" cmpd="sng" algn="ctr">
+                      <a:solidFill>
+                        <a:srgbClr val="CBD5E0"/>
+                      </a:solidFill>
+                      <a:prstDash val="solid"/>
+                      <a:round/>
+                      <a:headEnd type="none" w="med" len="med"/>
+                      <a:tailEnd type="none" w="med" len="med"/>
+                    </a:lnB>
+                    <a:solidFill>
+                      <a:srgbClr val="FFFFFF"/>
+                    </a:solidFill>
+                  </a:tcPr>
+                </a:tc>
+                <a:tc>
+                  <a:txBody>
+                    <a:bodyPr/>
+                    <a:lstStyle/>
+                    <a:p>
+                      <a:pPr algn="ctr" indent="0" marL="0">
+                        <a:buNone/>
+                      </a:pPr>
+                      <a:r>
+                        <a:rPr lang="en-US" sz="850" dirty="0">
+                          <a:solidFill>
+                            <a:srgbClr val="2B2B2B"/>
+                          </a:solidFill>
+                          <a:latin typeface="맑은 고딕" pitchFamily="34" charset="0"/>
+                          <a:ea typeface="맑은 고딕" pitchFamily="34" charset="-122"/>
+                          <a:cs typeface="맑은 고딕" pitchFamily="34" charset="-120"/>
+                        </a:rPr>
+                        <a:t>사무실</a:t>
                       </a:r>
                       <a:endParaRPr lang="en-US" sz="850" dirty="0">
                         <a:latin typeface="맑은 고딕" charset="0"/>
@@ -12805,7 +13625,7 @@
                           <a:ea typeface="맑은 고딕" pitchFamily="34" charset="-122"/>
                           <a:cs typeface="맑은 고딕" pitchFamily="34" charset="-120"/>
                         </a:rPr>
-                        <a:t>250.0</a:t>
+                        <a:t>-</a:t>
                       </a:r>
                       <a:endParaRPr lang="en-US" sz="850" dirty="0">
                         <a:latin typeface="맑은 고딕" charset="0"/>
@@ -13009,7 +13829,7 @@
                           <a:ea typeface="맑은 고딕" pitchFamily="34" charset="-122"/>
                           <a:cs typeface="맑은 고딕" pitchFamily="34" charset="-120"/>
                         </a:rPr>
-                        <a:t>0</a:t>
+                        <a:t>-</a:t>
                       </a:r>
                       <a:endParaRPr lang="en-US" sz="850" dirty="0">
                         <a:latin typeface="맑은 고딕" charset="0"/>
@@ -13077,7 +13897,7 @@
                           <a:ea typeface="맑은 고딕" pitchFamily="34" charset="-122"/>
                           <a:cs typeface="맑은 고딕" pitchFamily="34" charset="-120"/>
                         </a:rPr>
-                        <a:t>2025</a:t>
+                        <a:t>-</a:t>
                       </a:r>
                       <a:endParaRPr lang="en-US" sz="850" dirty="0">
                         <a:latin typeface="맑은 고딕" charset="0"/>
@@ -13136,1381 +13956,6 @@
                       <a:pPr algn="ctr" indent="0" marL="0">
                         <a:buNone/>
                       </a:pPr>
-                      <a:r>
-                        <a:rPr lang="en-US" sz="850" dirty="0">
-                          <a:solidFill>
-                            <a:srgbClr val="2B2B2B"/>
-                          </a:solidFill>
-                          <a:latin typeface="맑은 고딕" pitchFamily="34" charset="0"/>
-                          <a:ea typeface="맑은 고딕" pitchFamily="34" charset="-122"/>
-                          <a:cs typeface="맑은 고딕" pitchFamily="34" charset="-120"/>
-                        </a:rPr>
-                        <a:t>퇴거협의 가능</a:t>
-                      </a:r>
-                      <a:endParaRPr lang="en-US" sz="850" dirty="0">
-                        <a:latin typeface="맑은 고딕" charset="0"/>
-                        <a:ea typeface="맑은 고딕" charset="0"/>
-                        <a:cs typeface="맑은 고딕" charset="0"/>
-                      </a:endParaRPr>
-                    </a:p>
-                  </a:txBody>
-                  <a:tcPr marL="91440" marR="91440" marT="45720" marB="45720" anchor="ctr">
-                    <a:lnL w="12700" cap="flat" cmpd="sng" algn="ctr">
-                      <a:solidFill>
-                        <a:srgbClr val="CBD5E0"/>
-                      </a:solidFill>
-                      <a:prstDash val="solid"/>
-                      <a:round/>
-                      <a:headEnd type="none" w="med" len="med"/>
-                      <a:tailEnd type="none" w="med" len="med"/>
-                    </a:lnL>
-                    <a:lnR w="12700" cap="flat" cmpd="sng" algn="ctr">
-                      <a:solidFill>
-                        <a:srgbClr val="CBD5E0"/>
-                      </a:solidFill>
-                      <a:prstDash val="solid"/>
-                      <a:round/>
-                      <a:headEnd type="none" w="med" len="med"/>
-                      <a:tailEnd type="none" w="med" len="med"/>
-                    </a:lnR>
-                    <a:lnT w="12700" cap="flat" cmpd="sng" algn="ctr">
-                      <a:solidFill>
-                        <a:srgbClr val="CBD5E0"/>
-                      </a:solidFill>
-                      <a:prstDash val="solid"/>
-                      <a:round/>
-                      <a:headEnd type="none" w="med" len="med"/>
-                      <a:tailEnd type="none" w="med" len="med"/>
-                    </a:lnT>
-                    <a:lnB w="12700" cap="flat" cmpd="sng" algn="ctr">
-                      <a:solidFill>
-                        <a:srgbClr val="CBD5E0"/>
-                      </a:solidFill>
-                      <a:prstDash val="solid"/>
-                      <a:round/>
-                      <a:headEnd type="none" w="med" len="med"/>
-                      <a:tailEnd type="none" w="med" len="med"/>
-                    </a:lnB>
-                    <a:solidFill>
-                      <a:srgbClr val="FFFFFF"/>
-                    </a:solidFill>
-                  </a:tcPr>
-                </a:tc>
-              </a:tr>
-              <a:tr h="320040">
-                <a:tc>
-                  <a:txBody>
-                    <a:bodyPr/>
-                    <a:lstStyle/>
-                    <a:p>
-                      <a:pPr algn="ctr" indent="0" marL="0">
-                        <a:buNone/>
-                      </a:pPr>
-                      <a:r>
-                        <a:rPr lang="en-US" sz="850" b="1" dirty="0">
-                          <a:solidFill>
-                            <a:srgbClr val="B05A2E"/>
-                          </a:solidFill>
-                          <a:latin typeface="맑은 고딕" pitchFamily="34" charset="0"/>
-                          <a:ea typeface="맑은 고딕" pitchFamily="34" charset="-122"/>
-                          <a:cs typeface="맑은 고딕" pitchFamily="34" charset="-120"/>
-                        </a:rPr>
-                        <a:t>2F</a:t>
-                      </a:r>
-                      <a:endParaRPr lang="en-US" sz="850" dirty="0">
-                        <a:latin typeface="맑은 고딕" charset="0"/>
-                        <a:ea typeface="맑은 고딕" charset="0"/>
-                        <a:cs typeface="맑은 고딕" charset="0"/>
-                      </a:endParaRPr>
-                    </a:p>
-                  </a:txBody>
-                  <a:tcPr marL="91440" marR="91440" marT="45720" marB="45720" anchor="ctr">
-                    <a:lnL w="12700" cap="flat" cmpd="sng" algn="ctr">
-                      <a:solidFill>
-                        <a:srgbClr val="CBD5E0"/>
-                      </a:solidFill>
-                      <a:prstDash val="solid"/>
-                      <a:round/>
-                      <a:headEnd type="none" w="med" len="med"/>
-                      <a:tailEnd type="none" w="med" len="med"/>
-                    </a:lnL>
-                    <a:lnR w="12700" cap="flat" cmpd="sng" algn="ctr">
-                      <a:solidFill>
-                        <a:srgbClr val="CBD5E0"/>
-                      </a:solidFill>
-                      <a:prstDash val="solid"/>
-                      <a:round/>
-                      <a:headEnd type="none" w="med" len="med"/>
-                      <a:tailEnd type="none" w="med" len="med"/>
-                    </a:lnR>
-                    <a:lnT w="12700" cap="flat" cmpd="sng" algn="ctr">
-                      <a:solidFill>
-                        <a:srgbClr val="CBD5E0"/>
-                      </a:solidFill>
-                      <a:prstDash val="solid"/>
-                      <a:round/>
-                      <a:headEnd type="none" w="med" len="med"/>
-                      <a:tailEnd type="none" w="med" len="med"/>
-                    </a:lnT>
-                    <a:lnB w="12700" cap="flat" cmpd="sng" algn="ctr">
-                      <a:solidFill>
-                        <a:srgbClr val="CBD5E0"/>
-                      </a:solidFill>
-                      <a:prstDash val="solid"/>
-                      <a:round/>
-                      <a:headEnd type="none" w="med" len="med"/>
-                      <a:tailEnd type="none" w="med" len="med"/>
-                    </a:lnB>
-                    <a:solidFill>
-                      <a:srgbClr val="FBEFE8"/>
-                    </a:solidFill>
-                  </a:tcPr>
-                </a:tc>
-                <a:tc>
-                  <a:txBody>
-                    <a:bodyPr/>
-                    <a:lstStyle/>
-                    <a:p>
-                      <a:pPr algn="ctr" indent="0" marL="0">
-                        <a:buNone/>
-                      </a:pPr>
-                      <a:r>
-                        <a:rPr lang="en-US" sz="850" b="1" dirty="0">
-                          <a:solidFill>
-                            <a:srgbClr val="B05A2E"/>
-                          </a:solidFill>
-                          <a:latin typeface="맑은 고딕" pitchFamily="34" charset="0"/>
-                          <a:ea typeface="맑은 고딕" pitchFamily="34" charset="-122"/>
-                          <a:cs typeface="맑은 고딕" pitchFamily="34" charset="-120"/>
-                        </a:rPr>
-                        <a:t>전층</a:t>
-                      </a:r>
-                      <a:endParaRPr lang="en-US" sz="850" dirty="0">
-                        <a:latin typeface="맑은 고딕" charset="0"/>
-                        <a:ea typeface="맑은 고딕" charset="0"/>
-                        <a:cs typeface="맑은 고딕" charset="0"/>
-                      </a:endParaRPr>
-                    </a:p>
-                  </a:txBody>
-                  <a:tcPr marL="91440" marR="91440" marT="45720" marB="45720" anchor="ctr">
-                    <a:lnL w="12700" cap="flat" cmpd="sng" algn="ctr">
-                      <a:solidFill>
-                        <a:srgbClr val="CBD5E0"/>
-                      </a:solidFill>
-                      <a:prstDash val="solid"/>
-                      <a:round/>
-                      <a:headEnd type="none" w="med" len="med"/>
-                      <a:tailEnd type="none" w="med" len="med"/>
-                    </a:lnL>
-                    <a:lnR w="12700" cap="flat" cmpd="sng" algn="ctr">
-                      <a:solidFill>
-                        <a:srgbClr val="CBD5E0"/>
-                      </a:solidFill>
-                      <a:prstDash val="solid"/>
-                      <a:round/>
-                      <a:headEnd type="none" w="med" len="med"/>
-                      <a:tailEnd type="none" w="med" len="med"/>
-                    </a:lnR>
-                    <a:lnT w="12700" cap="flat" cmpd="sng" algn="ctr">
-                      <a:solidFill>
-                        <a:srgbClr val="CBD5E0"/>
-                      </a:solidFill>
-                      <a:prstDash val="solid"/>
-                      <a:round/>
-                      <a:headEnd type="none" w="med" len="med"/>
-                      <a:tailEnd type="none" w="med" len="med"/>
-                    </a:lnT>
-                    <a:lnB w="12700" cap="flat" cmpd="sng" algn="ctr">
-                      <a:solidFill>
-                        <a:srgbClr val="CBD5E0"/>
-                      </a:solidFill>
-                      <a:prstDash val="solid"/>
-                      <a:round/>
-                      <a:headEnd type="none" w="med" len="med"/>
-                      <a:tailEnd type="none" w="med" len="med"/>
-                    </a:lnB>
-                    <a:solidFill>
-                      <a:srgbClr val="FBEFE8"/>
-                    </a:solidFill>
-                  </a:tcPr>
-                </a:tc>
-                <a:tc>
-                  <a:txBody>
-                    <a:bodyPr/>
-                    <a:lstStyle/>
-                    <a:p>
-                      <a:pPr algn="ctr" indent="0" marL="0">
-                        <a:buNone/>
-                      </a:pPr>
-                      <a:r>
-                        <a:rPr lang="en-US" sz="850" b="1" dirty="0">
-                          <a:solidFill>
-                            <a:srgbClr val="B05A2E"/>
-                          </a:solidFill>
-                          <a:latin typeface="맑은 고딕" pitchFamily="34" charset="0"/>
-                          <a:ea typeface="맑은 고딕" pitchFamily="34" charset="-122"/>
-                          <a:cs typeface="맑은 고딕" pitchFamily="34" charset="-120"/>
-                        </a:rPr>
-                        <a:t>제2종근생(사무소)</a:t>
-                      </a:r>
-                      <a:endParaRPr lang="en-US" sz="850" dirty="0">
-                        <a:latin typeface="맑은 고딕" charset="0"/>
-                        <a:ea typeface="맑은 고딕" charset="0"/>
-                        <a:cs typeface="맑은 고딕" charset="0"/>
-                      </a:endParaRPr>
-                    </a:p>
-                  </a:txBody>
-                  <a:tcPr marL="91440" marR="91440" marT="45720" marB="45720" anchor="ctr">
-                    <a:lnL w="12700" cap="flat" cmpd="sng" algn="ctr">
-                      <a:solidFill>
-                        <a:srgbClr val="CBD5E0"/>
-                      </a:solidFill>
-                      <a:prstDash val="solid"/>
-                      <a:round/>
-                      <a:headEnd type="none" w="med" len="med"/>
-                      <a:tailEnd type="none" w="med" len="med"/>
-                    </a:lnL>
-                    <a:lnR w="12700" cap="flat" cmpd="sng" algn="ctr">
-                      <a:solidFill>
-                        <a:srgbClr val="CBD5E0"/>
-                      </a:solidFill>
-                      <a:prstDash val="solid"/>
-                      <a:round/>
-                      <a:headEnd type="none" w="med" len="med"/>
-                      <a:tailEnd type="none" w="med" len="med"/>
-                    </a:lnR>
-                    <a:lnT w="12700" cap="flat" cmpd="sng" algn="ctr">
-                      <a:solidFill>
-                        <a:srgbClr val="CBD5E0"/>
-                      </a:solidFill>
-                      <a:prstDash val="solid"/>
-                      <a:round/>
-                      <a:headEnd type="none" w="med" len="med"/>
-                      <a:tailEnd type="none" w="med" len="med"/>
-                    </a:lnT>
-                    <a:lnB w="12700" cap="flat" cmpd="sng" algn="ctr">
-                      <a:solidFill>
-                        <a:srgbClr val="CBD5E0"/>
-                      </a:solidFill>
-                      <a:prstDash val="solid"/>
-                      <a:round/>
-                      <a:headEnd type="none" w="med" len="med"/>
-                      <a:tailEnd type="none" w="med" len="med"/>
-                    </a:lnB>
-                    <a:solidFill>
-                      <a:srgbClr val="FBEFE8"/>
-                    </a:solidFill>
-                  </a:tcPr>
-                </a:tc>
-                <a:tc>
-                  <a:txBody>
-                    <a:bodyPr/>
-                    <a:lstStyle/>
-                    <a:p>
-                      <a:pPr algn="ctr" indent="0" marL="0">
-                        <a:buNone/>
-                      </a:pPr>
-                      <a:r>
-                        <a:rPr lang="en-US" sz="850" b="1" dirty="0">
-                          <a:solidFill>
-                            <a:srgbClr val="B05A2E"/>
-                          </a:solidFill>
-                          <a:latin typeface="맑은 고딕" pitchFamily="34" charset="0"/>
-                          <a:ea typeface="맑은 고딕" pitchFamily="34" charset="-122"/>
-                          <a:cs typeface="맑은 고딕" pitchFamily="34" charset="-120"/>
-                        </a:rPr>
-                        <a:t>공실</a:t>
-                      </a:r>
-                      <a:endParaRPr lang="en-US" sz="850" dirty="0">
-                        <a:latin typeface="맑은 고딕" charset="0"/>
-                        <a:ea typeface="맑은 고딕" charset="0"/>
-                        <a:cs typeface="맑은 고딕" charset="0"/>
-                      </a:endParaRPr>
-                    </a:p>
-                  </a:txBody>
-                  <a:tcPr marL="91440" marR="91440" marT="45720" marB="45720" anchor="ctr">
-                    <a:lnL w="12700" cap="flat" cmpd="sng" algn="ctr">
-                      <a:solidFill>
-                        <a:srgbClr val="CBD5E0"/>
-                      </a:solidFill>
-                      <a:prstDash val="solid"/>
-                      <a:round/>
-                      <a:headEnd type="none" w="med" len="med"/>
-                      <a:tailEnd type="none" w="med" len="med"/>
-                    </a:lnL>
-                    <a:lnR w="12700" cap="flat" cmpd="sng" algn="ctr">
-                      <a:solidFill>
-                        <a:srgbClr val="CBD5E0"/>
-                      </a:solidFill>
-                      <a:prstDash val="solid"/>
-                      <a:round/>
-                      <a:headEnd type="none" w="med" len="med"/>
-                      <a:tailEnd type="none" w="med" len="med"/>
-                    </a:lnR>
-                    <a:lnT w="12700" cap="flat" cmpd="sng" algn="ctr">
-                      <a:solidFill>
-                        <a:srgbClr val="CBD5E0"/>
-                      </a:solidFill>
-                      <a:prstDash val="solid"/>
-                      <a:round/>
-                      <a:headEnd type="none" w="med" len="med"/>
-                      <a:tailEnd type="none" w="med" len="med"/>
-                    </a:lnT>
-                    <a:lnB w="12700" cap="flat" cmpd="sng" algn="ctr">
-                      <a:solidFill>
-                        <a:srgbClr val="CBD5E0"/>
-                      </a:solidFill>
-                      <a:prstDash val="solid"/>
-                      <a:round/>
-                      <a:headEnd type="none" w="med" len="med"/>
-                      <a:tailEnd type="none" w="med" len="med"/>
-                    </a:lnB>
-                    <a:solidFill>
-                      <a:srgbClr val="FBEFE8"/>
-                    </a:solidFill>
-                  </a:tcPr>
-                </a:tc>
-                <a:tc>
-                  <a:txBody>
-                    <a:bodyPr/>
-                    <a:lstStyle/>
-                    <a:p>
-                      <a:pPr algn="r" indent="0" marL="0">
-                        <a:buNone/>
-                      </a:pPr>
-                      <a:r>
-                        <a:rPr lang="en-US" sz="850" b="1" dirty="0">
-                          <a:solidFill>
-                            <a:srgbClr val="B05A2E"/>
-                          </a:solidFill>
-                          <a:latin typeface="맑은 고딕" pitchFamily="34" charset="0"/>
-                          <a:ea typeface="맑은 고딕" pitchFamily="34" charset="-122"/>
-                          <a:cs typeface="맑은 고딕" pitchFamily="34" charset="-120"/>
-                        </a:rPr>
-                        <a:t>250.0</a:t>
-                      </a:r>
-                      <a:endParaRPr lang="en-US" sz="850" dirty="0">
-                        <a:latin typeface="맑은 고딕" charset="0"/>
-                        <a:ea typeface="맑은 고딕" charset="0"/>
-                        <a:cs typeface="맑은 고딕" charset="0"/>
-                      </a:endParaRPr>
-                    </a:p>
-                  </a:txBody>
-                  <a:tcPr marL="91440" marR="91440" marT="45720" marB="45720" anchor="ctr">
-                    <a:lnL w="12700" cap="flat" cmpd="sng" algn="ctr">
-                      <a:solidFill>
-                        <a:srgbClr val="CBD5E0"/>
-                      </a:solidFill>
-                      <a:prstDash val="solid"/>
-                      <a:round/>
-                      <a:headEnd type="none" w="med" len="med"/>
-                      <a:tailEnd type="none" w="med" len="med"/>
-                    </a:lnL>
-                    <a:lnR w="12700" cap="flat" cmpd="sng" algn="ctr">
-                      <a:solidFill>
-                        <a:srgbClr val="CBD5E0"/>
-                      </a:solidFill>
-                      <a:prstDash val="solid"/>
-                      <a:round/>
-                      <a:headEnd type="none" w="med" len="med"/>
-                      <a:tailEnd type="none" w="med" len="med"/>
-                    </a:lnR>
-                    <a:lnT w="12700" cap="flat" cmpd="sng" algn="ctr">
-                      <a:solidFill>
-                        <a:srgbClr val="CBD5E0"/>
-                      </a:solidFill>
-                      <a:prstDash val="solid"/>
-                      <a:round/>
-                      <a:headEnd type="none" w="med" len="med"/>
-                      <a:tailEnd type="none" w="med" len="med"/>
-                    </a:lnT>
-                    <a:lnB w="12700" cap="flat" cmpd="sng" algn="ctr">
-                      <a:solidFill>
-                        <a:srgbClr val="CBD5E0"/>
-                      </a:solidFill>
-                      <a:prstDash val="solid"/>
-                      <a:round/>
-                      <a:headEnd type="none" w="med" len="med"/>
-                      <a:tailEnd type="none" w="med" len="med"/>
-                    </a:lnB>
-                    <a:solidFill>
-                      <a:srgbClr val="FBEFE8"/>
-                    </a:solidFill>
-                  </a:tcPr>
-                </a:tc>
-                <a:tc>
-                  <a:txBody>
-                    <a:bodyPr/>
-                    <a:lstStyle/>
-                    <a:p>
-                      <a:pPr algn="r" indent="0" marL="0">
-                        <a:buNone/>
-                      </a:pPr>
-                      <a:r>
-                        <a:rPr lang="en-US" sz="850" b="1" dirty="0">
-                          <a:solidFill>
-                            <a:srgbClr val="B05A2E"/>
-                          </a:solidFill>
-                          <a:latin typeface="맑은 고딕" pitchFamily="34" charset="0"/>
-                          <a:ea typeface="맑은 고딕" pitchFamily="34" charset="-122"/>
-                          <a:cs typeface="맑은 고딕" pitchFamily="34" charset="-120"/>
-                        </a:rPr>
-                        <a:t>0</a:t>
-                      </a:r>
-                      <a:endParaRPr lang="en-US" sz="850" dirty="0">
-                        <a:latin typeface="맑은 고딕" charset="0"/>
-                        <a:ea typeface="맑은 고딕" charset="0"/>
-                        <a:cs typeface="맑은 고딕" charset="0"/>
-                      </a:endParaRPr>
-                    </a:p>
-                  </a:txBody>
-                  <a:tcPr marL="91440" marR="91440" marT="45720" marB="45720" anchor="ctr">
-                    <a:lnL w="12700" cap="flat" cmpd="sng" algn="ctr">
-                      <a:solidFill>
-                        <a:srgbClr val="CBD5E0"/>
-                      </a:solidFill>
-                      <a:prstDash val="solid"/>
-                      <a:round/>
-                      <a:headEnd type="none" w="med" len="med"/>
-                      <a:tailEnd type="none" w="med" len="med"/>
-                    </a:lnL>
-                    <a:lnR w="12700" cap="flat" cmpd="sng" algn="ctr">
-                      <a:solidFill>
-                        <a:srgbClr val="CBD5E0"/>
-                      </a:solidFill>
-                      <a:prstDash val="solid"/>
-                      <a:round/>
-                      <a:headEnd type="none" w="med" len="med"/>
-                      <a:tailEnd type="none" w="med" len="med"/>
-                    </a:lnR>
-                    <a:lnT w="12700" cap="flat" cmpd="sng" algn="ctr">
-                      <a:solidFill>
-                        <a:srgbClr val="CBD5E0"/>
-                      </a:solidFill>
-                      <a:prstDash val="solid"/>
-                      <a:round/>
-                      <a:headEnd type="none" w="med" len="med"/>
-                      <a:tailEnd type="none" w="med" len="med"/>
-                    </a:lnT>
-                    <a:lnB w="12700" cap="flat" cmpd="sng" algn="ctr">
-                      <a:solidFill>
-                        <a:srgbClr val="CBD5E0"/>
-                      </a:solidFill>
-                      <a:prstDash val="solid"/>
-                      <a:round/>
-                      <a:headEnd type="none" w="med" len="med"/>
-                      <a:tailEnd type="none" w="med" len="med"/>
-                    </a:lnB>
-                    <a:solidFill>
-                      <a:srgbClr val="FBEFE8"/>
-                    </a:solidFill>
-                  </a:tcPr>
-                </a:tc>
-                <a:tc>
-                  <a:txBody>
-                    <a:bodyPr/>
-                    <a:lstStyle/>
-                    <a:p>
-                      <a:pPr algn="r" indent="0" marL="0">
-                        <a:buNone/>
-                      </a:pPr>
-                      <a:r>
-                        <a:rPr lang="en-US" sz="850" b="1" dirty="0">
-                          <a:solidFill>
-                            <a:srgbClr val="B05A2E"/>
-                          </a:solidFill>
-                          <a:latin typeface="맑은 고딕" pitchFamily="34" charset="0"/>
-                          <a:ea typeface="맑은 고딕" pitchFamily="34" charset="-122"/>
-                          <a:cs typeface="맑은 고딕" pitchFamily="34" charset="-120"/>
-                        </a:rPr>
-                        <a:t>0</a:t>
-                      </a:r>
-                      <a:endParaRPr lang="en-US" sz="850" dirty="0">
-                        <a:latin typeface="맑은 고딕" charset="0"/>
-                        <a:ea typeface="맑은 고딕" charset="0"/>
-                        <a:cs typeface="맑은 고딕" charset="0"/>
-                      </a:endParaRPr>
-                    </a:p>
-                  </a:txBody>
-                  <a:tcPr marL="91440" marR="91440" marT="45720" marB="45720" anchor="ctr">
-                    <a:lnL w="12700" cap="flat" cmpd="sng" algn="ctr">
-                      <a:solidFill>
-                        <a:srgbClr val="CBD5E0"/>
-                      </a:solidFill>
-                      <a:prstDash val="solid"/>
-                      <a:round/>
-                      <a:headEnd type="none" w="med" len="med"/>
-                      <a:tailEnd type="none" w="med" len="med"/>
-                    </a:lnL>
-                    <a:lnR w="12700" cap="flat" cmpd="sng" algn="ctr">
-                      <a:solidFill>
-                        <a:srgbClr val="CBD5E0"/>
-                      </a:solidFill>
-                      <a:prstDash val="solid"/>
-                      <a:round/>
-                      <a:headEnd type="none" w="med" len="med"/>
-                      <a:tailEnd type="none" w="med" len="med"/>
-                    </a:lnR>
-                    <a:lnT w="12700" cap="flat" cmpd="sng" algn="ctr">
-                      <a:solidFill>
-                        <a:srgbClr val="CBD5E0"/>
-                      </a:solidFill>
-                      <a:prstDash val="solid"/>
-                      <a:round/>
-                      <a:headEnd type="none" w="med" len="med"/>
-                      <a:tailEnd type="none" w="med" len="med"/>
-                    </a:lnT>
-                    <a:lnB w="12700" cap="flat" cmpd="sng" algn="ctr">
-                      <a:solidFill>
-                        <a:srgbClr val="CBD5E0"/>
-                      </a:solidFill>
-                      <a:prstDash val="solid"/>
-                      <a:round/>
-                      <a:headEnd type="none" w="med" len="med"/>
-                      <a:tailEnd type="none" w="med" len="med"/>
-                    </a:lnB>
-                    <a:solidFill>
-                      <a:srgbClr val="FBEFE8"/>
-                    </a:solidFill>
-                  </a:tcPr>
-                </a:tc>
-                <a:tc>
-                  <a:txBody>
-                    <a:bodyPr/>
-                    <a:lstStyle/>
-                    <a:p>
-                      <a:pPr algn="r" indent="0" marL="0">
-                        <a:buNone/>
-                      </a:pPr>
-                      <a:r>
-                        <a:rPr lang="en-US" sz="850" b="1" dirty="0">
-                          <a:solidFill>
-                            <a:srgbClr val="B05A2E"/>
-                          </a:solidFill>
-                          <a:latin typeface="맑은 고딕" pitchFamily="34" charset="0"/>
-                          <a:ea typeface="맑은 고딕" pitchFamily="34" charset="-122"/>
-                          <a:cs typeface="맑은 고딕" pitchFamily="34" charset="-120"/>
-                        </a:rPr>
-                        <a:t>0</a:t>
-                      </a:r>
-                      <a:endParaRPr lang="en-US" sz="850" dirty="0">
-                        <a:latin typeface="맑은 고딕" charset="0"/>
-                        <a:ea typeface="맑은 고딕" charset="0"/>
-                        <a:cs typeface="맑은 고딕" charset="0"/>
-                      </a:endParaRPr>
-                    </a:p>
-                  </a:txBody>
-                  <a:tcPr marL="91440" marR="91440" marT="45720" marB="45720" anchor="ctr">
-                    <a:lnL w="12700" cap="flat" cmpd="sng" algn="ctr">
-                      <a:solidFill>
-                        <a:srgbClr val="CBD5E0"/>
-                      </a:solidFill>
-                      <a:prstDash val="solid"/>
-                      <a:round/>
-                      <a:headEnd type="none" w="med" len="med"/>
-                      <a:tailEnd type="none" w="med" len="med"/>
-                    </a:lnL>
-                    <a:lnR w="12700" cap="flat" cmpd="sng" algn="ctr">
-                      <a:solidFill>
-                        <a:srgbClr val="CBD5E0"/>
-                      </a:solidFill>
-                      <a:prstDash val="solid"/>
-                      <a:round/>
-                      <a:headEnd type="none" w="med" len="med"/>
-                      <a:tailEnd type="none" w="med" len="med"/>
-                    </a:lnR>
-                    <a:lnT w="12700" cap="flat" cmpd="sng" algn="ctr">
-                      <a:solidFill>
-                        <a:srgbClr val="CBD5E0"/>
-                      </a:solidFill>
-                      <a:prstDash val="solid"/>
-                      <a:round/>
-                      <a:headEnd type="none" w="med" len="med"/>
-                      <a:tailEnd type="none" w="med" len="med"/>
-                    </a:lnT>
-                    <a:lnB w="12700" cap="flat" cmpd="sng" algn="ctr">
-                      <a:solidFill>
-                        <a:srgbClr val="CBD5E0"/>
-                      </a:solidFill>
-                      <a:prstDash val="solid"/>
-                      <a:round/>
-                      <a:headEnd type="none" w="med" len="med"/>
-                      <a:tailEnd type="none" w="med" len="med"/>
-                    </a:lnB>
-                    <a:solidFill>
-                      <a:srgbClr val="FBEFE8"/>
-                    </a:solidFill>
-                  </a:tcPr>
-                </a:tc>
-                <a:tc>
-                  <a:txBody>
-                    <a:bodyPr/>
-                    <a:lstStyle/>
-                    <a:p>
-                      <a:pPr algn="ctr" indent="0" marL="0">
-                        <a:buNone/>
-                      </a:pPr>
-                      <a:r>
-                        <a:rPr lang="en-US" sz="850" b="1" dirty="0">
-                          <a:solidFill>
-                            <a:srgbClr val="B05A2E"/>
-                          </a:solidFill>
-                          <a:latin typeface="맑은 고딕" pitchFamily="34" charset="0"/>
-                          <a:ea typeface="맑은 고딕" pitchFamily="34" charset="-122"/>
-                          <a:cs typeface="맑은 고딕" pitchFamily="34" charset="-120"/>
-                        </a:rPr>
-                        <a:t>-</a:t>
-                      </a:r>
-                      <a:endParaRPr lang="en-US" sz="850" dirty="0">
-                        <a:latin typeface="맑은 고딕" charset="0"/>
-                        <a:ea typeface="맑은 고딕" charset="0"/>
-                        <a:cs typeface="맑은 고딕" charset="0"/>
-                      </a:endParaRPr>
-                    </a:p>
-                  </a:txBody>
-                  <a:tcPr marL="91440" marR="91440" marT="45720" marB="45720" anchor="ctr">
-                    <a:lnL w="12700" cap="flat" cmpd="sng" algn="ctr">
-                      <a:solidFill>
-                        <a:srgbClr val="CBD5E0"/>
-                      </a:solidFill>
-                      <a:prstDash val="solid"/>
-                      <a:round/>
-                      <a:headEnd type="none" w="med" len="med"/>
-                      <a:tailEnd type="none" w="med" len="med"/>
-                    </a:lnL>
-                    <a:lnR w="12700" cap="flat" cmpd="sng" algn="ctr">
-                      <a:solidFill>
-                        <a:srgbClr val="CBD5E0"/>
-                      </a:solidFill>
-                      <a:prstDash val="solid"/>
-                      <a:round/>
-                      <a:headEnd type="none" w="med" len="med"/>
-                      <a:tailEnd type="none" w="med" len="med"/>
-                    </a:lnR>
-                    <a:lnT w="12700" cap="flat" cmpd="sng" algn="ctr">
-                      <a:solidFill>
-                        <a:srgbClr val="CBD5E0"/>
-                      </a:solidFill>
-                      <a:prstDash val="solid"/>
-                      <a:round/>
-                      <a:headEnd type="none" w="med" len="med"/>
-                      <a:tailEnd type="none" w="med" len="med"/>
-                    </a:lnT>
-                    <a:lnB w="12700" cap="flat" cmpd="sng" algn="ctr">
-                      <a:solidFill>
-                        <a:srgbClr val="CBD5E0"/>
-                      </a:solidFill>
-                      <a:prstDash val="solid"/>
-                      <a:round/>
-                      <a:headEnd type="none" w="med" len="med"/>
-                      <a:tailEnd type="none" w="med" len="med"/>
-                    </a:lnB>
-                    <a:solidFill>
-                      <a:srgbClr val="FBEFE8"/>
-                    </a:solidFill>
-                  </a:tcPr>
-                </a:tc>
-                <a:tc>
-                  <a:txBody>
-                    <a:bodyPr/>
-                    <a:lstStyle/>
-                    <a:p>
-                      <a:pPr algn="ctr" indent="0" marL="0">
-                        <a:buNone/>
-                      </a:pPr>
-                      <a:r>
-                        <a:rPr lang="en-US" sz="850" b="1" dirty="0">
-                          <a:solidFill>
-                            <a:srgbClr val="B05A2E"/>
-                          </a:solidFill>
-                          <a:latin typeface="맑은 고딕" pitchFamily="34" charset="0"/>
-                          <a:ea typeface="맑은 고딕" pitchFamily="34" charset="-122"/>
-                          <a:cs typeface="맑은 고딕" pitchFamily="34" charset="-120"/>
-                        </a:rPr>
-                        <a:t>즉시 입주</a:t>
-                      </a:r>
-                      <a:endParaRPr lang="en-US" sz="850" dirty="0">
-                        <a:latin typeface="맑은 고딕" charset="0"/>
-                        <a:ea typeface="맑은 고딕" charset="0"/>
-                        <a:cs typeface="맑은 고딕" charset="0"/>
-                      </a:endParaRPr>
-                    </a:p>
-                  </a:txBody>
-                  <a:tcPr marL="91440" marR="91440" marT="45720" marB="45720" anchor="ctr">
-                    <a:lnL w="12700" cap="flat" cmpd="sng" algn="ctr">
-                      <a:solidFill>
-                        <a:srgbClr val="CBD5E0"/>
-                      </a:solidFill>
-                      <a:prstDash val="solid"/>
-                      <a:round/>
-                      <a:headEnd type="none" w="med" len="med"/>
-                      <a:tailEnd type="none" w="med" len="med"/>
-                    </a:lnL>
-                    <a:lnR w="12700" cap="flat" cmpd="sng" algn="ctr">
-                      <a:solidFill>
-                        <a:srgbClr val="CBD5E0"/>
-                      </a:solidFill>
-                      <a:prstDash val="solid"/>
-                      <a:round/>
-                      <a:headEnd type="none" w="med" len="med"/>
-                      <a:tailEnd type="none" w="med" len="med"/>
-                    </a:lnR>
-                    <a:lnT w="12700" cap="flat" cmpd="sng" algn="ctr">
-                      <a:solidFill>
-                        <a:srgbClr val="CBD5E0"/>
-                      </a:solidFill>
-                      <a:prstDash val="solid"/>
-                      <a:round/>
-                      <a:headEnd type="none" w="med" len="med"/>
-                      <a:tailEnd type="none" w="med" len="med"/>
-                    </a:lnT>
-                    <a:lnB w="12700" cap="flat" cmpd="sng" algn="ctr">
-                      <a:solidFill>
-                        <a:srgbClr val="CBD5E0"/>
-                      </a:solidFill>
-                      <a:prstDash val="solid"/>
-                      <a:round/>
-                      <a:headEnd type="none" w="med" len="med"/>
-                      <a:tailEnd type="none" w="med" len="med"/>
-                    </a:lnB>
-                    <a:solidFill>
-                      <a:srgbClr val="FBEFE8"/>
-                    </a:solidFill>
-                  </a:tcPr>
-                </a:tc>
-              </a:tr>
-              <a:tr h="320040">
-                <a:tc>
-                  <a:txBody>
-                    <a:bodyPr/>
-                    <a:lstStyle/>
-                    <a:p>
-                      <a:pPr algn="ctr" indent="0" marL="0">
-                        <a:buNone/>
-                      </a:pPr>
-                      <a:r>
-                        <a:rPr lang="en-US" sz="850" dirty="0">
-                          <a:solidFill>
-                            <a:srgbClr val="2B2B2B"/>
-                          </a:solidFill>
-                          <a:latin typeface="맑은 고딕" pitchFamily="34" charset="0"/>
-                          <a:ea typeface="맑은 고딕" pitchFamily="34" charset="-122"/>
-                          <a:cs typeface="맑은 고딕" pitchFamily="34" charset="-120"/>
-                        </a:rPr>
-                        <a:t>1F</a:t>
-                      </a:r>
-                      <a:endParaRPr lang="en-US" sz="850" dirty="0">
-                        <a:latin typeface="맑은 고딕" charset="0"/>
-                        <a:ea typeface="맑은 고딕" charset="0"/>
-                        <a:cs typeface="맑은 고딕" charset="0"/>
-                      </a:endParaRPr>
-                    </a:p>
-                  </a:txBody>
-                  <a:tcPr marL="91440" marR="91440" marT="45720" marB="45720" anchor="ctr">
-                    <a:lnL w="12700" cap="flat" cmpd="sng" algn="ctr">
-                      <a:solidFill>
-                        <a:srgbClr val="CBD5E0"/>
-                      </a:solidFill>
-                      <a:prstDash val="solid"/>
-                      <a:round/>
-                      <a:headEnd type="none" w="med" len="med"/>
-                      <a:tailEnd type="none" w="med" len="med"/>
-                    </a:lnL>
-                    <a:lnR w="12700" cap="flat" cmpd="sng" algn="ctr">
-                      <a:solidFill>
-                        <a:srgbClr val="CBD5E0"/>
-                      </a:solidFill>
-                      <a:prstDash val="solid"/>
-                      <a:round/>
-                      <a:headEnd type="none" w="med" len="med"/>
-                      <a:tailEnd type="none" w="med" len="med"/>
-                    </a:lnR>
-                    <a:lnT w="12700" cap="flat" cmpd="sng" algn="ctr">
-                      <a:solidFill>
-                        <a:srgbClr val="CBD5E0"/>
-                      </a:solidFill>
-                      <a:prstDash val="solid"/>
-                      <a:round/>
-                      <a:headEnd type="none" w="med" len="med"/>
-                      <a:tailEnd type="none" w="med" len="med"/>
-                    </a:lnT>
-                    <a:lnB w="12700" cap="flat" cmpd="sng" algn="ctr">
-                      <a:solidFill>
-                        <a:srgbClr val="CBD5E0"/>
-                      </a:solidFill>
-                      <a:prstDash val="solid"/>
-                      <a:round/>
-                      <a:headEnd type="none" w="med" len="med"/>
-                      <a:tailEnd type="none" w="med" len="med"/>
-                    </a:lnB>
-                    <a:solidFill>
-                      <a:srgbClr val="FFFFFF"/>
-                    </a:solidFill>
-                  </a:tcPr>
-                </a:tc>
-                <a:tc>
-                  <a:txBody>
-                    <a:bodyPr/>
-                    <a:lstStyle/>
-                    <a:p>
-                      <a:pPr algn="ctr" indent="0" marL="0">
-                        <a:buNone/>
-                      </a:pPr>
-                      <a:r>
-                        <a:rPr lang="en-US" sz="850" dirty="0">
-                          <a:solidFill>
-                            <a:srgbClr val="2B2B2B"/>
-                          </a:solidFill>
-                          <a:latin typeface="맑은 고딕" pitchFamily="34" charset="0"/>
-                          <a:ea typeface="맑은 고딕" pitchFamily="34" charset="-122"/>
-                          <a:cs typeface="맑은 고딕" pitchFamily="34" charset="-120"/>
-                        </a:rPr>
-                        <a:t>전층</a:t>
-                      </a:r>
-                      <a:endParaRPr lang="en-US" sz="850" dirty="0">
-                        <a:latin typeface="맑은 고딕" charset="0"/>
-                        <a:ea typeface="맑은 고딕" charset="0"/>
-                        <a:cs typeface="맑은 고딕" charset="0"/>
-                      </a:endParaRPr>
-                    </a:p>
-                  </a:txBody>
-                  <a:tcPr marL="91440" marR="91440" marT="45720" marB="45720" anchor="ctr">
-                    <a:lnL w="12700" cap="flat" cmpd="sng" algn="ctr">
-                      <a:solidFill>
-                        <a:srgbClr val="CBD5E0"/>
-                      </a:solidFill>
-                      <a:prstDash val="solid"/>
-                      <a:round/>
-                      <a:headEnd type="none" w="med" len="med"/>
-                      <a:tailEnd type="none" w="med" len="med"/>
-                    </a:lnL>
-                    <a:lnR w="12700" cap="flat" cmpd="sng" algn="ctr">
-                      <a:solidFill>
-                        <a:srgbClr val="CBD5E0"/>
-                      </a:solidFill>
-                      <a:prstDash val="solid"/>
-                      <a:round/>
-                      <a:headEnd type="none" w="med" len="med"/>
-                      <a:tailEnd type="none" w="med" len="med"/>
-                    </a:lnR>
-                    <a:lnT w="12700" cap="flat" cmpd="sng" algn="ctr">
-                      <a:solidFill>
-                        <a:srgbClr val="CBD5E0"/>
-                      </a:solidFill>
-                      <a:prstDash val="solid"/>
-                      <a:round/>
-                      <a:headEnd type="none" w="med" len="med"/>
-                      <a:tailEnd type="none" w="med" len="med"/>
-                    </a:lnT>
-                    <a:lnB w="12700" cap="flat" cmpd="sng" algn="ctr">
-                      <a:solidFill>
-                        <a:srgbClr val="CBD5E0"/>
-                      </a:solidFill>
-                      <a:prstDash val="solid"/>
-                      <a:round/>
-                      <a:headEnd type="none" w="med" len="med"/>
-                      <a:tailEnd type="none" w="med" len="med"/>
-                    </a:lnB>
-                    <a:solidFill>
-                      <a:srgbClr val="FFFFFF"/>
-                    </a:solidFill>
-                  </a:tcPr>
-                </a:tc>
-                <a:tc>
-                  <a:txBody>
-                    <a:bodyPr/>
-                    <a:lstStyle/>
-                    <a:p>
-                      <a:pPr algn="ctr" indent="0" marL="0">
-                        <a:buNone/>
-                      </a:pPr>
-                      <a:r>
-                        <a:rPr lang="en-US" sz="850" dirty="0">
-                          <a:solidFill>
-                            <a:srgbClr val="2B2B2B"/>
-                          </a:solidFill>
-                          <a:latin typeface="맑은 고딕" pitchFamily="34" charset="0"/>
-                          <a:ea typeface="맑은 고딕" pitchFamily="34" charset="-122"/>
-                          <a:cs typeface="맑은 고딕" pitchFamily="34" charset="-120"/>
-                        </a:rPr>
-                        <a:t>제1종근생(소매점)</a:t>
-                      </a:r>
-                      <a:endParaRPr lang="en-US" sz="850" dirty="0">
-                        <a:latin typeface="맑은 고딕" charset="0"/>
-                        <a:ea typeface="맑은 고딕" charset="0"/>
-                        <a:cs typeface="맑은 고딕" charset="0"/>
-                      </a:endParaRPr>
-                    </a:p>
-                  </a:txBody>
-                  <a:tcPr marL="91440" marR="91440" marT="45720" marB="45720" anchor="ctr">
-                    <a:lnL w="12700" cap="flat" cmpd="sng" algn="ctr">
-                      <a:solidFill>
-                        <a:srgbClr val="CBD5E0"/>
-                      </a:solidFill>
-                      <a:prstDash val="solid"/>
-                      <a:round/>
-                      <a:headEnd type="none" w="med" len="med"/>
-                      <a:tailEnd type="none" w="med" len="med"/>
-                    </a:lnL>
-                    <a:lnR w="12700" cap="flat" cmpd="sng" algn="ctr">
-                      <a:solidFill>
-                        <a:srgbClr val="CBD5E0"/>
-                      </a:solidFill>
-                      <a:prstDash val="solid"/>
-                      <a:round/>
-                      <a:headEnd type="none" w="med" len="med"/>
-                      <a:tailEnd type="none" w="med" len="med"/>
-                    </a:lnR>
-                    <a:lnT w="12700" cap="flat" cmpd="sng" algn="ctr">
-                      <a:solidFill>
-                        <a:srgbClr val="CBD5E0"/>
-                      </a:solidFill>
-                      <a:prstDash val="solid"/>
-                      <a:round/>
-                      <a:headEnd type="none" w="med" len="med"/>
-                      <a:tailEnd type="none" w="med" len="med"/>
-                    </a:lnT>
-                    <a:lnB w="12700" cap="flat" cmpd="sng" algn="ctr">
-                      <a:solidFill>
-                        <a:srgbClr val="CBD5E0"/>
-                      </a:solidFill>
-                      <a:prstDash val="solid"/>
-                      <a:round/>
-                      <a:headEnd type="none" w="med" len="med"/>
-                      <a:tailEnd type="none" w="med" len="med"/>
-                    </a:lnB>
-                    <a:solidFill>
-                      <a:srgbClr val="FFFFFF"/>
-                    </a:solidFill>
-                  </a:tcPr>
-                </a:tc>
-                <a:tc>
-                  <a:txBody>
-                    <a:bodyPr/>
-                    <a:lstStyle/>
-                    <a:p>
-                      <a:pPr algn="ctr" indent="0" marL="0">
-                        <a:buNone/>
-                      </a:pPr>
-                      <a:r>
-                        <a:rPr lang="en-US" sz="850" dirty="0">
-                          <a:solidFill>
-                            <a:srgbClr val="2B2B2B"/>
-                          </a:solidFill>
-                          <a:latin typeface="맑은 고딕" pitchFamily="34" charset="0"/>
-                          <a:ea typeface="맑은 고딕" pitchFamily="34" charset="-122"/>
-                          <a:cs typeface="맑은 고딕" pitchFamily="34" charset="-120"/>
-                        </a:rPr>
-                        <a:t>상가</a:t>
-                      </a:r>
-                      <a:endParaRPr lang="en-US" sz="850" dirty="0">
-                        <a:latin typeface="맑은 고딕" charset="0"/>
-                        <a:ea typeface="맑은 고딕" charset="0"/>
-                        <a:cs typeface="맑은 고딕" charset="0"/>
-                      </a:endParaRPr>
-                    </a:p>
-                  </a:txBody>
-                  <a:tcPr marL="91440" marR="91440" marT="45720" marB="45720" anchor="ctr">
-                    <a:lnL w="12700" cap="flat" cmpd="sng" algn="ctr">
-                      <a:solidFill>
-                        <a:srgbClr val="CBD5E0"/>
-                      </a:solidFill>
-                      <a:prstDash val="solid"/>
-                      <a:round/>
-                      <a:headEnd type="none" w="med" len="med"/>
-                      <a:tailEnd type="none" w="med" len="med"/>
-                    </a:lnL>
-                    <a:lnR w="12700" cap="flat" cmpd="sng" algn="ctr">
-                      <a:solidFill>
-                        <a:srgbClr val="CBD5E0"/>
-                      </a:solidFill>
-                      <a:prstDash val="solid"/>
-                      <a:round/>
-                      <a:headEnd type="none" w="med" len="med"/>
-                      <a:tailEnd type="none" w="med" len="med"/>
-                    </a:lnR>
-                    <a:lnT w="12700" cap="flat" cmpd="sng" algn="ctr">
-                      <a:solidFill>
-                        <a:srgbClr val="CBD5E0"/>
-                      </a:solidFill>
-                      <a:prstDash val="solid"/>
-                      <a:round/>
-                      <a:headEnd type="none" w="med" len="med"/>
-                      <a:tailEnd type="none" w="med" len="med"/>
-                    </a:lnT>
-                    <a:lnB w="12700" cap="flat" cmpd="sng" algn="ctr">
-                      <a:solidFill>
-                        <a:srgbClr val="CBD5E0"/>
-                      </a:solidFill>
-                      <a:prstDash val="solid"/>
-                      <a:round/>
-                      <a:headEnd type="none" w="med" len="med"/>
-                      <a:tailEnd type="none" w="med" len="med"/>
-                    </a:lnB>
-                    <a:solidFill>
-                      <a:srgbClr val="FFFFFF"/>
-                    </a:solidFill>
-                  </a:tcPr>
-                </a:tc>
-                <a:tc>
-                  <a:txBody>
-                    <a:bodyPr/>
-                    <a:lstStyle/>
-                    <a:p>
-                      <a:pPr algn="r" indent="0" marL="0">
-                        <a:buNone/>
-                      </a:pPr>
-                      <a:r>
-                        <a:rPr lang="en-US" sz="850" dirty="0">
-                          <a:solidFill>
-                            <a:srgbClr val="2B2B2B"/>
-                          </a:solidFill>
-                          <a:latin typeface="맑은 고딕" pitchFamily="34" charset="0"/>
-                          <a:ea typeface="맑은 고딕" pitchFamily="34" charset="-122"/>
-                          <a:cs typeface="맑은 고딕" pitchFamily="34" charset="-120"/>
-                        </a:rPr>
-                        <a:t>204.9</a:t>
-                      </a:r>
-                      <a:endParaRPr lang="en-US" sz="850" dirty="0">
-                        <a:latin typeface="맑은 고딕" charset="0"/>
-                        <a:ea typeface="맑은 고딕" charset="0"/>
-                        <a:cs typeface="맑은 고딕" charset="0"/>
-                      </a:endParaRPr>
-                    </a:p>
-                  </a:txBody>
-                  <a:tcPr marL="91440" marR="91440" marT="45720" marB="45720" anchor="ctr">
-                    <a:lnL w="12700" cap="flat" cmpd="sng" algn="ctr">
-                      <a:solidFill>
-                        <a:srgbClr val="CBD5E0"/>
-                      </a:solidFill>
-                      <a:prstDash val="solid"/>
-                      <a:round/>
-                      <a:headEnd type="none" w="med" len="med"/>
-                      <a:tailEnd type="none" w="med" len="med"/>
-                    </a:lnL>
-                    <a:lnR w="12700" cap="flat" cmpd="sng" algn="ctr">
-                      <a:solidFill>
-                        <a:srgbClr val="CBD5E0"/>
-                      </a:solidFill>
-                      <a:prstDash val="solid"/>
-                      <a:round/>
-                      <a:headEnd type="none" w="med" len="med"/>
-                      <a:tailEnd type="none" w="med" len="med"/>
-                    </a:lnR>
-                    <a:lnT w="12700" cap="flat" cmpd="sng" algn="ctr">
-                      <a:solidFill>
-                        <a:srgbClr val="CBD5E0"/>
-                      </a:solidFill>
-                      <a:prstDash val="solid"/>
-                      <a:round/>
-                      <a:headEnd type="none" w="med" len="med"/>
-                      <a:tailEnd type="none" w="med" len="med"/>
-                    </a:lnT>
-                    <a:lnB w="12700" cap="flat" cmpd="sng" algn="ctr">
-                      <a:solidFill>
-                        <a:srgbClr val="CBD5E0"/>
-                      </a:solidFill>
-                      <a:prstDash val="solid"/>
-                      <a:round/>
-                      <a:headEnd type="none" w="med" len="med"/>
-                      <a:tailEnd type="none" w="med" len="med"/>
-                    </a:lnB>
-                    <a:solidFill>
-                      <a:srgbClr val="FFFFFF"/>
-                    </a:solidFill>
-                  </a:tcPr>
-                </a:tc>
-                <a:tc>
-                  <a:txBody>
-                    <a:bodyPr/>
-                    <a:lstStyle/>
-                    <a:p>
-                      <a:pPr algn="r" indent="0" marL="0">
-                        <a:buNone/>
-                      </a:pPr>
-                      <a:r>
-                        <a:rPr lang="en-US" sz="850" dirty="0">
-                          <a:solidFill>
-                            <a:srgbClr val="2B2B2B"/>
-                          </a:solidFill>
-                          <a:latin typeface="맑은 고딕" pitchFamily="34" charset="0"/>
-                          <a:ea typeface="맑은 고딕" pitchFamily="34" charset="-122"/>
-                          <a:cs typeface="맑은 고딕" pitchFamily="34" charset="-120"/>
-                        </a:rPr>
-                        <a:t>0</a:t>
-                      </a:r>
-                      <a:endParaRPr lang="en-US" sz="850" dirty="0">
-                        <a:latin typeface="맑은 고딕" charset="0"/>
-                        <a:ea typeface="맑은 고딕" charset="0"/>
-                        <a:cs typeface="맑은 고딕" charset="0"/>
-                      </a:endParaRPr>
-                    </a:p>
-                  </a:txBody>
-                  <a:tcPr marL="91440" marR="91440" marT="45720" marB="45720" anchor="ctr">
-                    <a:lnL w="12700" cap="flat" cmpd="sng" algn="ctr">
-                      <a:solidFill>
-                        <a:srgbClr val="CBD5E0"/>
-                      </a:solidFill>
-                      <a:prstDash val="solid"/>
-                      <a:round/>
-                      <a:headEnd type="none" w="med" len="med"/>
-                      <a:tailEnd type="none" w="med" len="med"/>
-                    </a:lnL>
-                    <a:lnR w="12700" cap="flat" cmpd="sng" algn="ctr">
-                      <a:solidFill>
-                        <a:srgbClr val="CBD5E0"/>
-                      </a:solidFill>
-                      <a:prstDash val="solid"/>
-                      <a:round/>
-                      <a:headEnd type="none" w="med" len="med"/>
-                      <a:tailEnd type="none" w="med" len="med"/>
-                    </a:lnR>
-                    <a:lnT w="12700" cap="flat" cmpd="sng" algn="ctr">
-                      <a:solidFill>
-                        <a:srgbClr val="CBD5E0"/>
-                      </a:solidFill>
-                      <a:prstDash val="solid"/>
-                      <a:round/>
-                      <a:headEnd type="none" w="med" len="med"/>
-                      <a:tailEnd type="none" w="med" len="med"/>
-                    </a:lnT>
-                    <a:lnB w="12700" cap="flat" cmpd="sng" algn="ctr">
-                      <a:solidFill>
-                        <a:srgbClr val="CBD5E0"/>
-                      </a:solidFill>
-                      <a:prstDash val="solid"/>
-                      <a:round/>
-                      <a:headEnd type="none" w="med" len="med"/>
-                      <a:tailEnd type="none" w="med" len="med"/>
-                    </a:lnB>
-                    <a:solidFill>
-                      <a:srgbClr val="FFFFFF"/>
-                    </a:solidFill>
-                  </a:tcPr>
-                </a:tc>
-                <a:tc>
-                  <a:txBody>
-                    <a:bodyPr/>
-                    <a:lstStyle/>
-                    <a:p>
-                      <a:pPr algn="r" indent="0" marL="0">
-                        <a:buNone/>
-                      </a:pPr>
-                      <a:r>
-                        <a:rPr lang="en-US" sz="850" dirty="0">
-                          <a:solidFill>
-                            <a:srgbClr val="2B2B2B"/>
-                          </a:solidFill>
-                          <a:latin typeface="맑은 고딕" pitchFamily="34" charset="0"/>
-                          <a:ea typeface="맑은 고딕" pitchFamily="34" charset="-122"/>
-                          <a:cs typeface="맑은 고딕" pitchFamily="34" charset="-120"/>
-                        </a:rPr>
-                        <a:t>0</a:t>
-                      </a:r>
-                      <a:endParaRPr lang="en-US" sz="850" dirty="0">
-                        <a:latin typeface="맑은 고딕" charset="0"/>
-                        <a:ea typeface="맑은 고딕" charset="0"/>
-                        <a:cs typeface="맑은 고딕" charset="0"/>
-                      </a:endParaRPr>
-                    </a:p>
-                  </a:txBody>
-                  <a:tcPr marL="91440" marR="91440" marT="45720" marB="45720" anchor="ctr">
-                    <a:lnL w="12700" cap="flat" cmpd="sng" algn="ctr">
-                      <a:solidFill>
-                        <a:srgbClr val="CBD5E0"/>
-                      </a:solidFill>
-                      <a:prstDash val="solid"/>
-                      <a:round/>
-                      <a:headEnd type="none" w="med" len="med"/>
-                      <a:tailEnd type="none" w="med" len="med"/>
-                    </a:lnL>
-                    <a:lnR w="12700" cap="flat" cmpd="sng" algn="ctr">
-                      <a:solidFill>
-                        <a:srgbClr val="CBD5E0"/>
-                      </a:solidFill>
-                      <a:prstDash val="solid"/>
-                      <a:round/>
-                      <a:headEnd type="none" w="med" len="med"/>
-                      <a:tailEnd type="none" w="med" len="med"/>
-                    </a:lnR>
-                    <a:lnT w="12700" cap="flat" cmpd="sng" algn="ctr">
-                      <a:solidFill>
-                        <a:srgbClr val="CBD5E0"/>
-                      </a:solidFill>
-                      <a:prstDash val="solid"/>
-                      <a:round/>
-                      <a:headEnd type="none" w="med" len="med"/>
-                      <a:tailEnd type="none" w="med" len="med"/>
-                    </a:lnT>
-                    <a:lnB w="12700" cap="flat" cmpd="sng" algn="ctr">
-                      <a:solidFill>
-                        <a:srgbClr val="CBD5E0"/>
-                      </a:solidFill>
-                      <a:prstDash val="solid"/>
-                      <a:round/>
-                      <a:headEnd type="none" w="med" len="med"/>
-                      <a:tailEnd type="none" w="med" len="med"/>
-                    </a:lnB>
-                    <a:solidFill>
-                      <a:srgbClr val="FFFFFF"/>
-                    </a:solidFill>
-                  </a:tcPr>
-                </a:tc>
-                <a:tc>
-                  <a:txBody>
-                    <a:bodyPr/>
-                    <a:lstStyle/>
-                    <a:p>
-                      <a:pPr algn="r" indent="0" marL="0">
-                        <a:buNone/>
-                      </a:pPr>
-                      <a:r>
-                        <a:rPr lang="en-US" sz="850" dirty="0">
-                          <a:solidFill>
-                            <a:srgbClr val="2B2B2B"/>
-                          </a:solidFill>
-                          <a:latin typeface="맑은 고딕" pitchFamily="34" charset="0"/>
-                          <a:ea typeface="맑은 고딕" pitchFamily="34" charset="-122"/>
-                          <a:cs typeface="맑은 고딕" pitchFamily="34" charset="-120"/>
-                        </a:rPr>
-                        <a:t>0</a:t>
-                      </a:r>
-                      <a:endParaRPr lang="en-US" sz="850" dirty="0">
-                        <a:latin typeface="맑은 고딕" charset="0"/>
-                        <a:ea typeface="맑은 고딕" charset="0"/>
-                        <a:cs typeface="맑은 고딕" charset="0"/>
-                      </a:endParaRPr>
-                    </a:p>
-                  </a:txBody>
-                  <a:tcPr marL="91440" marR="91440" marT="45720" marB="45720" anchor="ctr">
-                    <a:lnL w="12700" cap="flat" cmpd="sng" algn="ctr">
-                      <a:solidFill>
-                        <a:srgbClr val="CBD5E0"/>
-                      </a:solidFill>
-                      <a:prstDash val="solid"/>
-                      <a:round/>
-                      <a:headEnd type="none" w="med" len="med"/>
-                      <a:tailEnd type="none" w="med" len="med"/>
-                    </a:lnL>
-                    <a:lnR w="12700" cap="flat" cmpd="sng" algn="ctr">
-                      <a:solidFill>
-                        <a:srgbClr val="CBD5E0"/>
-                      </a:solidFill>
-                      <a:prstDash val="solid"/>
-                      <a:round/>
-                      <a:headEnd type="none" w="med" len="med"/>
-                      <a:tailEnd type="none" w="med" len="med"/>
-                    </a:lnR>
-                    <a:lnT w="12700" cap="flat" cmpd="sng" algn="ctr">
-                      <a:solidFill>
-                        <a:srgbClr val="CBD5E0"/>
-                      </a:solidFill>
-                      <a:prstDash val="solid"/>
-                      <a:round/>
-                      <a:headEnd type="none" w="med" len="med"/>
-                      <a:tailEnd type="none" w="med" len="med"/>
-                    </a:lnT>
-                    <a:lnB w="12700" cap="flat" cmpd="sng" algn="ctr">
-                      <a:solidFill>
-                        <a:srgbClr val="CBD5E0"/>
-                      </a:solidFill>
-                      <a:prstDash val="solid"/>
-                      <a:round/>
-                      <a:headEnd type="none" w="med" len="med"/>
-                      <a:tailEnd type="none" w="med" len="med"/>
-                    </a:lnB>
-                    <a:solidFill>
-                      <a:srgbClr val="FFFFFF"/>
-                    </a:solidFill>
-                  </a:tcPr>
-                </a:tc>
-                <a:tc>
-                  <a:txBody>
-                    <a:bodyPr/>
-                    <a:lstStyle/>
-                    <a:p>
-                      <a:pPr algn="ctr" indent="0" marL="0">
-                        <a:buNone/>
-                      </a:pPr>
-                      <a:r>
-                        <a:rPr lang="en-US" sz="850" dirty="0">
-                          <a:solidFill>
-                            <a:srgbClr val="2B2B2B"/>
-                          </a:solidFill>
-                          <a:latin typeface="맑은 고딕" pitchFamily="34" charset="0"/>
-                          <a:ea typeface="맑은 고딕" pitchFamily="34" charset="-122"/>
-                          <a:cs typeface="맑은 고딕" pitchFamily="34" charset="-120"/>
-                        </a:rPr>
-                        <a:t>2026</a:t>
-                      </a:r>
-                      <a:endParaRPr lang="en-US" sz="850" dirty="0">
-                        <a:latin typeface="맑은 고딕" charset="0"/>
-                        <a:ea typeface="맑은 고딕" charset="0"/>
-                        <a:cs typeface="맑은 고딕" charset="0"/>
-                      </a:endParaRPr>
-                    </a:p>
-                  </a:txBody>
-                  <a:tcPr marL="91440" marR="91440" marT="45720" marB="45720" anchor="ctr">
-                    <a:lnL w="12700" cap="flat" cmpd="sng" algn="ctr">
-                      <a:solidFill>
-                        <a:srgbClr val="CBD5E0"/>
-                      </a:solidFill>
-                      <a:prstDash val="solid"/>
-                      <a:round/>
-                      <a:headEnd type="none" w="med" len="med"/>
-                      <a:tailEnd type="none" w="med" len="med"/>
-                    </a:lnL>
-                    <a:lnR w="12700" cap="flat" cmpd="sng" algn="ctr">
-                      <a:solidFill>
-                        <a:srgbClr val="CBD5E0"/>
-                      </a:solidFill>
-                      <a:prstDash val="solid"/>
-                      <a:round/>
-                      <a:headEnd type="none" w="med" len="med"/>
-                      <a:tailEnd type="none" w="med" len="med"/>
-                    </a:lnR>
-                    <a:lnT w="12700" cap="flat" cmpd="sng" algn="ctr">
-                      <a:solidFill>
-                        <a:srgbClr val="CBD5E0"/>
-                      </a:solidFill>
-                      <a:prstDash val="solid"/>
-                      <a:round/>
-                      <a:headEnd type="none" w="med" len="med"/>
-                      <a:tailEnd type="none" w="med" len="med"/>
-                    </a:lnT>
-                    <a:lnB w="12700" cap="flat" cmpd="sng" algn="ctr">
-                      <a:solidFill>
-                        <a:srgbClr val="CBD5E0"/>
-                      </a:solidFill>
-                      <a:prstDash val="solid"/>
-                      <a:round/>
-                      <a:headEnd type="none" w="med" len="med"/>
-                      <a:tailEnd type="none" w="med" len="med"/>
-                    </a:lnB>
-                    <a:solidFill>
-                      <a:srgbClr val="FFFFFF"/>
-                    </a:solidFill>
-                  </a:tcPr>
-                </a:tc>
-                <a:tc>
-                  <a:txBody>
-                    <a:bodyPr/>
-                    <a:lstStyle/>
-                    <a:p>
-                      <a:pPr algn="ctr" indent="0" marL="0">
-                        <a:buNone/>
-                      </a:pPr>
-                      <a:r>
-                        <a:rPr lang="en-US" sz="850" dirty="0">
-                          <a:solidFill>
-                            <a:srgbClr val="2B2B2B"/>
-                          </a:solidFill>
-                          <a:latin typeface="맑은 고딕" pitchFamily="34" charset="0"/>
-                          <a:ea typeface="맑은 고딕" pitchFamily="34" charset="-122"/>
-                          <a:cs typeface="맑은 고딕" pitchFamily="34" charset="-120"/>
-                        </a:rPr>
-                        <a:t>승계 요망</a:t>
-                      </a:r>
                       <a:endParaRPr lang="en-US" sz="850" dirty="0">
                         <a:latin typeface="맑은 고딕" charset="0"/>
                         <a:ea typeface="맑은 고딕" charset="0"/>
@@ -14579,7 +14024,7 @@
                           <a:ea typeface="맑은 고딕" pitchFamily="34" charset="-122"/>
                           <a:cs typeface="맑은 고딕" pitchFamily="34" charset="-120"/>
                         </a:rPr>
-                        <a:t>B1</a:t>
+                        <a:t>7F</a:t>
                       </a:r>
                       <a:endParaRPr lang="en-US" sz="850" dirty="0">
                         <a:latin typeface="맑은 고딕" charset="0"/>
@@ -14647,7 +14092,7 @@
                           <a:ea typeface="맑은 고딕" pitchFamily="34" charset="-122"/>
                           <a:cs typeface="맑은 고딕" pitchFamily="34" charset="-120"/>
                         </a:rPr>
-                        <a:t>전층</a:t>
+                        <a:t>-</a:t>
                       </a:r>
                       <a:endParaRPr lang="en-US" sz="850" dirty="0">
                         <a:latin typeface="맑은 고딕" charset="0"/>
@@ -14715,7 +14160,7 @@
                           <a:ea typeface="맑은 고딕" pitchFamily="34" charset="-122"/>
                           <a:cs typeface="맑은 고딕" pitchFamily="34" charset="-120"/>
                         </a:rPr>
-                        <a:t>제2종근생(기타)</a:t>
+                        <a:t>사무실</a:t>
                       </a:r>
                       <a:endParaRPr lang="en-US" sz="850" dirty="0">
                         <a:latin typeface="맑은 고딕" charset="0"/>
@@ -14783,7 +14228,7 @@
                           <a:ea typeface="맑은 고딕" pitchFamily="34" charset="-122"/>
                           <a:cs typeface="맑은 고딕" pitchFamily="34" charset="-120"/>
                         </a:rPr>
-                        <a:t>파티룸</a:t>
+                        <a:t>사무실</a:t>
                       </a:r>
                       <a:endParaRPr lang="en-US" sz="850" dirty="0">
                         <a:latin typeface="맑은 고딕" charset="0"/>
@@ -14851,7 +14296,7 @@
                           <a:ea typeface="맑은 고딕" pitchFamily="34" charset="-122"/>
                           <a:cs typeface="맑은 고딕" pitchFamily="34" charset="-120"/>
                         </a:rPr>
-                        <a:t>400.0</a:t>
+                        <a:t>-</a:t>
                       </a:r>
                       <a:endParaRPr lang="en-US" sz="850" dirty="0">
                         <a:latin typeface="맑은 고딕" charset="0"/>
@@ -15055,7 +14500,7 @@
                           <a:ea typeface="맑은 고딕" pitchFamily="34" charset="-122"/>
                           <a:cs typeface="맑은 고딕" pitchFamily="34" charset="-120"/>
                         </a:rPr>
-                        <a:t>0</a:t>
+                        <a:t>-</a:t>
                       </a:r>
                       <a:endParaRPr lang="en-US" sz="850" dirty="0">
                         <a:latin typeface="맑은 고딕" charset="0"/>
@@ -15123,7 +14568,7 @@
                           <a:ea typeface="맑은 고딕" pitchFamily="34" charset="-122"/>
                           <a:cs typeface="맑은 고딕" pitchFamily="34" charset="-120"/>
                         </a:rPr>
-                        <a:t>2024</a:t>
+                        <a:t>-</a:t>
                       </a:r>
                       <a:endParaRPr lang="en-US" sz="850" dirty="0">
                         <a:latin typeface="맑은 고딕" charset="0"/>
@@ -15182,17 +14627,6 @@
                       <a:pPr algn="ctr" indent="0" marL="0">
                         <a:buNone/>
                       </a:pPr>
-                      <a:r>
-                        <a:rPr lang="en-US" sz="850" dirty="0">
-                          <a:solidFill>
-                            <a:srgbClr val="2B2B2B"/>
-                          </a:solidFill>
-                          <a:latin typeface="맑은 고딕" pitchFamily="34" charset="0"/>
-                          <a:ea typeface="맑은 고딕" pitchFamily="34" charset="-122"/>
-                          <a:cs typeface="맑은 고딕" pitchFamily="34" charset="-120"/>
-                        </a:rPr>
-                        <a:t>만기 예정</a:t>
-                      </a:r>
                       <a:endParaRPr lang="en-US" sz="850" dirty="0">
                         <a:latin typeface="맑은 고딕" charset="0"/>
                         <a:ea typeface="맑은 고딕" charset="0"/>
@@ -15511,7 +14945,7 @@
                           <a:ea typeface="맑은 고딕" pitchFamily="34" charset="-122"/>
                           <a:cs typeface="맑은 고딕" pitchFamily="34" charset="-120"/>
                         </a:rPr>
-                        <a:t>2104.9</a:t>
+                        <a:t>-</a:t>
                       </a:r>
                       <a:endParaRPr lang="en-US" sz="850" dirty="0">
                         <a:latin typeface="맑은 고딕" charset="0"/>
@@ -15876,7 +15310,7 @@
       </p:graphicFrame>
       <p:sp>
         <p:nvSpPr>
-          <p:cNvPr id="43" name="Text 40"/>
+          <p:cNvPr id="36" name="Text 33"/>
           <p:cNvSpPr/>
           <p:nvPr/>
         </p:nvSpPr>
@@ -15907,7 +15341,7 @@
                 <a:ea typeface="맑은 고딕" pitchFamily="34" charset="-122"/>
                 <a:cs typeface="맑은 고딕" pitchFamily="34" charset="-120"/>
               </a:rPr>
-              <a:t>CRE DEAL   |   IM-SEOCHO-FM-R3</a:t>
+              <a:t>CRE DEAL</a:t>
             </a:r>
             <a:endParaRPr lang="en-US" sz="800" dirty="0"/>
           </a:p>
@@ -15915,7 +15349,7 @@
       </p:sp>
       <p:sp>
         <p:nvSpPr>
-          <p:cNvPr id="44" name="Text 41"/>
+          <p:cNvPr id="37" name="Text 34"/>
           <p:cNvSpPr/>
           <p:nvPr/>
         </p:nvSpPr>
@@ -16240,67 +15674,6 @@
         </p:nvSpPr>
         <p:spPr>
           <a:xfrm>
-            <a:off x="502920" y="3232404"/>
-            <a:ext cx="3600602" cy="292608"/>
-          </a:xfrm>
-          <a:prstGeom prst="rect">
-            <a:avLst/>
-          </a:prstGeom>
-          <a:solidFill>
-            <a:srgbClr val="000000">
-              <a:alpha val="60000"/>
-            </a:srgbClr>
-          </a:solidFill>
-          <a:ln/>
-        </p:spPr>
-      </p:sp>
-      <p:sp>
-        <p:nvSpPr>
-          <p:cNvPr id="11" name="Text 8"/>
-          <p:cNvSpPr/>
-          <p:nvPr/>
-        </p:nvSpPr>
-        <p:spPr>
-          <a:xfrm>
-            <a:off x="612648" y="3232404"/>
-            <a:ext cx="3381146" cy="292608"/>
-          </a:xfrm>
-          <a:prstGeom prst="rect">
-            <a:avLst/>
-          </a:prstGeom>
-          <a:noFill/>
-          <a:ln/>
-        </p:spPr>
-        <p:txBody>
-          <a:bodyPr wrap="square" lIns="0" tIns="0" rIns="0" bIns="0" rtlCol="0" anchor="ctr"/>
-          <a:lstStyle/>
-          <a:p>
-            <a:pPr indent="0" marL="0">
-              <a:buNone/>
-            </a:pPr>
-            <a:r>
-              <a:rPr lang="en-US" sz="900" dirty="0">
-                <a:solidFill>
-                  <a:srgbClr val="FFFFFF"/>
-                </a:solidFill>
-                <a:latin typeface="맑은 고딕" pitchFamily="34" charset="0"/>
-                <a:ea typeface="맑은 고딕" pitchFamily="34" charset="-122"/>
-                <a:cs typeface="맑은 고딕" pitchFamily="34" charset="-120"/>
-              </a:rPr>
-              <a:t>서초동 FM빌딩 exterior 사진</a:t>
-            </a:r>
-            <a:endParaRPr lang="en-US" sz="900" dirty="0"/>
-          </a:p>
-        </p:txBody>
-      </p:sp>
-      <p:sp>
-        <p:nvSpPr>
-          <p:cNvPr id="12" name="Shape 9"/>
-          <p:cNvSpPr/>
-          <p:nvPr/>
-        </p:nvSpPr>
-        <p:spPr>
-          <a:xfrm>
             <a:off x="4231538" y="1234440"/>
             <a:ext cx="3600602" cy="2290572"/>
           </a:xfrm>
@@ -16322,7 +15695,7 @@
       </p:sp>
       <p:pic>
         <p:nvPicPr>
-          <p:cNvPr id="13" name="Image 1" descr="preencoded.png">    </p:cNvPr>
+          <p:cNvPr id="11" name="Image 1" descr="preencoded.png">    </p:cNvPr>
           <p:cNvPicPr>
             <a:picLocks noChangeAspect="1"/>
           </p:cNvPicPr>
@@ -16345,7 +15718,7 @@
       </p:pic>
       <p:sp>
         <p:nvSpPr>
-          <p:cNvPr id="14" name="Shape 10"/>
+          <p:cNvPr id="12" name="Shape 8"/>
           <p:cNvSpPr/>
           <p:nvPr/>
         </p:nvSpPr>
@@ -16367,7 +15740,7 @@
       </p:sp>
       <p:sp>
         <p:nvSpPr>
-          <p:cNvPr id="15" name="Text 11"/>
+          <p:cNvPr id="13" name="Text 9"/>
           <p:cNvSpPr/>
           <p:nvPr/>
         </p:nvSpPr>
@@ -16406,68 +15779,7 @@
       </p:sp>
       <p:sp>
         <p:nvSpPr>
-          <p:cNvPr id="16" name="Shape 12"/>
-          <p:cNvSpPr/>
-          <p:nvPr/>
-        </p:nvSpPr>
-        <p:spPr>
-          <a:xfrm>
-            <a:off x="4231538" y="3232404"/>
-            <a:ext cx="3600602" cy="292608"/>
-          </a:xfrm>
-          <a:prstGeom prst="rect">
-            <a:avLst/>
-          </a:prstGeom>
-          <a:solidFill>
-            <a:srgbClr val="000000">
-              <a:alpha val="60000"/>
-            </a:srgbClr>
-          </a:solidFill>
-          <a:ln/>
-        </p:spPr>
-      </p:sp>
-      <p:sp>
-        <p:nvSpPr>
-          <p:cNvPr id="17" name="Text 13"/>
-          <p:cNvSpPr/>
-          <p:nvPr/>
-        </p:nvSpPr>
-        <p:spPr>
-          <a:xfrm>
-            <a:off x="4341266" y="3232404"/>
-            <a:ext cx="3381146" cy="292608"/>
-          </a:xfrm>
-          <a:prstGeom prst="rect">
-            <a:avLst/>
-          </a:prstGeom>
-          <a:noFill/>
-          <a:ln/>
-        </p:spPr>
-        <p:txBody>
-          <a:bodyPr wrap="square" lIns="0" tIns="0" rIns="0" bIns="0" rtlCol="0" anchor="ctr"/>
-          <a:lstStyle/>
-          <a:p>
-            <a:pPr indent="0" marL="0">
-              <a:buNone/>
-            </a:pPr>
-            <a:r>
-              <a:rPr lang="en-US" sz="900" dirty="0">
-                <a:solidFill>
-                  <a:srgbClr val="FFFFFF"/>
-                </a:solidFill>
-                <a:latin typeface="맑은 고딕" pitchFamily="34" charset="0"/>
-                <a:ea typeface="맑은 고딕" pitchFamily="34" charset="-122"/>
-                <a:cs typeface="맑은 고딕" pitchFamily="34" charset="-120"/>
-              </a:rPr>
-              <a:t>서초동 FM빌딩 exterior 사진</a:t>
-            </a:r>
-            <a:endParaRPr lang="en-US" sz="900" dirty="0"/>
-          </a:p>
-        </p:txBody>
-      </p:sp>
-      <p:sp>
-        <p:nvSpPr>
-          <p:cNvPr id="18" name="Shape 14"/>
+          <p:cNvPr id="14" name="Shape 10"/>
           <p:cNvSpPr/>
           <p:nvPr/>
         </p:nvSpPr>
@@ -16494,7 +15806,7 @@
       </p:sp>
       <p:pic>
         <p:nvPicPr>
-          <p:cNvPr id="19" name="Image 2" descr="preencoded.png">    </p:cNvPr>
+          <p:cNvPr id="15" name="Image 2" descr="preencoded.png">    </p:cNvPr>
           <p:cNvPicPr>
             <a:picLocks noChangeAspect="1"/>
           </p:cNvPicPr>
@@ -16517,7 +15829,7 @@
       </p:pic>
       <p:sp>
         <p:nvSpPr>
-          <p:cNvPr id="20" name="Shape 15"/>
+          <p:cNvPr id="16" name="Shape 11"/>
           <p:cNvSpPr/>
           <p:nvPr/>
         </p:nvSpPr>
@@ -16539,7 +15851,7 @@
       </p:sp>
       <p:sp>
         <p:nvSpPr>
-          <p:cNvPr id="21" name="Text 16"/>
+          <p:cNvPr id="17" name="Text 12"/>
           <p:cNvSpPr/>
           <p:nvPr/>
         </p:nvSpPr>
@@ -16578,68 +15890,7 @@
       </p:sp>
       <p:sp>
         <p:nvSpPr>
-          <p:cNvPr id="22" name="Shape 17"/>
-          <p:cNvSpPr/>
-          <p:nvPr/>
-        </p:nvSpPr>
-        <p:spPr>
-          <a:xfrm>
-            <a:off x="7960157" y="3232404"/>
-            <a:ext cx="3600602" cy="292608"/>
-          </a:xfrm>
-          <a:prstGeom prst="rect">
-            <a:avLst/>
-          </a:prstGeom>
-          <a:solidFill>
-            <a:srgbClr val="000000">
-              <a:alpha val="60000"/>
-            </a:srgbClr>
-          </a:solidFill>
-          <a:ln/>
-        </p:spPr>
-      </p:sp>
-      <p:sp>
-        <p:nvSpPr>
-          <p:cNvPr id="23" name="Text 18"/>
-          <p:cNvSpPr/>
-          <p:nvPr/>
-        </p:nvSpPr>
-        <p:spPr>
-          <a:xfrm>
-            <a:off x="8069885" y="3232404"/>
-            <a:ext cx="3381146" cy="292608"/>
-          </a:xfrm>
-          <a:prstGeom prst="rect">
-            <a:avLst/>
-          </a:prstGeom>
-          <a:noFill/>
-          <a:ln/>
-        </p:spPr>
-        <p:txBody>
-          <a:bodyPr wrap="square" lIns="0" tIns="0" rIns="0" bIns="0" rtlCol="0" anchor="ctr"/>
-          <a:lstStyle/>
-          <a:p>
-            <a:pPr indent="0" marL="0">
-              <a:buNone/>
-            </a:pPr>
-            <a:r>
-              <a:rPr lang="en-US" sz="900" dirty="0">
-                <a:solidFill>
-                  <a:srgbClr val="FFFFFF"/>
-                </a:solidFill>
-                <a:latin typeface="맑은 고딕" pitchFamily="34" charset="0"/>
-                <a:ea typeface="맑은 고딕" pitchFamily="34" charset="-122"/>
-                <a:cs typeface="맑은 고딕" pitchFamily="34" charset="-120"/>
-              </a:rPr>
-              <a:t>서초동 FM빌딩 entrance 사진</a:t>
-            </a:r>
-            <a:endParaRPr lang="en-US" sz="900" dirty="0"/>
-          </a:p>
-        </p:txBody>
-      </p:sp>
-      <p:sp>
-        <p:nvSpPr>
-          <p:cNvPr id="24" name="Shape 19"/>
+          <p:cNvPr id="18" name="Shape 13"/>
           <p:cNvSpPr/>
           <p:nvPr/>
         </p:nvSpPr>
@@ -16666,7 +15917,7 @@
       </p:sp>
       <p:pic>
         <p:nvPicPr>
-          <p:cNvPr id="25" name="Image 3" descr="preencoded.png">    </p:cNvPr>
+          <p:cNvPr id="19" name="Image 3" descr="preencoded.png">    </p:cNvPr>
           <p:cNvPicPr>
             <a:picLocks noChangeAspect="1"/>
           </p:cNvPicPr>
@@ -16689,7 +15940,7 @@
       </p:pic>
       <p:sp>
         <p:nvSpPr>
-          <p:cNvPr id="26" name="Shape 20"/>
+          <p:cNvPr id="20" name="Shape 14"/>
           <p:cNvSpPr/>
           <p:nvPr/>
         </p:nvSpPr>
@@ -16711,7 +15962,7 @@
       </p:sp>
       <p:sp>
         <p:nvSpPr>
-          <p:cNvPr id="27" name="Text 21"/>
+          <p:cNvPr id="21" name="Text 15"/>
           <p:cNvSpPr/>
           <p:nvPr/>
         </p:nvSpPr>
@@ -16750,68 +16001,7 @@
       </p:sp>
       <p:sp>
         <p:nvSpPr>
-          <p:cNvPr id="28" name="Shape 22"/>
-          <p:cNvSpPr/>
-          <p:nvPr/>
-        </p:nvSpPr>
-        <p:spPr>
-          <a:xfrm>
-            <a:off x="502920" y="5650992"/>
-            <a:ext cx="3600602" cy="292608"/>
-          </a:xfrm>
-          <a:prstGeom prst="rect">
-            <a:avLst/>
-          </a:prstGeom>
-          <a:solidFill>
-            <a:srgbClr val="000000">
-              <a:alpha val="60000"/>
-            </a:srgbClr>
-          </a:solidFill>
-          <a:ln/>
-        </p:spPr>
-      </p:sp>
-      <p:sp>
-        <p:nvSpPr>
-          <p:cNvPr id="29" name="Text 23"/>
-          <p:cNvSpPr/>
-          <p:nvPr/>
-        </p:nvSpPr>
-        <p:spPr>
-          <a:xfrm>
-            <a:off x="612648" y="5650992"/>
-            <a:ext cx="3381146" cy="292608"/>
-          </a:xfrm>
-          <a:prstGeom prst="rect">
-            <a:avLst/>
-          </a:prstGeom>
-          <a:noFill/>
-          <a:ln/>
-        </p:spPr>
-        <p:txBody>
-          <a:bodyPr wrap="square" lIns="0" tIns="0" rIns="0" bIns="0" rtlCol="0" anchor="ctr"/>
-          <a:lstStyle/>
-          <a:p>
-            <a:pPr indent="0" marL="0">
-              <a:buNone/>
-            </a:pPr>
-            <a:r>
-              <a:rPr lang="en-US" sz="900" dirty="0">
-                <a:solidFill>
-                  <a:srgbClr val="FFFFFF"/>
-                </a:solidFill>
-                <a:latin typeface="맑은 고딕" pitchFamily="34" charset="0"/>
-                <a:ea typeface="맑은 고딕" pitchFamily="34" charset="-122"/>
-                <a:cs typeface="맑은 고딕" pitchFamily="34" charset="-120"/>
-              </a:rPr>
-              <a:t>서초동 FM빌딩 interior 사진</a:t>
-            </a:r>
-            <a:endParaRPr lang="en-US" sz="900" dirty="0"/>
-          </a:p>
-        </p:txBody>
-      </p:sp>
-      <p:sp>
-        <p:nvSpPr>
-          <p:cNvPr id="30" name="Shape 24"/>
+          <p:cNvPr id="22" name="Shape 16"/>
           <p:cNvSpPr/>
           <p:nvPr/>
         </p:nvSpPr>
@@ -16838,7 +16028,7 @@
       </p:sp>
       <p:pic>
         <p:nvPicPr>
-          <p:cNvPr id="31" name="Image 4" descr="preencoded.png">    </p:cNvPr>
+          <p:cNvPr id="23" name="Image 4" descr="preencoded.png">    </p:cNvPr>
           <p:cNvPicPr>
             <a:picLocks noChangeAspect="1"/>
           </p:cNvPicPr>
@@ -16861,7 +16051,7 @@
       </p:pic>
       <p:sp>
         <p:nvSpPr>
-          <p:cNvPr id="32" name="Shape 25"/>
+          <p:cNvPr id="24" name="Shape 17"/>
           <p:cNvSpPr/>
           <p:nvPr/>
         </p:nvSpPr>
@@ -16883,7 +16073,7 @@
       </p:sp>
       <p:sp>
         <p:nvSpPr>
-          <p:cNvPr id="33" name="Text 26"/>
+          <p:cNvPr id="25" name="Text 18"/>
           <p:cNvSpPr/>
           <p:nvPr/>
         </p:nvSpPr>
@@ -16922,68 +16112,7 @@
       </p:sp>
       <p:sp>
         <p:nvSpPr>
-          <p:cNvPr id="34" name="Shape 27"/>
-          <p:cNvSpPr/>
-          <p:nvPr/>
-        </p:nvSpPr>
-        <p:spPr>
-          <a:xfrm>
-            <a:off x="4231538" y="5650992"/>
-            <a:ext cx="3600602" cy="292608"/>
-          </a:xfrm>
-          <a:prstGeom prst="rect">
-            <a:avLst/>
-          </a:prstGeom>
-          <a:solidFill>
-            <a:srgbClr val="000000">
-              <a:alpha val="60000"/>
-            </a:srgbClr>
-          </a:solidFill>
-          <a:ln/>
-        </p:spPr>
-      </p:sp>
-      <p:sp>
-        <p:nvSpPr>
-          <p:cNvPr id="35" name="Text 28"/>
-          <p:cNvSpPr/>
-          <p:nvPr/>
-        </p:nvSpPr>
-        <p:spPr>
-          <a:xfrm>
-            <a:off x="4341266" y="5650992"/>
-            <a:ext cx="3381146" cy="292608"/>
-          </a:xfrm>
-          <a:prstGeom prst="rect">
-            <a:avLst/>
-          </a:prstGeom>
-          <a:noFill/>
-          <a:ln/>
-        </p:spPr>
-        <p:txBody>
-          <a:bodyPr wrap="square" lIns="0" tIns="0" rIns="0" bIns="0" rtlCol="0" anchor="ctr"/>
-          <a:lstStyle/>
-          <a:p>
-            <a:pPr indent="0" marL="0">
-              <a:buNone/>
-            </a:pPr>
-            <a:r>
-              <a:rPr lang="en-US" sz="900" dirty="0">
-                <a:solidFill>
-                  <a:srgbClr val="FFFFFF"/>
-                </a:solidFill>
-                <a:latin typeface="맑은 고딕" pitchFamily="34" charset="0"/>
-                <a:ea typeface="맑은 고딕" pitchFamily="34" charset="-122"/>
-                <a:cs typeface="맑은 고딕" pitchFamily="34" charset="-120"/>
-              </a:rPr>
-              <a:t>서초동 FM빌딩 interior 사진</a:t>
-            </a:r>
-            <a:endParaRPr lang="en-US" sz="900" dirty="0"/>
-          </a:p>
-        </p:txBody>
-      </p:sp>
-      <p:sp>
-        <p:nvSpPr>
-          <p:cNvPr id="36" name="Shape 29"/>
+          <p:cNvPr id="26" name="Shape 19"/>
           <p:cNvSpPr/>
           <p:nvPr/>
         </p:nvSpPr>
@@ -17010,7 +16139,7 @@
       </p:sp>
       <p:pic>
         <p:nvPicPr>
-          <p:cNvPr id="37" name="Image 5" descr="preencoded.png">    </p:cNvPr>
+          <p:cNvPr id="27" name="Image 5" descr="preencoded.png">    </p:cNvPr>
           <p:cNvPicPr>
             <a:picLocks noChangeAspect="1"/>
           </p:cNvPicPr>
@@ -17033,7 +16162,7 @@
       </p:pic>
       <p:sp>
         <p:nvSpPr>
-          <p:cNvPr id="38" name="Shape 30"/>
+          <p:cNvPr id="28" name="Shape 20"/>
           <p:cNvSpPr/>
           <p:nvPr/>
         </p:nvSpPr>
@@ -17055,7 +16184,7 @@
       </p:sp>
       <p:sp>
         <p:nvSpPr>
-          <p:cNvPr id="39" name="Text 31"/>
+          <p:cNvPr id="29" name="Text 21"/>
           <p:cNvSpPr/>
           <p:nvPr/>
         </p:nvSpPr>
@@ -17094,68 +16223,7 @@
       </p:sp>
       <p:sp>
         <p:nvSpPr>
-          <p:cNvPr id="40" name="Shape 32"/>
-          <p:cNvSpPr/>
-          <p:nvPr/>
-        </p:nvSpPr>
-        <p:spPr>
-          <a:xfrm>
-            <a:off x="7960157" y="5650992"/>
-            <a:ext cx="3600602" cy="292608"/>
-          </a:xfrm>
-          <a:prstGeom prst="rect">
-            <a:avLst/>
-          </a:prstGeom>
-          <a:solidFill>
-            <a:srgbClr val="000000">
-              <a:alpha val="60000"/>
-            </a:srgbClr>
-          </a:solidFill>
-          <a:ln/>
-        </p:spPr>
-      </p:sp>
-      <p:sp>
-        <p:nvSpPr>
-          <p:cNvPr id="41" name="Text 33"/>
-          <p:cNvSpPr/>
-          <p:nvPr/>
-        </p:nvSpPr>
-        <p:spPr>
-          <a:xfrm>
-            <a:off x="8069885" y="5650992"/>
-            <a:ext cx="3381146" cy="292608"/>
-          </a:xfrm>
-          <a:prstGeom prst="rect">
-            <a:avLst/>
-          </a:prstGeom>
-          <a:noFill/>
-          <a:ln/>
-        </p:spPr>
-        <p:txBody>
-          <a:bodyPr wrap="square" lIns="0" tIns="0" rIns="0" bIns="0" rtlCol="0" anchor="ctr"/>
-          <a:lstStyle/>
-          <a:p>
-            <a:pPr indent="0" marL="0">
-              <a:buNone/>
-            </a:pPr>
-            <a:r>
-              <a:rPr lang="en-US" sz="900" dirty="0">
-                <a:solidFill>
-                  <a:srgbClr val="FFFFFF"/>
-                </a:solidFill>
-                <a:latin typeface="맑은 고딕" pitchFamily="34" charset="0"/>
-                <a:ea typeface="맑은 고딕" pitchFamily="34" charset="-122"/>
-                <a:cs typeface="맑은 고딕" pitchFamily="34" charset="-120"/>
-              </a:rPr>
-              <a:t>서초동 FM빌딩 parking 사진</a:t>
-            </a:r>
-            <a:endParaRPr lang="en-US" sz="900" dirty="0"/>
-          </a:p>
-        </p:txBody>
-      </p:sp>
-      <p:sp>
-        <p:nvSpPr>
-          <p:cNvPr id="42" name="Text 34"/>
+          <p:cNvPr id="30" name="Text 22"/>
           <p:cNvSpPr/>
           <p:nvPr/>
         </p:nvSpPr>
@@ -17186,7 +16254,7 @@
                 <a:ea typeface="맑은 고딕" pitchFamily="34" charset="-122"/>
                 <a:cs typeface="맑은 고딕" pitchFamily="34" charset="-120"/>
               </a:rPr>
-              <a:t>CRE DEAL   |   IM-SEOCHO-FM-R3</a:t>
+              <a:t>CRE DEAL</a:t>
             </a:r>
             <a:endParaRPr lang="en-US" sz="800" dirty="0"/>
           </a:p>
@@ -17194,7 +16262,7 @@
       </p:sp>
       <p:sp>
         <p:nvSpPr>
-          <p:cNvPr id="43" name="Text 35"/>
+          <p:cNvPr id="31" name="Text 23"/>
           <p:cNvSpPr/>
           <p:nvPr/>
         </p:nvSpPr>
@@ -18593,7 +17661,7 @@
                 <a:ea typeface="맑은 고딕" pitchFamily="34" charset="-122"/>
                 <a:cs typeface="맑은 고딕" pitchFamily="34" charset="-120"/>
               </a:rPr>
-              <a:t>📞  수석 자문역  </a:t>
+              <a:t>📞  담당자  </a:t>
             </a:r>
             <a:endParaRPr lang="en-US" sz="1100" dirty="0"/>
           </a:p>
@@ -18632,7 +17700,7 @@
                 <a:ea typeface="맑은 고딕" pitchFamily="34" charset="-122"/>
                 <a:cs typeface="맑은 고딕" pitchFamily="34" charset="-120"/>
               </a:rPr>
-              <a:t>☎ 02-555-8888</a:t>
+              <a:t>☎ 010-0000-0000</a:t>
             </a:r>
             <a:endParaRPr lang="en-US" sz="950" dirty="0"/>
           </a:p>
@@ -18671,7 +17739,7 @@
                 <a:ea typeface="맑은 고딕" pitchFamily="34" charset="-122"/>
                 <a:cs typeface="맑은 고딕" pitchFamily="34" charset="-120"/>
               </a:rPr>
-              <a:t>🏢 CREDEAL 투자자문</a:t>
+              <a:t>🏢 CREDEAL</a:t>
             </a:r>
             <a:endParaRPr lang="en-US" sz="900" dirty="0"/>
           </a:p>
@@ -18833,7 +17901,7 @@
                 <a:ea typeface="맑은 고딕" pitchFamily="34" charset="-122"/>
                 <a:cs typeface="맑은 고딕" pitchFamily="34" charset="-120"/>
               </a:rPr>
-              <a:t>CREDEAL 투자자문 · IM-SEOCHO-FM-R3</a:t>
+              <a:t>CREDEAL · </a:t>
             </a:r>
             <a:endParaRPr lang="en-US" sz="900" dirty="0"/>
           </a:p>
@@ -18872,7 +17940,7 @@
                 <a:ea typeface="맑은 고딕" pitchFamily="34" charset="-122"/>
                 <a:cs typeface="맑은 고딕" pitchFamily="34" charset="-120"/>
               </a:rPr>
-              <a:t>CRE DEAL   |   IM-SEOCHO-FM-R3</a:t>
+              <a:t>CRE DEAL</a:t>
             </a:r>
             <a:endParaRPr lang="en-US" sz="800" dirty="0"/>
           </a:p>

--- a/docs/test/golden-outputs/p3-seocho-r3/seocho_owner_r3_basic.pptx
+++ b/docs/test/golden-outputs/p3-seocho-r3/seocho_owner_r3_basic.pptx
@@ -2110,7 +2110,7 @@
                 <a:ea typeface="맑은 고딕" pitchFamily="34" charset="-122"/>
                 <a:cs typeface="맑은 고딕" pitchFamily="34" charset="-120"/>
               </a:rPr>
-              <a:t>2026.09.22  |  담당자  |  CREDEAL</a:t>
+              <a:t>2026.09.23  |  담당자  |  CREDEAL</a:t>
             </a:r>
             <a:endParaRPr lang="en-US" sz="900" dirty="0"/>
           </a:p>
@@ -8661,8 +8661,7 @@
                 <a:gridCol w="749808"/>
                 <a:gridCol w="658368"/>
                 <a:gridCol w="658368"/>
-                <a:gridCol w="658368"/>
-                <a:gridCol w="502920"/>
+                <a:gridCol w="1161288"/>
               </a:tblGrid>
               <a:tr h="320040">
                 <a:tc>
@@ -9046,67 +9045,6 @@
                           </a:solidFill>
                         </a:rPr>
                         <a:t>월세(만원)</a:t>
-                      </a:r>
-                      <a:endParaRPr lang="en-US" sz="1000" dirty="0"/>
-                    </a:p>
-                  </a:txBody>
-                  <a:tcPr marL="91440" marR="91440" marT="45720" marB="45720" anchor="ctr">
-                    <a:lnL w="12700" cap="flat" cmpd="sng" algn="ctr">
-                      <a:solidFill>
-                        <a:srgbClr val="CBD5E0"/>
-                      </a:solidFill>
-                      <a:prstDash val="solid"/>
-                      <a:round/>
-                      <a:headEnd type="none" w="med" len="med"/>
-                      <a:tailEnd type="none" w="med" len="med"/>
-                    </a:lnL>
-                    <a:lnR w="12700" cap="flat" cmpd="sng" algn="ctr">
-                      <a:solidFill>
-                        <a:srgbClr val="CBD5E0"/>
-                      </a:solidFill>
-                      <a:prstDash val="solid"/>
-                      <a:round/>
-                      <a:headEnd type="none" w="med" len="med"/>
-                      <a:tailEnd type="none" w="med" len="med"/>
-                    </a:lnR>
-                    <a:lnT w="12700" cap="flat" cmpd="sng" algn="ctr">
-                      <a:solidFill>
-                        <a:srgbClr val="CBD5E0"/>
-                      </a:solidFill>
-                      <a:prstDash val="solid"/>
-                      <a:round/>
-                      <a:headEnd type="none" w="med" len="med"/>
-                      <a:tailEnd type="none" w="med" len="med"/>
-                    </a:lnT>
-                    <a:lnB w="12700" cap="flat" cmpd="sng" algn="ctr">
-                      <a:solidFill>
-                        <a:srgbClr val="CBD5E0"/>
-                      </a:solidFill>
-                      <a:prstDash val="solid"/>
-                      <a:round/>
-                      <a:headEnd type="none" w="med" len="med"/>
-                      <a:tailEnd type="none" w="med" len="med"/>
-                    </a:lnB>
-                    <a:solidFill>
-                      <a:srgbClr val="132A3A"/>
-                    </a:solidFill>
-                  </a:tcPr>
-                </a:tc>
-                <a:tc>
-                  <a:txBody>
-                    <a:bodyPr/>
-                    <a:lstStyle/>
-                    <a:p>
-                      <a:pPr algn="ctr" indent="0" marL="0">
-                        <a:buNone/>
-                      </a:pPr>
-                      <a:r>
-                        <a:rPr lang="en-US" sz="1000" b="1" dirty="0">
-                          <a:solidFill>
-                            <a:srgbClr val="FFFFFF"/>
-                          </a:solidFill>
-                        </a:rPr>
-                        <a:t>관리비(만원)</a:t>
                       </a:r>
                       <a:endParaRPr lang="en-US" sz="1000" dirty="0"/>
                     </a:p>
@@ -9829,17 +9767,6 @@
                       <a:pPr algn="ctr" indent="0" marL="0">
                         <a:buNone/>
                       </a:pPr>
-                      <a:r>
-                        <a:rPr lang="en-US" sz="850" dirty="0">
-                          <a:solidFill>
-                            <a:srgbClr val="2B2B2B"/>
-                          </a:solidFill>
-                          <a:latin typeface="맑은 고딕" pitchFamily="34" charset="0"/>
-                          <a:ea typeface="맑은 고딕" pitchFamily="34" charset="-122"/>
-                          <a:cs typeface="맑은 고딕" pitchFamily="34" charset="-120"/>
-                        </a:rPr>
-                        <a:t>-</a:t>
-                      </a:r>
                       <a:endParaRPr lang="en-US" sz="850" dirty="0">
                         <a:latin typeface="맑은 고딕" charset="0"/>
                         <a:ea typeface="맑은 고딕" charset="0"/>
@@ -10500,17 +10427,6 @@
                       <a:pPr algn="ctr" indent="0" marL="0">
                         <a:buNone/>
                       </a:pPr>
-                      <a:r>
-                        <a:rPr lang="en-US" sz="850" dirty="0">
-                          <a:solidFill>
-                            <a:srgbClr val="2B2B2B"/>
-                          </a:solidFill>
-                          <a:latin typeface="맑은 고딕" pitchFamily="34" charset="0"/>
-                          <a:ea typeface="맑은 고딕" pitchFamily="34" charset="-122"/>
-                          <a:cs typeface="맑은 고딕" pitchFamily="34" charset="-120"/>
-                        </a:rPr>
-                        <a:t>-</a:t>
-                      </a:r>
                       <a:endParaRPr lang="en-US" sz="850" dirty="0">
                         <a:latin typeface="맑은 고딕" charset="0"/>
                         <a:ea typeface="맑은 고딕" charset="0"/>
@@ -11180,7 +11096,7 @@
                           <a:ea typeface="맑은 고딕" pitchFamily="34" charset="-122"/>
                           <a:cs typeface="맑은 고딕" pitchFamily="34" charset="-120"/>
                         </a:rPr>
-                        <a:t>-</a:t>
+                        <a:t>공실</a:t>
                       </a:r>
                       <a:endParaRPr lang="en-US" sz="850" dirty="0">
                         <a:latin typeface="맑은 고딕" charset="0"/>
@@ -11239,17 +11155,6 @@
                       <a:pPr algn="ctr" indent="0" marL="0">
                         <a:buNone/>
                       </a:pPr>
-                      <a:r>
-                        <a:rPr lang="en-US" sz="850" b="1" dirty="0">
-                          <a:solidFill>
-                            <a:srgbClr val="B05A2E"/>
-                          </a:solidFill>
-                          <a:latin typeface="맑은 고딕" pitchFamily="34" charset="0"/>
-                          <a:ea typeface="맑은 고딕" pitchFamily="34" charset="-122"/>
-                          <a:cs typeface="맑은 고딕" pitchFamily="34" charset="-120"/>
-                        </a:rPr>
-                        <a:t>공실</a:t>
-                      </a:r>
                       <a:endParaRPr lang="en-US" sz="850" dirty="0">
                         <a:latin typeface="맑은 고딕" charset="0"/>
                         <a:ea typeface="맑은 고딕" charset="0"/>
@@ -11853,17 +11758,6 @@
                       <a:pPr algn="ctr" indent="0" marL="0">
                         <a:buNone/>
                       </a:pPr>
-                      <a:r>
-                        <a:rPr lang="en-US" sz="850" dirty="0">
-                          <a:solidFill>
-                            <a:srgbClr val="2B2B2B"/>
-                          </a:solidFill>
-                          <a:latin typeface="맑은 고딕" pitchFamily="34" charset="0"/>
-                          <a:ea typeface="맑은 고딕" pitchFamily="34" charset="-122"/>
-                          <a:cs typeface="맑은 고딕" pitchFamily="34" charset="-120"/>
-                        </a:rPr>
-                        <a:t>-</a:t>
-                      </a:r>
                       <a:endParaRPr lang="en-US" sz="850" dirty="0">
                         <a:latin typeface="맑은 고딕" charset="0"/>
                         <a:ea typeface="맑은 고딕" charset="0"/>
@@ -12533,7 +12427,7 @@
                           <a:ea typeface="맑은 고딕" pitchFamily="34" charset="-122"/>
                           <a:cs typeface="맑은 고딕" pitchFamily="34" charset="-120"/>
                         </a:rPr>
-                        <a:t>-</a:t>
+                        <a:t>공실</a:t>
                       </a:r>
                       <a:endParaRPr lang="en-US" sz="850" dirty="0">
                         <a:latin typeface="맑은 고딕" charset="0"/>
@@ -12592,17 +12486,6 @@
                       <a:pPr algn="ctr" indent="0" marL="0">
                         <a:buNone/>
                       </a:pPr>
-                      <a:r>
-                        <a:rPr lang="en-US" sz="850" b="1" dirty="0">
-                          <a:solidFill>
-                            <a:srgbClr val="B05A2E"/>
-                          </a:solidFill>
-                          <a:latin typeface="맑은 고딕" pitchFamily="34" charset="0"/>
-                          <a:ea typeface="맑은 고딕" pitchFamily="34" charset="-122"/>
-                          <a:cs typeface="맑은 고딕" pitchFamily="34" charset="-120"/>
-                        </a:rPr>
-                        <a:t>공실</a:t>
-                      </a:r>
                       <a:endParaRPr lang="en-US" sz="850" dirty="0">
                         <a:latin typeface="맑은 고딕" charset="0"/>
                         <a:ea typeface="맑은 고딕" charset="0"/>
@@ -13215,7 +13098,7 @@
                           <a:ea typeface="맑은 고딕" pitchFamily="34" charset="-122"/>
                           <a:cs typeface="맑은 고딕" pitchFamily="34" charset="-120"/>
                         </a:rPr>
-                        <a:t>-</a:t>
+                        <a:t>공실</a:t>
                       </a:r>
                       <a:endParaRPr lang="en-US" sz="850" dirty="0">
                         <a:latin typeface="맑은 고딕" charset="0"/>
@@ -13274,17 +13157,6 @@
                       <a:pPr algn="ctr" indent="0" marL="0">
                         <a:buNone/>
                       </a:pPr>
-                      <a:r>
-                        <a:rPr lang="en-US" sz="850" b="1" dirty="0">
-                          <a:solidFill>
-                            <a:srgbClr val="B05A2E"/>
-                          </a:solidFill>
-                          <a:latin typeface="맑은 고딕" pitchFamily="34" charset="0"/>
-                          <a:ea typeface="맑은 고딕" pitchFamily="34" charset="-122"/>
-                          <a:cs typeface="맑은 고딕" pitchFamily="34" charset="-120"/>
-                        </a:rPr>
-                        <a:t>공실</a:t>
-                      </a:r>
                       <a:endParaRPr lang="en-US" sz="850" dirty="0">
                         <a:latin typeface="맑은 고딕" charset="0"/>
                         <a:ea typeface="맑은 고딕" charset="0"/>
@@ -13888,17 +13760,6 @@
                       <a:pPr algn="ctr" indent="0" marL="0">
                         <a:buNone/>
                       </a:pPr>
-                      <a:r>
-                        <a:rPr lang="en-US" sz="850" dirty="0">
-                          <a:solidFill>
-                            <a:srgbClr val="2B2B2B"/>
-                          </a:solidFill>
-                          <a:latin typeface="맑은 고딕" pitchFamily="34" charset="0"/>
-                          <a:ea typeface="맑은 고딕" pitchFamily="34" charset="-122"/>
-                          <a:cs typeface="맑은 고딕" pitchFamily="34" charset="-120"/>
-                        </a:rPr>
-                        <a:t>-</a:t>
-                      </a:r>
                       <a:endParaRPr lang="en-US" sz="850" dirty="0">
                         <a:latin typeface="맑은 고딕" charset="0"/>
                         <a:ea typeface="맑은 고딕" charset="0"/>
@@ -14559,17 +14420,6 @@
                       <a:pPr algn="ctr" indent="0" marL="0">
                         <a:buNone/>
                       </a:pPr>
-                      <a:r>
-                        <a:rPr lang="en-US" sz="850" dirty="0">
-                          <a:solidFill>
-                            <a:srgbClr val="2B2B2B"/>
-                          </a:solidFill>
-                          <a:latin typeface="맑은 고딕" pitchFamily="34" charset="0"/>
-                          <a:ea typeface="맑은 고딕" pitchFamily="34" charset="-122"/>
-                          <a:cs typeface="맑은 고딕" pitchFamily="34" charset="-120"/>
-                        </a:rPr>
-                        <a:t>-</a:t>
-                      </a:r>
                       <a:endParaRPr lang="en-US" sz="850" dirty="0">
                         <a:latin typeface="맑은 고딕" charset="0"/>
                         <a:ea typeface="맑은 고딕" charset="0"/>

--- a/docs/test/golden-outputs/p3-seocho-r3/seocho_owner_r3_basic.pptx
+++ b/docs/test/golden-outputs/p3-seocho-r3/seocho_owner_r3_basic.pptx
@@ -2110,7 +2110,7 @@
                 <a:ea typeface="맑은 고딕" pitchFamily="34" charset="-122"/>
                 <a:cs typeface="맑은 고딕" pitchFamily="34" charset="-120"/>
               </a:rPr>
-              <a:t>2026.09.23  |  담당자  |  CREDEAL</a:t>
+              <a:t>2026.09.24  |  담당자  |  CREDEAL</a:t>
             </a:r>
             <a:endParaRPr lang="en-US" sz="900" dirty="0"/>
           </a:p>
